--- a/dist/weeks-포트폴리오제작/포트폴리오제작_11주차_편집디자인2.pptx
+++ b/dist/weeks-포트폴리오제작/포트폴리오제작_11주차_편집디자인2.pptx
@@ -14,10 +14,9 @@
     <p:sldId id="262" r:id="rId8"/>
     <p:sldId id="263" r:id="rId9"/>
     <p:sldId id="264" r:id="rId10"/>
-    <p:sldId id="265" r:id="rId11"/>
   </p:sldIdLst>
   <p:notesMasterIdLst>
-    <p:notesMasterId r:id="rId12"/>
+    <p:notesMasterId r:id="rId11"/>
   </p:notesMasterIdLst>
   <p:sldSz cx="12192000" cy="6858000"/>
   <p:notesSz cx="6858000" cy="12192000"/>
@@ -554,95 +553,6 @@
 </p:notes>
 </file>
 
-<file path=ppt/notesSlides/notesSlide10.xml><?xml version="1.0" encoding="utf-8"?>
-<p:notes xmlns:a="http://schemas.openxmlformats.org/drawingml/2006/main" xmlns:r="http://schemas.openxmlformats.org/officeDocument/2006/relationships" xmlns:p="http://schemas.openxmlformats.org/presentationml/2006/main">
-  <p:cSld>
-    <p:spTree>
-      <p:nvGrpSpPr>
-        <p:cNvPr id="1" name=""/>
-        <p:cNvGrpSpPr/>
-        <p:nvPr/>
-      </p:nvGrpSpPr>
-      <p:grpSpPr>
-        <a:xfrm>
-          <a:off x="0" y="0"/>
-          <a:ext cx="0" cy="0"/>
-          <a:chOff x="0" y="0"/>
-          <a:chExt cx="0" cy="0"/>
-        </a:xfrm>
-      </p:grpSpPr>
-      <p:sp>
-        <p:nvSpPr>
-          <p:cNvPr id="2" name="Slide Image Placeholder 1"/>
-          <p:cNvSpPr>
-            <a:spLocks noGrp="1" noRot="1" noChangeAspect="1"/>
-          </p:cNvSpPr>
-          <p:nvPr>
-            <p:ph type="sldImg"/>
-          </p:nvPr>
-        </p:nvSpPr>
-        <p:spPr/>
-      </p:sp>
-      <p:sp>
-        <p:nvSpPr>
-          <p:cNvPr id="3" name="Notes Placeholder 2"/>
-          <p:cNvSpPr>
-            <a:spLocks noGrp="1"/>
-          </p:cNvSpPr>
-          <p:nvPr>
-            <p:ph type="body" idx="1"/>
-          </p:nvPr>
-        </p:nvSpPr>
-        <p:spPr/>
-        <p:txBody>
-          <a:bodyPr/>
-          <a:lstStyle/>
-          <a:p>
-            <a:r>
-              <a:rPr lang="en-US" dirty="0"/>
-              <a:t>[운영 메모]
-플랫폼을 수업 시간에 고르기 시작하면 60분을 다 쓴다. 미리 정해 오게 할 것.</a:t>
-            </a:r>
-            <a:endParaRPr lang="en-US" dirty="0"/>
-          </a:p>
-        </p:txBody>
-      </p:sp>
-      <p:sp>
-        <p:nvSpPr>
-          <p:cNvPr id="4" name="Slide Number Placeholder 3"/>
-          <p:cNvSpPr>
-            <a:spLocks noGrp="1"/>
-          </p:cNvSpPr>
-          <p:nvPr>
-            <p:ph type="sldNum" sz="quarter" idx="10"/>
-          </p:nvPr>
-        </p:nvSpPr>
-        <p:spPr/>
-        <p:txBody>
-          <a:bodyPr/>
-          <a:lstStyle/>
-          <a:p>
-            <a:fld id="{F7021451-1387-4CA6-816F-3879F97B5CBC}" type="slidenum">
-              <a:rPr lang="en-US"/>
-              <a:t>10</a:t>
-            </a:fld>
-            <a:endParaRPr lang="en-US"/>
-          </a:p>
-        </p:txBody>
-      </p:sp>
-    </p:spTree>
-    <p:extLst>
-      <p:ext uri="{BB962C8B-B14F-4D97-AF65-F5344CB8AC3E}">
-        <p14:creationId xmlns:p14="http://schemas.microsoft.com/office/powerpoint/2010/main" val="1024086991"/>
-      </p:ext>
-    </p:extLst>
-  </p:cSld>
-  <p:clrMapOvr>
-    <a:masterClrMapping/>
-  </p:clrMapOvr>
-</p:notes>
-</file>
-
 <file path=ppt/notesSlides/notesSlide2.xml><?xml version="1.0" encoding="utf-8"?>
 <p:notes xmlns:a="http://schemas.openxmlformats.org/drawingml/2006/main" xmlns:r="http://schemas.openxmlformats.org/officeDocument/2006/relationships" xmlns:p="http://schemas.openxmlformats.org/presentationml/2006/main">
   <p:cSld>
@@ -690,7 +600,7 @@
             <a:r>
               <a:rPr lang="en-US" dirty="0"/>
               <a:t>[운영 메모]
-해상도가 부족한 이미지를 가져온 학생이 반드시 있다. 대체 방법(재촬영·크롭·작게 배치)을 미리 준비해 둘 것.</a:t>
+2번이 오늘의 실질적 성과다. 톤이 통일되면 완성도가 눈에 띄게 올라간다.</a:t>
             </a:r>
             <a:endParaRPr lang="en-US" dirty="0"/>
           </a:p>
@@ -779,7 +689,7 @@
             <a:r>
               <a:rPr lang="en-US" dirty="0"/>
               <a:t>[운영 메모]
-2번이 오늘의 실질적 성과다. 톤이 통일되면 완성도가 눈에 띄게 올라간다.</a:t>
+9주차 무드보드를 각자 띄워놓고 시작하게 할 것.</a:t>
             </a:r>
             <a:endParaRPr lang="en-US" dirty="0"/>
           </a:p>
@@ -868,7 +778,7 @@
             <a:r>
               <a:rPr lang="en-US" dirty="0"/>
               <a:t>[운영 메모]
-9주차 무드보드를 각자 띄워놓고 시작하게 할 것.</a:t>
+03은 학과 특성상 인쇄 포트폴리오를 내는 학생이 있으므로 반드시 짚을 것.</a:t>
             </a:r>
             <a:endParaRPr lang="en-US" dirty="0"/>
           </a:p>
@@ -957,7 +867,7 @@
             <a:r>
               <a:rPr lang="en-US" dirty="0"/>
               <a:t>[운영 메모]
-03은 학과 특성상 인쇄 포트폴리오를 내는 학생이 있으므로 반드시 짚을 것.</a:t>
+짧은 시연 위주로.</a:t>
             </a:r>
             <a:endParaRPr lang="en-US" dirty="0"/>
           </a:p>
@@ -1046,7 +956,7 @@
             <a:r>
               <a:rPr lang="en-US" dirty="0"/>
               <a:t>[운영 메모]
-짧은 시연 위주로.</a:t>
+해상도 문제는 매년 나온다. '작게 배치'라는 현실적 대안을 제시할 것.</a:t>
             </a:r>
             <a:endParaRPr lang="en-US" dirty="0"/>
           </a:p>
@@ -1135,7 +1045,7 @@
             <a:r>
               <a:rPr lang="en-US" dirty="0"/>
               <a:t>[운영 메모]
-해상도 문제는 매년 나온다. '작게 배치'라는 현실적 대안을 제시할 것.</a:t>
+이 네 항목을 순회 지도의 체크리스트로 쓰면 빠르게 봐줄 수 있다.</a:t>
             </a:r>
             <a:endParaRPr lang="en-US" dirty="0"/>
           </a:p>
@@ -1224,7 +1134,7 @@
             <a:r>
               <a:rPr lang="en-US" dirty="0"/>
               <a:t>[운영 메모]
-이 네 항목을 순회 지도의 체크리스트로 쓰면 빠르게 봐줄 수 있다.</a:t>
+마지막 전체 훑기가 중요하다. 페이지 단위로만 보면 일관성 문제가 안 보인다.</a:t>
             </a:r>
             <a:endParaRPr lang="en-US" dirty="0"/>
           </a:p>
@@ -1313,7 +1223,7 @@
             <a:r>
               <a:rPr lang="en-US" dirty="0"/>
               <a:t>[운영 메모]
-마지막 전체 훑기가 중요하다. 페이지 단위로만 보면 일관성 문제가 안 보인다.</a:t>
+플랫폼을 수업 시간에 고르기 시작하면 60분을 다 쓴다. 미리 정해 오게 할 것.</a:t>
             </a:r>
             <a:endParaRPr lang="en-US" dirty="0"/>
           </a:p>
@@ -1857,9 +1767,9 @@
                 <a:solidFill>
                   <a:srgbClr val="111111"/>
                 </a:solidFill>
-                <a:latin typeface="Pretendard Black" pitchFamily="34" charset="0"/>
-                <a:ea typeface="Pretendard Black" pitchFamily="34" charset="-122"/>
-                <a:cs typeface="Pretendard Black" pitchFamily="34" charset="-120"/>
+                <a:latin typeface="Pretendard SemiBold" pitchFamily="34" charset="0"/>
+                <a:ea typeface="Pretendard SemiBold" pitchFamily="34" charset="-122"/>
+                <a:cs typeface="Pretendard SemiBold" pitchFamily="34" charset="-120"/>
               </a:rPr>
               <a:t>11</a:t>
             </a:r>
@@ -2007,9 +1917,9 @@
                 <a:solidFill>
                   <a:srgbClr val="111111"/>
                 </a:solidFill>
-                <a:latin typeface="Pretendard Black" pitchFamily="34" charset="0"/>
-                <a:ea typeface="Pretendard Black" pitchFamily="34" charset="-122"/>
-                <a:cs typeface="Pretendard Black" pitchFamily="34" charset="-120"/>
+                <a:latin typeface="Pretendard SemiBold" pitchFamily="34" charset="0"/>
+                <a:ea typeface="Pretendard SemiBold" pitchFamily="34" charset="-122"/>
+                <a:cs typeface="Pretendard SemiBold" pitchFamily="34" charset="-120"/>
               </a:rPr>
               <a:t>편집디자인 실습 Ⅱ</a:t>
             </a:r>
@@ -2215,7 +2125,7 @@
                 <a:ea typeface="Pretendard" pitchFamily="34" charset="-122"/>
                 <a:cs typeface="Pretendard" pitchFamily="34" charset="-120"/>
               </a:rPr>
-              <a:t>오늘</a:t>
+              <a:t>제출물</a:t>
             </a:r>
             <a:endParaRPr lang="en-US" sz="950" dirty="0"/>
           </a:p>
@@ -2254,7 +2164,7 @@
                 <a:ea typeface="Pretendard" pitchFamily="34" charset="-122"/>
                 <a:cs typeface="Pretendard" pitchFamily="34" charset="-120"/>
               </a:rPr>
-              <a:t>120분 — 강의 20분 · 이미지 보정·배치 실습 80분 · 정리 10분</a:t>
+              <a:t>포트폴리오 페이지 3장 추가</a:t>
             </a:r>
             <a:endParaRPr lang="en-US" sz="1200" dirty="0"/>
           </a:p>
@@ -2263,84 +2173,6 @@
       <p:sp>
         <p:nvSpPr>
           <p:cNvPr id="18" name="Text 16"/>
-          <p:cNvSpPr/>
-          <p:nvPr/>
-        </p:nvSpPr>
-        <p:spPr>
-          <a:xfrm>
-            <a:off x="640080" y="5413248"/>
-            <a:ext cx="914400" cy="292608"/>
-          </a:xfrm>
-          <a:prstGeom prst="rect">
-            <a:avLst/>
-          </a:prstGeom>
-          <a:noFill/>
-          <a:ln/>
-        </p:spPr>
-        <p:txBody>
-          <a:bodyPr wrap="square" lIns="0" tIns="0" rIns="0" bIns="0" rtlCol="0" anchor="ctr"/>
-          <a:lstStyle/>
-          <a:p>
-            <a:pPr indent="0" marL="0">
-              <a:buNone/>
-            </a:pPr>
-            <a:r>
-              <a:rPr lang="en-US" sz="950" spc="140" kern="0" dirty="0">
-                <a:solidFill>
-                  <a:srgbClr val="9B9B9B"/>
-                </a:solidFill>
-                <a:latin typeface="Pretendard" pitchFamily="34" charset="0"/>
-                <a:ea typeface="Pretendard" pitchFamily="34" charset="-122"/>
-                <a:cs typeface="Pretendard" pitchFamily="34" charset="-120"/>
-              </a:rPr>
-              <a:t>제출물</a:t>
-            </a:r>
-            <a:endParaRPr lang="en-US" sz="950" dirty="0"/>
-          </a:p>
-        </p:txBody>
-      </p:sp>
-      <p:sp>
-        <p:nvSpPr>
-          <p:cNvPr id="19" name="Text 17"/>
-          <p:cNvSpPr/>
-          <p:nvPr/>
-        </p:nvSpPr>
-        <p:spPr>
-          <a:xfrm>
-            <a:off x="1645920" y="5413248"/>
-            <a:ext cx="7680960" cy="292608"/>
-          </a:xfrm>
-          <a:prstGeom prst="rect">
-            <a:avLst/>
-          </a:prstGeom>
-          <a:noFill/>
-          <a:ln/>
-        </p:spPr>
-        <p:txBody>
-          <a:bodyPr wrap="square" lIns="0" tIns="0" rIns="0" bIns="0" rtlCol="0" anchor="ctr"/>
-          <a:lstStyle/>
-          <a:p>
-            <a:pPr indent="0" marL="0">
-              <a:buNone/>
-            </a:pPr>
-            <a:r>
-              <a:rPr lang="en-US" sz="1200" dirty="0">
-                <a:solidFill>
-                  <a:srgbClr val="1F1F1F"/>
-                </a:solidFill>
-                <a:latin typeface="Pretendard" pitchFamily="34" charset="0"/>
-                <a:ea typeface="Pretendard" pitchFamily="34" charset="-122"/>
-                <a:cs typeface="Pretendard" pitchFamily="34" charset="-120"/>
-              </a:rPr>
-              <a:t>포트폴리오 페이지 3장 추가</a:t>
-            </a:r>
-            <a:endParaRPr lang="en-US" sz="1200" dirty="0"/>
-          </a:p>
-        </p:txBody>
-      </p:sp>
-      <p:sp>
-        <p:nvSpPr>
-          <p:cNvPr id="20" name="Text 18"/>
           <p:cNvSpPr/>
           <p:nvPr/>
         </p:nvSpPr>
@@ -2379,7 +2211,7 @@
       </p:sp>
       <p:sp>
         <p:nvSpPr>
-          <p:cNvPr id="21" name="Shape 19"/>
+          <p:cNvPr id="19" name="Shape 17"/>
           <p:cNvSpPr/>
           <p:nvPr/>
         </p:nvSpPr>
@@ -2401,1198 +2233,6 @@
             <a:prstDash val="solid"/>
           </a:ln>
         </p:spPr>
-      </p:sp>
-    </p:spTree>
-  </p:cSld>
-  <p:clrMapOvr>
-    <a:masterClrMapping/>
-  </p:clrMapOvr>
-</p:sld>
-</file>
-
-<file path=ppt/slides/slide10.xml><?xml version="1.0" encoding="utf-8"?>
-<p:sld xmlns:a="http://schemas.openxmlformats.org/drawingml/2006/main" xmlns:r="http://schemas.openxmlformats.org/officeDocument/2006/relationships" xmlns:p="http://schemas.openxmlformats.org/presentationml/2006/main">
-  <p:cSld name="Slide 10">
-    <p:bg>
-      <p:bgPr>
-        <a:solidFill>
-          <a:srgbClr val="FFFFFF"/>
-        </a:solidFill>
-      </p:bgPr>
-    </p:bg>
-    <p:spTree>
-      <p:nvGrpSpPr>
-        <p:cNvPr id="1" name=""/>
-        <p:cNvGrpSpPr/>
-        <p:nvPr/>
-      </p:nvGrpSpPr>
-      <p:grpSpPr>
-        <a:xfrm>
-          <a:off x="0" y="0"/>
-          <a:ext cx="0" cy="0"/>
-          <a:chOff x="0" y="0"/>
-          <a:chExt cx="0" cy="0"/>
-        </a:xfrm>
-      </p:grpSpPr>
-      <p:sp>
-        <p:nvSpPr>
-          <p:cNvPr id="2" name="Text 0"/>
-          <p:cNvSpPr/>
-          <p:nvPr/>
-        </p:nvSpPr>
-        <p:spPr>
-          <a:xfrm>
-            <a:off x="640080" y="274320"/>
-            <a:ext cx="3657600" cy="219456"/>
-          </a:xfrm>
-          <a:prstGeom prst="rect">
-            <a:avLst/>
-          </a:prstGeom>
-          <a:noFill/>
-          <a:ln/>
-        </p:spPr>
-        <p:txBody>
-          <a:bodyPr wrap="square" lIns="0" tIns="0" rIns="0" bIns="0" rtlCol="0" anchor="ctr"/>
-          <a:lstStyle/>
-          <a:p>
-            <a:pPr indent="0" marL="0">
-              <a:buNone/>
-            </a:pPr>
-            <a:r>
-              <a:rPr lang="en-US" sz="900" spc="120" kern="0" dirty="0">
-                <a:solidFill>
-                  <a:srgbClr val="8A8A8A"/>
-                </a:solidFill>
-                <a:latin typeface="Pretendard" pitchFamily="34" charset="0"/>
-                <a:ea typeface="Pretendard" pitchFamily="34" charset="-122"/>
-                <a:cs typeface="Pretendard" pitchFamily="34" charset="-120"/>
-              </a:rPr>
-              <a:t>포트폴리오제작</a:t>
-            </a:r>
-            <a:endParaRPr lang="en-US" sz="900" dirty="0"/>
-          </a:p>
-        </p:txBody>
-      </p:sp>
-      <p:sp>
-        <p:nvSpPr>
-          <p:cNvPr id="3" name="Text 1"/>
-          <p:cNvSpPr/>
-          <p:nvPr/>
-        </p:nvSpPr>
-        <p:spPr>
-          <a:xfrm>
-            <a:off x="4480560" y="274320"/>
-            <a:ext cx="4572000" cy="219456"/>
-          </a:xfrm>
-          <a:prstGeom prst="rect">
-            <a:avLst/>
-          </a:prstGeom>
-          <a:noFill/>
-          <a:ln/>
-        </p:spPr>
-        <p:txBody>
-          <a:bodyPr wrap="square" lIns="0" tIns="0" rIns="0" bIns="0" rtlCol="0" anchor="ctr"/>
-          <a:lstStyle/>
-          <a:p>
-            <a:pPr algn="ctr" indent="0" marL="0">
-              <a:buNone/>
-            </a:pPr>
-            <a:r>
-              <a:rPr lang="en-US" sz="900" spc="120" kern="0" dirty="0">
-                <a:solidFill>
-                  <a:srgbClr val="8A8A8A"/>
-                </a:solidFill>
-                <a:latin typeface="Pretendard" pitchFamily="34" charset="0"/>
-                <a:ea typeface="Pretendard" pitchFamily="34" charset="-122"/>
-                <a:cs typeface="Pretendard" pitchFamily="34" charset="-120"/>
-              </a:rPr>
-              <a:t>PHASE 3 완성과 발표</a:t>
-            </a:r>
-            <a:endParaRPr lang="en-US" sz="900" dirty="0"/>
-          </a:p>
-        </p:txBody>
-      </p:sp>
-      <p:sp>
-        <p:nvSpPr>
-          <p:cNvPr id="4" name="Text 2"/>
-          <p:cNvSpPr/>
-          <p:nvPr/>
-        </p:nvSpPr>
-        <p:spPr>
-          <a:xfrm>
-            <a:off x="8808415" y="274320"/>
-            <a:ext cx="2743200" cy="219456"/>
-          </a:xfrm>
-          <a:prstGeom prst="rect">
-            <a:avLst/>
-          </a:prstGeom>
-          <a:noFill/>
-          <a:ln/>
-        </p:spPr>
-        <p:txBody>
-          <a:bodyPr wrap="square" lIns="0" tIns="0" rIns="0" bIns="0" rtlCol="0" anchor="ctr"/>
-          <a:lstStyle/>
-          <a:p>
-            <a:pPr algn="r" indent="0" marL="0">
-              <a:buNone/>
-            </a:pPr>
-            <a:r>
-              <a:rPr lang="en-US" sz="900" spc="200" kern="0" dirty="0">
-                <a:solidFill>
-                  <a:srgbClr val="8A8A8A"/>
-                </a:solidFill>
-                <a:latin typeface="Pretendard" pitchFamily="34" charset="0"/>
-                <a:ea typeface="Pretendard" pitchFamily="34" charset="-122"/>
-                <a:cs typeface="Pretendard" pitchFamily="34" charset="-120"/>
-              </a:rPr>
-              <a:t>WEEK 11</a:t>
-            </a:r>
-            <a:endParaRPr lang="en-US" sz="900" dirty="0"/>
-          </a:p>
-        </p:txBody>
-      </p:sp>
-      <p:sp>
-        <p:nvSpPr>
-          <p:cNvPr id="5" name="Shape 3"/>
-          <p:cNvSpPr/>
-          <p:nvPr/>
-        </p:nvSpPr>
-        <p:spPr>
-          <a:xfrm>
-            <a:off x="640080" y="548640"/>
-            <a:ext cx="10911535" cy="7315"/>
-          </a:xfrm>
-          <a:prstGeom prst="rect">
-            <a:avLst/>
-          </a:prstGeom>
-          <a:solidFill>
-            <a:srgbClr val="DCDCDC"/>
-          </a:solidFill>
-          <a:ln w="12700">
-            <a:solidFill>
-              <a:srgbClr val="DCDCDC"/>
-            </a:solidFill>
-            <a:prstDash val="solid"/>
-          </a:ln>
-        </p:spPr>
-      </p:sp>
-      <p:sp>
-        <p:nvSpPr>
-          <p:cNvPr id="6" name="Text 4"/>
-          <p:cNvSpPr/>
-          <p:nvPr/>
-        </p:nvSpPr>
-        <p:spPr>
-          <a:xfrm>
-            <a:off x="640080" y="640080"/>
-            <a:ext cx="10911535" cy="219456"/>
-          </a:xfrm>
-          <a:prstGeom prst="rect">
-            <a:avLst/>
-          </a:prstGeom>
-          <a:noFill/>
-          <a:ln/>
-        </p:spPr>
-        <p:txBody>
-          <a:bodyPr wrap="square" lIns="0" tIns="0" rIns="0" bIns="0" rtlCol="0" anchor="ctr"/>
-          <a:lstStyle/>
-          <a:p>
-            <a:pPr indent="0" marL="0">
-              <a:buNone/>
-            </a:pPr>
-            <a:r>
-              <a:rPr lang="en-US" sz="950" spc="260" kern="0" dirty="0">
-                <a:solidFill>
-                  <a:srgbClr val="8A8A8A"/>
-                </a:solidFill>
-                <a:latin typeface="Pretendard" pitchFamily="34" charset="0"/>
-                <a:ea typeface="Pretendard" pitchFamily="34" charset="-122"/>
-                <a:cs typeface="Pretendard" pitchFamily="34" charset="-120"/>
-              </a:rPr>
-              <a:t>HOMEWORK</a:t>
-            </a:r>
-            <a:endParaRPr lang="en-US" sz="950" dirty="0"/>
-          </a:p>
-        </p:txBody>
-      </p:sp>
-      <p:sp>
-        <p:nvSpPr>
-          <p:cNvPr id="7" name="Text 5"/>
-          <p:cNvSpPr/>
-          <p:nvPr/>
-        </p:nvSpPr>
-        <p:spPr>
-          <a:xfrm>
-            <a:off x="640080" y="859536"/>
-            <a:ext cx="10911535" cy="475488"/>
-          </a:xfrm>
-          <a:prstGeom prst="rect">
-            <a:avLst/>
-          </a:prstGeom>
-          <a:noFill/>
-          <a:ln/>
-        </p:spPr>
-        <p:txBody>
-          <a:bodyPr wrap="square" lIns="0" tIns="0" rIns="0" bIns="0" rtlCol="0" anchor="ctr"/>
-          <a:lstStyle/>
-          <a:p>
-            <a:pPr indent="0" marL="0">
-              <a:buNone/>
-            </a:pPr>
-            <a:r>
-              <a:rPr lang="en-US" sz="3000" dirty="0">
-                <a:solidFill>
-                  <a:srgbClr val="111111"/>
-                </a:solidFill>
-                <a:latin typeface="Pretendard Black" pitchFamily="34" charset="0"/>
-                <a:ea typeface="Pretendard Black" pitchFamily="34" charset="-122"/>
-                <a:cs typeface="Pretendard Black" pitchFamily="34" charset="-120"/>
-              </a:rPr>
-              <a:t>과제와 다음 주</a:t>
-            </a:r>
-            <a:endParaRPr lang="en-US" sz="3000" dirty="0"/>
-          </a:p>
-        </p:txBody>
-      </p:sp>
-      <p:sp>
-        <p:nvSpPr>
-          <p:cNvPr id="8" name="Text 6"/>
-          <p:cNvSpPr/>
-          <p:nvPr/>
-        </p:nvSpPr>
-        <p:spPr>
-          <a:xfrm>
-            <a:off x="640080" y="1371600"/>
-            <a:ext cx="10911535" cy="219456"/>
-          </a:xfrm>
-          <a:prstGeom prst="rect">
-            <a:avLst/>
-          </a:prstGeom>
-          <a:noFill/>
-          <a:ln/>
-        </p:spPr>
-        <p:txBody>
-          <a:bodyPr wrap="square" lIns="0" tIns="0" rIns="0" bIns="0" rtlCol="0" anchor="ctr"/>
-          <a:lstStyle/>
-          <a:p>
-            <a:pPr indent="0" marL="0">
-              <a:buNone/>
-            </a:pPr>
-            <a:r>
-              <a:rPr lang="en-US" sz="1150" dirty="0">
-                <a:solidFill>
-                  <a:srgbClr val="6E6E6E"/>
-                </a:solidFill>
-                <a:latin typeface="Pretendard" pitchFamily="34" charset="0"/>
-                <a:ea typeface="Pretendard" pitchFamily="34" charset="-122"/>
-                <a:cs typeface="Pretendard" pitchFamily="34" charset="-120"/>
-              </a:rPr>
-              <a:t>12주차는 온라인 포트폴리오를 만듭니다.</a:t>
-            </a:r>
-            <a:endParaRPr lang="en-US" sz="1150" dirty="0"/>
-          </a:p>
-        </p:txBody>
-      </p:sp>
-      <p:sp>
-        <p:nvSpPr>
-          <p:cNvPr id="9" name="Shape 7"/>
-          <p:cNvSpPr/>
-          <p:nvPr/>
-        </p:nvSpPr>
-        <p:spPr>
-          <a:xfrm>
-            <a:off x="640080" y="1719072"/>
-            <a:ext cx="6309360" cy="896112"/>
-          </a:xfrm>
-          <a:prstGeom prst="rect">
-            <a:avLst/>
-          </a:prstGeom>
-          <a:solidFill>
-            <a:srgbClr val="FFFFFF"/>
-          </a:solidFill>
-          <a:ln w="12700">
-            <a:solidFill>
-              <a:srgbClr val="DCDCDC"/>
-            </a:solidFill>
-            <a:prstDash val="solid"/>
-          </a:ln>
-        </p:spPr>
-      </p:sp>
-      <p:sp>
-        <p:nvSpPr>
-          <p:cNvPr id="10" name="Shape 8"/>
-          <p:cNvSpPr/>
-          <p:nvPr/>
-        </p:nvSpPr>
-        <p:spPr>
-          <a:xfrm>
-            <a:off x="969264" y="1993392"/>
-            <a:ext cx="329184" cy="329184"/>
-          </a:xfrm>
-          <a:prstGeom prst="ellipse">
-            <a:avLst/>
-          </a:prstGeom>
-          <a:solidFill>
-            <a:srgbClr val="111111"/>
-          </a:solidFill>
-          <a:ln w="12700">
-            <a:solidFill>
-              <a:srgbClr val="111111"/>
-            </a:solidFill>
-            <a:prstDash val="solid"/>
-          </a:ln>
-        </p:spPr>
-      </p:sp>
-      <p:sp>
-        <p:nvSpPr>
-          <p:cNvPr id="11" name="Text 9"/>
-          <p:cNvSpPr/>
-          <p:nvPr/>
-        </p:nvSpPr>
-        <p:spPr>
-          <a:xfrm>
-            <a:off x="969264" y="1993392"/>
-            <a:ext cx="329184" cy="329184"/>
-          </a:xfrm>
-          <a:prstGeom prst="rect">
-            <a:avLst/>
-          </a:prstGeom>
-          <a:noFill/>
-          <a:ln/>
-        </p:spPr>
-        <p:txBody>
-          <a:bodyPr wrap="square" lIns="0" tIns="0" rIns="0" bIns="0" rtlCol="0" anchor="ctr"/>
-          <a:lstStyle/>
-          <a:p>
-            <a:pPr algn="ctr" indent="0" marL="0">
-              <a:buNone/>
-            </a:pPr>
-            <a:r>
-              <a:rPr lang="en-US" sz="1100" b="1" dirty="0">
-                <a:solidFill>
-                  <a:srgbClr val="FFFFFF"/>
-                </a:solidFill>
-                <a:latin typeface="Pretendard" pitchFamily="34" charset="0"/>
-                <a:ea typeface="Pretendard" pitchFamily="34" charset="-122"/>
-                <a:cs typeface="Pretendard" pitchFamily="34" charset="-120"/>
-              </a:rPr>
-              <a:t>1</a:t>
-            </a:r>
-            <a:endParaRPr lang="en-US" sz="1100" dirty="0"/>
-          </a:p>
-        </p:txBody>
-      </p:sp>
-      <p:sp>
-        <p:nvSpPr>
-          <p:cNvPr id="12" name="Text 10"/>
-          <p:cNvSpPr/>
-          <p:nvPr/>
-        </p:nvSpPr>
-        <p:spPr>
-          <a:xfrm>
-            <a:off x="1426464" y="1810512"/>
-            <a:ext cx="5175504" cy="329184"/>
-          </a:xfrm>
-          <a:prstGeom prst="rect">
-            <a:avLst/>
-          </a:prstGeom>
-          <a:noFill/>
-          <a:ln/>
-        </p:spPr>
-        <p:txBody>
-          <a:bodyPr wrap="square" lIns="0" tIns="0" rIns="0" bIns="0" rtlCol="0" anchor="ctr"/>
-          <a:lstStyle/>
-          <a:p>
-            <a:pPr indent="0" marL="0">
-              <a:buNone/>
-            </a:pPr>
-            <a:r>
-              <a:rPr lang="en-US" sz="1400" dirty="0">
-                <a:solidFill>
-                  <a:srgbClr val="111111"/>
-                </a:solidFill>
-                <a:latin typeface="Pretendard Black" pitchFamily="34" charset="0"/>
-                <a:ea typeface="Pretendard Black" pitchFamily="34" charset="-122"/>
-                <a:cs typeface="Pretendard Black" pitchFamily="34" charset="-120"/>
-              </a:rPr>
-              <a:t>포트폴리오 페이지 3장 추가</a:t>
-            </a:r>
-            <a:endParaRPr lang="en-US" sz="1400" dirty="0"/>
-          </a:p>
-        </p:txBody>
-      </p:sp>
-      <p:sp>
-        <p:nvSpPr>
-          <p:cNvPr id="13" name="Text 11"/>
-          <p:cNvSpPr/>
-          <p:nvPr/>
-        </p:nvSpPr>
-        <p:spPr>
-          <a:xfrm>
-            <a:off x="1426464" y="2121408"/>
-            <a:ext cx="5175504" cy="420624"/>
-          </a:xfrm>
-          <a:prstGeom prst="rect">
-            <a:avLst/>
-          </a:prstGeom>
-          <a:noFill/>
-          <a:ln/>
-        </p:spPr>
-        <p:txBody>
-          <a:bodyPr wrap="square" lIns="0" tIns="0" rIns="0" bIns="0" rtlCol="0" anchor="t"/>
-          <a:lstStyle/>
-          <a:p>
-            <a:pPr indent="0" marL="0">
-              <a:lnSpc>
-                <a:spcPct val="122000"/>
-              </a:lnSpc>
-              <a:buNone/>
-            </a:pPr>
-            <a:r>
-              <a:rPr lang="en-US" sz="1100" dirty="0">
-                <a:solidFill>
-                  <a:srgbClr val="6E6E6E"/>
-                </a:solidFill>
-                <a:latin typeface="Pretendard" pitchFamily="34" charset="0"/>
-                <a:ea typeface="Pretendard" pitchFamily="34" charset="-122"/>
-                <a:cs typeface="Pretendard" pitchFamily="34" charset="-120"/>
-              </a:rPr>
-              <a:t>결과 페이지와 나머지 프로젝트 페이지를 만듭니다. 10주차분과 합쳐 총 6장이 됩니다.</a:t>
-            </a:r>
-            <a:endParaRPr lang="en-US" sz="1100" dirty="0"/>
-          </a:p>
-        </p:txBody>
-      </p:sp>
-      <p:sp>
-        <p:nvSpPr>
-          <p:cNvPr id="14" name="Shape 12"/>
-          <p:cNvSpPr/>
-          <p:nvPr/>
-        </p:nvSpPr>
-        <p:spPr>
-          <a:xfrm>
-            <a:off x="640080" y="2743200"/>
-            <a:ext cx="6309360" cy="896112"/>
-          </a:xfrm>
-          <a:prstGeom prst="rect">
-            <a:avLst/>
-          </a:prstGeom>
-          <a:solidFill>
-            <a:srgbClr val="FFFFFF"/>
-          </a:solidFill>
-          <a:ln w="12700">
-            <a:solidFill>
-              <a:srgbClr val="DCDCDC"/>
-            </a:solidFill>
-            <a:prstDash val="solid"/>
-          </a:ln>
-        </p:spPr>
-      </p:sp>
-      <p:sp>
-        <p:nvSpPr>
-          <p:cNvPr id="15" name="Shape 13"/>
-          <p:cNvSpPr/>
-          <p:nvPr/>
-        </p:nvSpPr>
-        <p:spPr>
-          <a:xfrm>
-            <a:off x="969264" y="3017520"/>
-            <a:ext cx="329184" cy="329184"/>
-          </a:xfrm>
-          <a:prstGeom prst="ellipse">
-            <a:avLst/>
-          </a:prstGeom>
-          <a:solidFill>
-            <a:srgbClr val="111111"/>
-          </a:solidFill>
-          <a:ln w="12700">
-            <a:solidFill>
-              <a:srgbClr val="111111"/>
-            </a:solidFill>
-            <a:prstDash val="solid"/>
-          </a:ln>
-        </p:spPr>
-      </p:sp>
-      <p:sp>
-        <p:nvSpPr>
-          <p:cNvPr id="16" name="Text 14"/>
-          <p:cNvSpPr/>
-          <p:nvPr/>
-        </p:nvSpPr>
-        <p:spPr>
-          <a:xfrm>
-            <a:off x="969264" y="3017520"/>
-            <a:ext cx="329184" cy="329184"/>
-          </a:xfrm>
-          <a:prstGeom prst="rect">
-            <a:avLst/>
-          </a:prstGeom>
-          <a:noFill/>
-          <a:ln/>
-        </p:spPr>
-        <p:txBody>
-          <a:bodyPr wrap="square" lIns="0" tIns="0" rIns="0" bIns="0" rtlCol="0" anchor="ctr"/>
-          <a:lstStyle/>
-          <a:p>
-            <a:pPr algn="ctr" indent="0" marL="0">
-              <a:buNone/>
-            </a:pPr>
-            <a:r>
-              <a:rPr lang="en-US" sz="1100" b="1" dirty="0">
-                <a:solidFill>
-                  <a:srgbClr val="FFFFFF"/>
-                </a:solidFill>
-                <a:latin typeface="Pretendard" pitchFamily="34" charset="0"/>
-                <a:ea typeface="Pretendard" pitchFamily="34" charset="-122"/>
-                <a:cs typeface="Pretendard" pitchFamily="34" charset="-120"/>
-              </a:rPr>
-              <a:t>2</a:t>
-            </a:r>
-            <a:endParaRPr lang="en-US" sz="1100" dirty="0"/>
-          </a:p>
-        </p:txBody>
-      </p:sp>
-      <p:sp>
-        <p:nvSpPr>
-          <p:cNvPr id="17" name="Text 15"/>
-          <p:cNvSpPr/>
-          <p:nvPr/>
-        </p:nvSpPr>
-        <p:spPr>
-          <a:xfrm>
-            <a:off x="1426464" y="2834640"/>
-            <a:ext cx="5175504" cy="329184"/>
-          </a:xfrm>
-          <a:prstGeom prst="rect">
-            <a:avLst/>
-          </a:prstGeom>
-          <a:noFill/>
-          <a:ln/>
-        </p:spPr>
-        <p:txBody>
-          <a:bodyPr wrap="square" lIns="0" tIns="0" rIns="0" bIns="0" rtlCol="0" anchor="ctr"/>
-          <a:lstStyle/>
-          <a:p>
-            <a:pPr indent="0" marL="0">
-              <a:buNone/>
-            </a:pPr>
-            <a:r>
-              <a:rPr lang="en-US" sz="1400" dirty="0">
-                <a:solidFill>
-                  <a:srgbClr val="111111"/>
-                </a:solidFill>
-                <a:latin typeface="Pretendard Black" pitchFamily="34" charset="0"/>
-                <a:ea typeface="Pretendard Black" pitchFamily="34" charset="-122"/>
-                <a:cs typeface="Pretendard Black" pitchFamily="34" charset="-120"/>
-              </a:rPr>
-              <a:t>플랫폼 후보 정하기</a:t>
-            </a:r>
-            <a:endParaRPr lang="en-US" sz="1400" dirty="0"/>
-          </a:p>
-        </p:txBody>
-      </p:sp>
-      <p:sp>
-        <p:nvSpPr>
-          <p:cNvPr id="18" name="Text 16"/>
-          <p:cNvSpPr/>
-          <p:nvPr/>
-        </p:nvSpPr>
-        <p:spPr>
-          <a:xfrm>
-            <a:off x="1426464" y="3145536"/>
-            <a:ext cx="5175504" cy="420624"/>
-          </a:xfrm>
-          <a:prstGeom prst="rect">
-            <a:avLst/>
-          </a:prstGeom>
-          <a:noFill/>
-          <a:ln/>
-        </p:spPr>
-        <p:txBody>
-          <a:bodyPr wrap="square" lIns="0" tIns="0" rIns="0" bIns="0" rtlCol="0" anchor="t"/>
-          <a:lstStyle/>
-          <a:p>
-            <a:pPr indent="0" marL="0">
-              <a:lnSpc>
-                <a:spcPct val="122000"/>
-              </a:lnSpc>
-              <a:buNone/>
-            </a:pPr>
-            <a:r>
-              <a:rPr lang="en-US" sz="1100" dirty="0">
-                <a:solidFill>
-                  <a:srgbClr val="6E6E6E"/>
-                </a:solidFill>
-                <a:latin typeface="Pretendard" pitchFamily="34" charset="0"/>
-                <a:ea typeface="Pretendard" pitchFamily="34" charset="-122"/>
-                <a:cs typeface="Pretendard" pitchFamily="34" charset="-120"/>
-              </a:rPr>
-              <a:t>12주차 실습 전에 노션 · 웹빌더 · PDF 중 어디로 갈지 후보를 정해 오세요.</a:t>
-            </a:r>
-            <a:endParaRPr lang="en-US" sz="1100" dirty="0"/>
-          </a:p>
-        </p:txBody>
-      </p:sp>
-      <p:sp>
-        <p:nvSpPr>
-          <p:cNvPr id="19" name="Shape 17"/>
-          <p:cNvSpPr/>
-          <p:nvPr/>
-        </p:nvSpPr>
-        <p:spPr>
-          <a:xfrm>
-            <a:off x="640080" y="3785616"/>
-            <a:ext cx="6309360" cy="7315"/>
-          </a:xfrm>
-          <a:prstGeom prst="rect">
-            <a:avLst/>
-          </a:prstGeom>
-          <a:solidFill>
-            <a:srgbClr val="111111"/>
-          </a:solidFill>
-          <a:ln w="12700">
-            <a:solidFill>
-              <a:srgbClr val="111111"/>
-            </a:solidFill>
-            <a:prstDash val="solid"/>
-          </a:ln>
-        </p:spPr>
-      </p:sp>
-      <p:sp>
-        <p:nvSpPr>
-          <p:cNvPr id="20" name="Text 18"/>
-          <p:cNvSpPr/>
-          <p:nvPr/>
-        </p:nvSpPr>
-        <p:spPr>
-          <a:xfrm>
-            <a:off x="640080" y="3877056"/>
-            <a:ext cx="6309360" cy="329184"/>
-          </a:xfrm>
-          <a:prstGeom prst="rect">
-            <a:avLst/>
-          </a:prstGeom>
-          <a:noFill/>
-          <a:ln/>
-        </p:spPr>
-        <p:txBody>
-          <a:bodyPr wrap="square" lIns="0" tIns="0" rIns="0" bIns="0" rtlCol="0" anchor="ctr"/>
-          <a:lstStyle/>
-          <a:p>
-            <a:pPr indent="0" marL="0">
-              <a:buNone/>
-            </a:pPr>
-            <a:r>
-              <a:rPr lang="en-US" sz="1200" b="1" dirty="0">
-                <a:solidFill>
-                  <a:srgbClr val="111111"/>
-                </a:solidFill>
-                <a:latin typeface="Pretendard" pitchFamily="34" charset="0"/>
-                <a:ea typeface="Pretendard" pitchFamily="34" charset="-122"/>
-                <a:cs typeface="Pretendard" pitchFamily="34" charset="-120"/>
-              </a:rPr>
-              <a:t>제출 — 12주차 수업 전까지 · 총 6장 제출</a:t>
-            </a:r>
-            <a:endParaRPr lang="en-US" sz="1200" dirty="0"/>
-          </a:p>
-        </p:txBody>
-      </p:sp>
-      <p:sp>
-        <p:nvSpPr>
-          <p:cNvPr id="21" name="Shape 19"/>
-          <p:cNvSpPr/>
-          <p:nvPr/>
-        </p:nvSpPr>
-        <p:spPr>
-          <a:xfrm>
-            <a:off x="7351776" y="1719072"/>
-            <a:ext cx="4199839" cy="3803904"/>
-          </a:xfrm>
-          <a:prstGeom prst="rect">
-            <a:avLst/>
-          </a:prstGeom>
-          <a:solidFill>
-            <a:srgbClr val="111111"/>
-          </a:solidFill>
-          <a:ln w="12700">
-            <a:solidFill>
-              <a:srgbClr val="111111"/>
-            </a:solidFill>
-            <a:prstDash val="solid"/>
-          </a:ln>
-        </p:spPr>
-      </p:sp>
-      <p:sp>
-        <p:nvSpPr>
-          <p:cNvPr id="22" name="Text 20"/>
-          <p:cNvSpPr/>
-          <p:nvPr/>
-        </p:nvSpPr>
-        <p:spPr>
-          <a:xfrm>
-            <a:off x="7735824" y="1993392"/>
-            <a:ext cx="3431743" cy="256032"/>
-          </a:xfrm>
-          <a:prstGeom prst="rect">
-            <a:avLst/>
-          </a:prstGeom>
-          <a:noFill/>
-          <a:ln/>
-        </p:spPr>
-        <p:txBody>
-          <a:bodyPr wrap="square" lIns="0" tIns="0" rIns="0" bIns="0" rtlCol="0" anchor="ctr"/>
-          <a:lstStyle/>
-          <a:p>
-            <a:pPr indent="0" marL="0">
-              <a:buNone/>
-            </a:pPr>
-            <a:r>
-              <a:rPr lang="en-US" sz="950" spc="260" kern="0" dirty="0">
-                <a:solidFill>
-                  <a:srgbClr val="9A9A9A"/>
-                </a:solidFill>
-                <a:latin typeface="Pretendard" pitchFamily="34" charset="0"/>
-                <a:ea typeface="Pretendard" pitchFamily="34" charset="-122"/>
-                <a:cs typeface="Pretendard" pitchFamily="34" charset="-120"/>
-              </a:rPr>
-              <a:t>NEXT WEEK</a:t>
-            </a:r>
-            <a:endParaRPr lang="en-US" sz="950" dirty="0"/>
-          </a:p>
-        </p:txBody>
-      </p:sp>
-      <p:sp>
-        <p:nvSpPr>
-          <p:cNvPr id="23" name="Text 21"/>
-          <p:cNvSpPr/>
-          <p:nvPr/>
-        </p:nvSpPr>
-        <p:spPr>
-          <a:xfrm>
-            <a:off x="7735824" y="2286000"/>
-            <a:ext cx="3431743" cy="402336"/>
-          </a:xfrm>
-          <a:prstGeom prst="rect">
-            <a:avLst/>
-          </a:prstGeom>
-          <a:noFill/>
-          <a:ln/>
-        </p:spPr>
-        <p:txBody>
-          <a:bodyPr wrap="square" lIns="0" tIns="0" rIns="0" bIns="0" rtlCol="0" anchor="ctr"/>
-          <a:lstStyle/>
-          <a:p>
-            <a:pPr indent="0" marL="0">
-              <a:buNone/>
-            </a:pPr>
-            <a:r>
-              <a:rPr lang="en-US" sz="2600" dirty="0">
-                <a:solidFill>
-                  <a:srgbClr val="FFFFFF"/>
-                </a:solidFill>
-                <a:latin typeface="Pretendard Light" pitchFamily="34" charset="0"/>
-                <a:ea typeface="Pretendard Light" pitchFamily="34" charset="-122"/>
-                <a:cs typeface="Pretendard Light" pitchFamily="34" charset="-120"/>
-              </a:rPr>
-              <a:t>12주차</a:t>
-            </a:r>
-            <a:endParaRPr lang="en-US" sz="2600" dirty="0"/>
-          </a:p>
-        </p:txBody>
-      </p:sp>
-      <p:sp>
-        <p:nvSpPr>
-          <p:cNvPr id="24" name="Text 22"/>
-          <p:cNvSpPr/>
-          <p:nvPr/>
-        </p:nvSpPr>
-        <p:spPr>
-          <a:xfrm>
-            <a:off x="7735824" y="2743200"/>
-            <a:ext cx="3431743" cy="512064"/>
-          </a:xfrm>
-          <a:prstGeom prst="rect">
-            <a:avLst/>
-          </a:prstGeom>
-          <a:noFill/>
-          <a:ln/>
-        </p:spPr>
-        <p:txBody>
-          <a:bodyPr wrap="square" lIns="0" tIns="0" rIns="0" bIns="0" rtlCol="0" anchor="t"/>
-          <a:lstStyle/>
-          <a:p>
-            <a:pPr indent="0" marL="0">
-              <a:lnSpc>
-                <a:spcPct val="116000"/>
-              </a:lnSpc>
-              <a:buNone/>
-            </a:pPr>
-            <a:r>
-              <a:rPr lang="en-US" sz="1700" dirty="0">
-                <a:solidFill>
-                  <a:srgbClr val="FFFFFF"/>
-                </a:solidFill>
-                <a:latin typeface="Pretendard Black" pitchFamily="34" charset="0"/>
-                <a:ea typeface="Pretendard Black" pitchFamily="34" charset="-122"/>
-                <a:cs typeface="Pretendard Black" pitchFamily="34" charset="-120"/>
-              </a:rPr>
-              <a:t>온라인 포트폴리오 제작 실습</a:t>
-            </a:r>
-            <a:endParaRPr lang="en-US" sz="1700" dirty="0"/>
-          </a:p>
-        </p:txBody>
-      </p:sp>
-      <p:sp>
-        <p:nvSpPr>
-          <p:cNvPr id="25" name="Shape 23"/>
-          <p:cNvSpPr/>
-          <p:nvPr/>
-        </p:nvSpPr>
-        <p:spPr>
-          <a:xfrm>
-            <a:off x="7735824" y="3346704"/>
-            <a:ext cx="3431743" cy="7315"/>
-          </a:xfrm>
-          <a:prstGeom prst="rect">
-            <a:avLst/>
-          </a:prstGeom>
-          <a:solidFill>
-            <a:srgbClr val="333333"/>
-          </a:solidFill>
-          <a:ln w="12700">
-            <a:solidFill>
-              <a:srgbClr val="333333"/>
-            </a:solidFill>
-            <a:prstDash val="solid"/>
-          </a:ln>
-        </p:spPr>
-      </p:sp>
-      <p:sp>
-        <p:nvSpPr>
-          <p:cNvPr id="26" name="Text 24"/>
-          <p:cNvSpPr/>
-          <p:nvPr/>
-        </p:nvSpPr>
-        <p:spPr>
-          <a:xfrm>
-            <a:off x="7735824" y="3493008"/>
-            <a:ext cx="3431743" cy="1170432"/>
-          </a:xfrm>
-          <a:prstGeom prst="rect">
-            <a:avLst/>
-          </a:prstGeom>
-          <a:noFill/>
-          <a:ln/>
-        </p:spPr>
-        <p:txBody>
-          <a:bodyPr wrap="square" lIns="0" tIns="0" rIns="0" bIns="0" rtlCol="0" anchor="t"/>
-          <a:lstStyle/>
-          <a:p>
-            <a:pPr marL="177800" indent="-177800">
-              <a:lnSpc>
-                <a:spcPct val="120000"/>
-              </a:lnSpc>
-              <a:spcAft>
-                <a:spcPts val="600"/>
-              </a:spcAft>
-              <a:buSzPct val="100000"/>
-              <a:buChar char="•"/>
-            </a:pPr>
-            <a:r>
-              <a:rPr lang="en-US" sz="1150" dirty="0">
-                <a:solidFill>
-                  <a:srgbClr val="DDDDDD"/>
-                </a:solidFill>
-                <a:latin typeface="Pretendard" pitchFamily="34" charset="0"/>
-                <a:ea typeface="Pretendard" pitchFamily="34" charset="-122"/>
-                <a:cs typeface="Pretendard" pitchFamily="34" charset="-120"/>
-              </a:rPr>
-              <a:t>플랫폼별 장단점 — 노션 · 웹빌더 · PDF</a:t>
-            </a:r>
-            <a:endParaRPr lang="en-US" sz="1150" dirty="0"/>
-          </a:p>
-          <a:p>
-            <a:pPr marL="177800" indent="-177800">
-              <a:lnSpc>
-                <a:spcPct val="120000"/>
-              </a:lnSpc>
-              <a:spcAft>
-                <a:spcPts val="600"/>
-              </a:spcAft>
-              <a:buSzPct val="100000"/>
-              <a:buChar char="•"/>
-            </a:pPr>
-            <a:r>
-              <a:rPr lang="en-US" sz="1150" dirty="0">
-                <a:solidFill>
-                  <a:srgbClr val="DDDDDD"/>
-                </a:solidFill>
-                <a:latin typeface="Pretendard" pitchFamily="34" charset="0"/>
-                <a:ea typeface="Pretendard" pitchFamily="34" charset="-122"/>
-                <a:cs typeface="Pretendard" pitchFamily="34" charset="-120"/>
-              </a:rPr>
-              <a:t>반응형 레이아웃 고려사항</a:t>
-            </a:r>
-            <a:endParaRPr lang="en-US" sz="1150" dirty="0"/>
-          </a:p>
-          <a:p>
-            <a:pPr marL="177800" indent="-177800">
-              <a:lnSpc>
-                <a:spcPct val="120000"/>
-              </a:lnSpc>
-              <a:spcAft>
-                <a:spcPts val="600"/>
-              </a:spcAft>
-              <a:buSzPct val="100000"/>
-              <a:buChar char="•"/>
-            </a:pPr>
-            <a:r>
-              <a:rPr lang="en-US" sz="1150" dirty="0">
-                <a:solidFill>
-                  <a:srgbClr val="DDDDDD"/>
-                </a:solidFill>
-                <a:latin typeface="Pretendard" pitchFamily="34" charset="0"/>
-                <a:ea typeface="Pretendard" pitchFamily="34" charset="-122"/>
-                <a:cs typeface="Pretendard" pitchFamily="34" charset="-120"/>
-              </a:rPr>
-              <a:t>업로드 및 공유 설정</a:t>
-            </a:r>
-            <a:endParaRPr lang="en-US" sz="1150" dirty="0"/>
-          </a:p>
-          <a:p>
-            <a:pPr marL="177800" indent="-177800">
-              <a:lnSpc>
-                <a:spcPct val="120000"/>
-              </a:lnSpc>
-              <a:spcAft>
-                <a:spcPts val="600"/>
-              </a:spcAft>
-              <a:buSzPct val="100000"/>
-              <a:buChar char="•"/>
-            </a:pPr>
-            <a:r>
-              <a:rPr lang="en-US" sz="1150" dirty="0">
-                <a:solidFill>
-                  <a:srgbClr val="DDDDDD"/>
-                </a:solidFill>
-                <a:latin typeface="Pretendard" pitchFamily="34" charset="0"/>
-                <a:ea typeface="Pretendard" pitchFamily="34" charset="-122"/>
-                <a:cs typeface="Pretendard" pitchFamily="34" charset="-120"/>
-              </a:rPr>
-              <a:t>온라인 초안 제작</a:t>
-            </a:r>
-            <a:endParaRPr lang="en-US" sz="1150" dirty="0"/>
-          </a:p>
-        </p:txBody>
-      </p:sp>
-      <p:sp>
-        <p:nvSpPr>
-          <p:cNvPr id="27" name="Shape 25"/>
-          <p:cNvSpPr/>
-          <p:nvPr/>
-        </p:nvSpPr>
-        <p:spPr>
-          <a:xfrm>
-            <a:off x="7735824" y="4700016"/>
-            <a:ext cx="3431743" cy="7315"/>
-          </a:xfrm>
-          <a:prstGeom prst="rect">
-            <a:avLst/>
-          </a:prstGeom>
-          <a:solidFill>
-            <a:srgbClr val="333333"/>
-          </a:solidFill>
-          <a:ln w="12700">
-            <a:solidFill>
-              <a:srgbClr val="333333"/>
-            </a:solidFill>
-            <a:prstDash val="solid"/>
-          </a:ln>
-        </p:spPr>
-      </p:sp>
-      <p:sp>
-        <p:nvSpPr>
-          <p:cNvPr id="28" name="Text 26"/>
-          <p:cNvSpPr/>
-          <p:nvPr/>
-        </p:nvSpPr>
-        <p:spPr>
-          <a:xfrm>
-            <a:off x="7735824" y="4809744"/>
-            <a:ext cx="3431743" cy="237744"/>
-          </a:xfrm>
-          <a:prstGeom prst="rect">
-            <a:avLst/>
-          </a:prstGeom>
-          <a:noFill/>
-          <a:ln/>
-        </p:spPr>
-        <p:txBody>
-          <a:bodyPr wrap="square" lIns="0" tIns="0" rIns="0" bIns="0" rtlCol="0" anchor="ctr"/>
-          <a:lstStyle/>
-          <a:p>
-            <a:pPr indent="0" marL="0">
-              <a:buNone/>
-            </a:pPr>
-            <a:r>
-              <a:rPr lang="en-US" sz="900" spc="160" kern="0" dirty="0">
-                <a:solidFill>
-                  <a:srgbClr val="9B9B9B"/>
-                </a:solidFill>
-                <a:latin typeface="Pretendard" pitchFamily="34" charset="0"/>
-                <a:ea typeface="Pretendard" pitchFamily="34" charset="-122"/>
-                <a:cs typeface="Pretendard" pitchFamily="34" charset="-120"/>
-              </a:rPr>
-              <a:t>미리 준비할 것</a:t>
-            </a:r>
-            <a:endParaRPr lang="en-US" sz="900" dirty="0"/>
-          </a:p>
-        </p:txBody>
-      </p:sp>
-      <p:sp>
-        <p:nvSpPr>
-          <p:cNvPr id="29" name="Text 27"/>
-          <p:cNvSpPr/>
-          <p:nvPr/>
-        </p:nvSpPr>
-        <p:spPr>
-          <a:xfrm>
-            <a:off x="7735824" y="5065776"/>
-            <a:ext cx="3431743" cy="457200"/>
-          </a:xfrm>
-          <a:prstGeom prst="rect">
-            <a:avLst/>
-          </a:prstGeom>
-          <a:noFill/>
-          <a:ln/>
-        </p:spPr>
-        <p:txBody>
-          <a:bodyPr wrap="square" lIns="0" tIns="0" rIns="0" bIns="0" rtlCol="0" anchor="t"/>
-          <a:lstStyle/>
-          <a:p>
-            <a:pPr indent="0" marL="0">
-              <a:lnSpc>
-                <a:spcPct val="120000"/>
-              </a:lnSpc>
-              <a:buNone/>
-            </a:pPr>
-            <a:r>
-              <a:rPr lang="en-US" sz="1100" b="1" dirty="0">
-                <a:solidFill>
-                  <a:srgbClr val="FFFFFF"/>
-                </a:solidFill>
-                <a:latin typeface="Pretendard" pitchFamily="34" charset="0"/>
-                <a:ea typeface="Pretendard" pitchFamily="34" charset="-122"/>
-                <a:cs typeface="Pretendard" pitchFamily="34" charset="-120"/>
-              </a:rPr>
-              <a:t>완성한 페이지 6장 · 플랫폼 후보 · 노트북</a:t>
-            </a:r>
-            <a:endParaRPr lang="en-US" sz="1100" dirty="0"/>
-          </a:p>
-        </p:txBody>
-      </p:sp>
-      <p:sp>
-        <p:nvSpPr>
-          <p:cNvPr id="30" name="Shape 28"/>
-          <p:cNvSpPr/>
-          <p:nvPr/>
-        </p:nvSpPr>
-        <p:spPr>
-          <a:xfrm>
-            <a:off x="640080" y="6291072"/>
-            <a:ext cx="10911535" cy="7315"/>
-          </a:xfrm>
-          <a:prstGeom prst="rect">
-            <a:avLst/>
-          </a:prstGeom>
-          <a:solidFill>
-            <a:srgbClr val="DCDCDC"/>
-          </a:solidFill>
-          <a:ln w="12700">
-            <a:solidFill>
-              <a:srgbClr val="DCDCDC"/>
-            </a:solidFill>
-            <a:prstDash val="solid"/>
-          </a:ln>
-        </p:spPr>
-      </p:sp>
-      <p:sp>
-        <p:nvSpPr>
-          <p:cNvPr id="31" name="Text 29"/>
-          <p:cNvSpPr/>
-          <p:nvPr/>
-        </p:nvSpPr>
-        <p:spPr>
-          <a:xfrm>
-            <a:off x="640080" y="6382512"/>
-            <a:ext cx="7772400" cy="237744"/>
-          </a:xfrm>
-          <a:prstGeom prst="rect">
-            <a:avLst/>
-          </a:prstGeom>
-          <a:noFill/>
-          <a:ln/>
-        </p:spPr>
-        <p:txBody>
-          <a:bodyPr wrap="square" lIns="0" tIns="0" rIns="0" bIns="0" rtlCol="0" anchor="ctr"/>
-          <a:lstStyle/>
-          <a:p>
-            <a:pPr indent="0" marL="0">
-              <a:buNone/>
-            </a:pPr>
-            <a:r>
-              <a:rPr lang="en-US" sz="850" spc="40" kern="0" dirty="0">
-                <a:solidFill>
-                  <a:srgbClr val="9B9B9B"/>
-                </a:solidFill>
-                <a:latin typeface="Pretendard" pitchFamily="34" charset="0"/>
-                <a:ea typeface="Pretendard" pitchFamily="34" charset="-122"/>
-                <a:cs typeface="Pretendard" pitchFamily="34" charset="-120"/>
-              </a:rPr>
-              <a:t>포트폴리오제작 · 11주차 편집디자인 실습 Ⅱ</a:t>
-            </a:r>
-            <a:endParaRPr lang="en-US" sz="850" dirty="0"/>
-          </a:p>
-        </p:txBody>
-      </p:sp>
-      <p:sp>
-        <p:nvSpPr>
-          <p:cNvPr id="32" name="Text 30"/>
-          <p:cNvSpPr/>
-          <p:nvPr/>
-        </p:nvSpPr>
-        <p:spPr>
-          <a:xfrm>
-            <a:off x="10271455" y="6382512"/>
-            <a:ext cx="1280160" cy="237744"/>
-          </a:xfrm>
-          <a:prstGeom prst="rect">
-            <a:avLst/>
-          </a:prstGeom>
-          <a:noFill/>
-          <a:ln/>
-        </p:spPr>
-        <p:txBody>
-          <a:bodyPr wrap="square" lIns="0" tIns="0" rIns="0" bIns="0" rtlCol="0" anchor="ctr"/>
-          <a:lstStyle/>
-          <a:p>
-            <a:pPr algn="r" indent="0" marL="0">
-              <a:buNone/>
-            </a:pPr>
-            <a:r>
-              <a:rPr lang="en-US" sz="850" spc="140" kern="0" dirty="0">
-                <a:solidFill>
-                  <a:srgbClr val="9B9B9B"/>
-                </a:solidFill>
-                <a:latin typeface="Pretendard" pitchFamily="34" charset="0"/>
-                <a:ea typeface="Pretendard" pitchFamily="34" charset="-122"/>
-                <a:cs typeface="Pretendard" pitchFamily="34" charset="-120"/>
-              </a:rPr>
-              <a:t>P.07</a:t>
-            </a:r>
-            <a:endParaRPr lang="en-US" sz="850" dirty="0"/>
-          </a:p>
-        </p:txBody>
       </p:sp>
     </p:spTree>
   </p:cSld>
@@ -3801,7 +2441,7 @@
                 <a:ea typeface="Pretendard" pitchFamily="34" charset="-122"/>
                 <a:cs typeface="Pretendard" pitchFamily="34" charset="-120"/>
               </a:rPr>
-              <a:t>TODAY</a:t>
+              <a:t>OBJECTIVES</a:t>
             </a:r>
             <a:endParaRPr lang="en-US" sz="950" dirty="0"/>
           </a:p>
@@ -3836,11 +2476,11 @@
                 <a:solidFill>
                   <a:srgbClr val="111111"/>
                 </a:solidFill>
-                <a:latin typeface="Pretendard Black" pitchFamily="34" charset="0"/>
-                <a:ea typeface="Pretendard Black" pitchFamily="34" charset="-122"/>
-                <a:cs typeface="Pretendard Black" pitchFamily="34" charset="-120"/>
-              </a:rPr>
-              <a:t>오늘의 120분</a:t>
+                <a:latin typeface="Pretendard SemiBold" pitchFamily="34" charset="0"/>
+                <a:ea typeface="Pretendard SemiBold" pitchFamily="34" charset="-122"/>
+                <a:cs typeface="Pretendard SemiBold" pitchFamily="34" charset="-120"/>
+              </a:rPr>
+              <a:t>오늘 끝나면 여러분은</a:t>
             </a:r>
             <a:endParaRPr lang="en-US" sz="3000" dirty="0"/>
           </a:p>
@@ -3848,52 +2488,13 @@
       </p:sp>
       <p:sp>
         <p:nvSpPr>
-          <p:cNvPr id="8" name="Text 6"/>
-          <p:cNvSpPr/>
-          <p:nvPr/>
-        </p:nvSpPr>
-        <p:spPr>
-          <a:xfrm>
-            <a:off x="640080" y="1371600"/>
-            <a:ext cx="10911535" cy="219456"/>
-          </a:xfrm>
-          <a:prstGeom prst="rect">
-            <a:avLst/>
-          </a:prstGeom>
-          <a:noFill/>
-          <a:ln/>
-        </p:spPr>
-        <p:txBody>
-          <a:bodyPr wrap="square" lIns="0" tIns="0" rIns="0" bIns="0" rtlCol="0" anchor="ctr"/>
-          <a:lstStyle/>
-          <a:p>
-            <a:pPr indent="0" marL="0">
-              <a:buNone/>
-            </a:pPr>
-            <a:r>
-              <a:rPr lang="en-US" sz="1150" dirty="0">
-                <a:solidFill>
-                  <a:srgbClr val="6E6E6E"/>
-                </a:solidFill>
-                <a:latin typeface="Pretendard" pitchFamily="34" charset="0"/>
-                <a:ea typeface="Pretendard" pitchFamily="34" charset="-122"/>
-                <a:cs typeface="Pretendard" pitchFamily="34" charset="-120"/>
-              </a:rPr>
-              <a:t>강의 20분 · 이미지 보정·배치 실습 80분 · 정리 10분</a:t>
-            </a:r>
-            <a:endParaRPr lang="en-US" sz="1150" dirty="0"/>
-          </a:p>
-        </p:txBody>
-      </p:sp>
-      <p:sp>
-        <p:nvSpPr>
-          <p:cNvPr id="9" name="Shape 7"/>
-          <p:cNvSpPr/>
-          <p:nvPr/>
-        </p:nvSpPr>
-        <p:spPr>
-          <a:xfrm>
-            <a:off x="640080" y="1682496"/>
+          <p:cNvPr id="8" name="Shape 6"/>
+          <p:cNvSpPr/>
+          <p:nvPr/>
+        </p:nvSpPr>
+        <p:spPr>
+          <a:xfrm>
+            <a:off x="640080" y="1664208"/>
             <a:ext cx="10911535" cy="7315"/>
           </a:xfrm>
           <a:prstGeom prst="rect">
@@ -3912,14 +2513,78 @@
       </p:sp>
       <p:sp>
         <p:nvSpPr>
+          <p:cNvPr id="9" name="Shape 7"/>
+          <p:cNvSpPr/>
+          <p:nvPr/>
+        </p:nvSpPr>
+        <p:spPr>
+          <a:xfrm>
+            <a:off x="640080" y="1810512"/>
+            <a:ext cx="310896" cy="310896"/>
+          </a:xfrm>
+          <a:prstGeom prst="ellipse">
+            <a:avLst/>
+          </a:prstGeom>
+          <a:solidFill>
+            <a:srgbClr val="FFFFFF"/>
+          </a:solidFill>
+          <a:ln w="12700">
+            <a:solidFill>
+              <a:srgbClr val="111111"/>
+            </a:solidFill>
+            <a:prstDash val="solid"/>
+          </a:ln>
+        </p:spPr>
+      </p:sp>
+      <p:sp>
+        <p:nvSpPr>
           <p:cNvPr id="10" name="Text 8"/>
           <p:cNvSpPr/>
           <p:nvPr/>
         </p:nvSpPr>
         <p:spPr>
           <a:xfrm>
-            <a:off x="640080" y="1719072"/>
-            <a:ext cx="1600200" cy="830275"/>
+            <a:off x="640080" y="1810512"/>
+            <a:ext cx="310896" cy="310896"/>
+          </a:xfrm>
+          <a:prstGeom prst="rect">
+            <a:avLst/>
+          </a:prstGeom>
+          <a:noFill/>
+          <a:ln/>
+        </p:spPr>
+        <p:txBody>
+          <a:bodyPr wrap="square" lIns="0" tIns="0" rIns="0" bIns="0" rtlCol="0" anchor="ctr"/>
+          <a:lstStyle/>
+          <a:p>
+            <a:pPr algn="ctr" indent="0" marL="0">
+              <a:buNone/>
+            </a:pPr>
+            <a:r>
+              <a:rPr lang="en-US" sz="1000" b="1" dirty="0">
+                <a:solidFill>
+                  <a:srgbClr val="111111"/>
+                </a:solidFill>
+                <a:latin typeface="Pretendard" pitchFamily="34" charset="0"/>
+                <a:ea typeface="Pretendard" pitchFamily="34" charset="-122"/>
+                <a:cs typeface="Pretendard" pitchFamily="34" charset="-120"/>
+              </a:rPr>
+              <a:t>1</a:t>
+            </a:r>
+            <a:endParaRPr lang="en-US" sz="1000" dirty="0"/>
+          </a:p>
+        </p:txBody>
+      </p:sp>
+      <p:sp>
+        <p:nvSpPr>
+          <p:cNvPr id="11" name="Text 9"/>
+          <p:cNvSpPr/>
+          <p:nvPr/>
+        </p:nvSpPr>
+        <p:spPr>
+          <a:xfrm>
+            <a:off x="1188720" y="1719072"/>
+            <a:ext cx="9875520" cy="310896"/>
           </a:xfrm>
           <a:prstGeom prst="rect">
             <a:avLst/>
@@ -3935,30 +2600,30 @@
               <a:buNone/>
             </a:pPr>
             <a:r>
-              <a:rPr lang="en-US" sz="1050" b="1" spc="60" kern="0" dirty="0">
+              <a:rPr lang="en-US" sz="1450" dirty="0">
                 <a:solidFill>
                   <a:srgbClr val="111111"/>
                 </a:solidFill>
-                <a:latin typeface="Pretendard" pitchFamily="34" charset="0"/>
-                <a:ea typeface="Pretendard" pitchFamily="34" charset="-122"/>
-                <a:cs typeface="Pretendard" pitchFamily="34" charset="-120"/>
-              </a:rPr>
-              <a:t>00:00–00:20</a:t>
-            </a:r>
-            <a:endParaRPr lang="en-US" sz="1050" dirty="0"/>
-          </a:p>
-        </p:txBody>
-      </p:sp>
-      <p:sp>
-        <p:nvSpPr>
-          <p:cNvPr id="11" name="Text 9"/>
-          <p:cNvSpPr/>
-          <p:nvPr/>
-        </p:nvSpPr>
-        <p:spPr>
-          <a:xfrm>
-            <a:off x="2377440" y="1719072"/>
-            <a:ext cx="6888175" cy="830275"/>
+                <a:latin typeface="Pretendard SemiBold" pitchFamily="34" charset="0"/>
+                <a:ea typeface="Pretendard SemiBold" pitchFamily="34" charset="-122"/>
+                <a:cs typeface="Pretendard SemiBold" pitchFamily="34" charset="-120"/>
+              </a:rPr>
+              <a:t>컬러를 규칙대로 쓸 수 있다</a:t>
+            </a:r>
+            <a:endParaRPr lang="en-US" sz="1450" dirty="0"/>
+          </a:p>
+        </p:txBody>
+      </p:sp>
+      <p:sp>
+        <p:nvSpPr>
+          <p:cNvPr id="12" name="Text 10"/>
+          <p:cNvSpPr/>
+          <p:nvPr/>
+        </p:nvSpPr>
+        <p:spPr>
+          <a:xfrm>
+            <a:off x="1188720" y="2029968"/>
+            <a:ext cx="9875520" cy="292608"/>
           </a:xfrm>
           <a:prstGeom prst="rect">
             <a:avLst/>
@@ -3974,46 +2639,7 @@
               <a:buNone/>
             </a:pPr>
             <a:r>
-              <a:rPr lang="en-US" sz="1300" b="1" dirty="0">
-                <a:solidFill>
-                  <a:srgbClr val="111111"/>
-                </a:solidFill>
-                <a:latin typeface="Pretendard" pitchFamily="34" charset="0"/>
-                <a:ea typeface="Pretendard" pitchFamily="34" charset="-122"/>
-                <a:cs typeface="Pretendard" pitchFamily="34" charset="-120"/>
-              </a:rPr>
-              <a:t>컬러 시스템 적용 강의</a:t>
-            </a:r>
-            <a:endParaRPr lang="en-US" sz="1300" dirty="0"/>
-          </a:p>
-        </p:txBody>
-      </p:sp>
-      <p:sp>
-        <p:nvSpPr>
-          <p:cNvPr id="12" name="Text 10"/>
-          <p:cNvSpPr/>
-          <p:nvPr/>
-        </p:nvSpPr>
-        <p:spPr>
-          <a:xfrm>
-            <a:off x="9265615" y="1719072"/>
-            <a:ext cx="2286000" cy="830275"/>
-          </a:xfrm>
-          <a:prstGeom prst="rect">
-            <a:avLst/>
-          </a:prstGeom>
-          <a:noFill/>
-          <a:ln/>
-        </p:spPr>
-        <p:txBody>
-          <a:bodyPr wrap="square" lIns="0" tIns="0" rIns="0" bIns="0" rtlCol="0" anchor="ctr"/>
-          <a:lstStyle/>
-          <a:p>
-            <a:pPr algn="r" indent="0" marL="0">
-              <a:buNone/>
-            </a:pPr>
-            <a:r>
-              <a:rPr lang="en-US" sz="1050" dirty="0">
+              <a:rPr lang="en-US" sz="1100" dirty="0">
                 <a:solidFill>
                   <a:srgbClr val="6E6E6E"/>
                 </a:solidFill>
@@ -4021,9 +2647,9 @@
                 <a:ea typeface="Pretendard" pitchFamily="34" charset="-122"/>
                 <a:cs typeface="Pretendard" pitchFamily="34" charset="-120"/>
               </a:rPr>
-              <a:t>강의</a:t>
-            </a:r>
-            <a:endParaRPr lang="en-US" sz="1050" dirty="0"/>
+              <a:t>9주차에 정한 세 색을 예외 없이 적용합니다</a:t>
+            </a:r>
+            <a:endParaRPr lang="en-US" sz="1100" dirty="0"/>
           </a:p>
         </p:txBody>
       </p:sp>
@@ -4035,7 +2661,7 @@
         </p:nvSpPr>
         <p:spPr>
           <a:xfrm>
-            <a:off x="640080" y="2531059"/>
+            <a:off x="640080" y="2670048"/>
             <a:ext cx="10911535" cy="7315"/>
           </a:xfrm>
           <a:prstGeom prst="rect">
@@ -4054,14 +2680,78 @@
       </p:sp>
       <p:sp>
         <p:nvSpPr>
-          <p:cNvPr id="14" name="Text 12"/>
-          <p:cNvSpPr/>
-          <p:nvPr/>
-        </p:nvSpPr>
-        <p:spPr>
-          <a:xfrm>
-            <a:off x="640080" y="2549347"/>
-            <a:ext cx="1600200" cy="830275"/>
+          <p:cNvPr id="14" name="Shape 12"/>
+          <p:cNvSpPr/>
+          <p:nvPr/>
+        </p:nvSpPr>
+        <p:spPr>
+          <a:xfrm>
+            <a:off x="640080" y="2834640"/>
+            <a:ext cx="310896" cy="310896"/>
+          </a:xfrm>
+          <a:prstGeom prst="ellipse">
+            <a:avLst/>
+          </a:prstGeom>
+          <a:solidFill>
+            <a:srgbClr val="FFFFFF"/>
+          </a:solidFill>
+          <a:ln w="12700">
+            <a:solidFill>
+              <a:srgbClr val="111111"/>
+            </a:solidFill>
+            <a:prstDash val="solid"/>
+          </a:ln>
+        </p:spPr>
+      </p:sp>
+      <p:sp>
+        <p:nvSpPr>
+          <p:cNvPr id="15" name="Text 13"/>
+          <p:cNvSpPr/>
+          <p:nvPr/>
+        </p:nvSpPr>
+        <p:spPr>
+          <a:xfrm>
+            <a:off x="640080" y="2834640"/>
+            <a:ext cx="310896" cy="310896"/>
+          </a:xfrm>
+          <a:prstGeom prst="rect">
+            <a:avLst/>
+          </a:prstGeom>
+          <a:noFill/>
+          <a:ln/>
+        </p:spPr>
+        <p:txBody>
+          <a:bodyPr wrap="square" lIns="0" tIns="0" rIns="0" bIns="0" rtlCol="0" anchor="ctr"/>
+          <a:lstStyle/>
+          <a:p>
+            <a:pPr algn="ctr" indent="0" marL="0">
+              <a:buNone/>
+            </a:pPr>
+            <a:r>
+              <a:rPr lang="en-US" sz="1000" b="1" dirty="0">
+                <a:solidFill>
+                  <a:srgbClr val="111111"/>
+                </a:solidFill>
+                <a:latin typeface="Pretendard" pitchFamily="34" charset="0"/>
+                <a:ea typeface="Pretendard" pitchFamily="34" charset="-122"/>
+                <a:cs typeface="Pretendard" pitchFamily="34" charset="-120"/>
+              </a:rPr>
+              <a:t>2</a:t>
+            </a:r>
+            <a:endParaRPr lang="en-US" sz="1000" dirty="0"/>
+          </a:p>
+        </p:txBody>
+      </p:sp>
+      <p:sp>
+        <p:nvSpPr>
+          <p:cNvPr id="16" name="Text 14"/>
+          <p:cNvSpPr/>
+          <p:nvPr/>
+        </p:nvSpPr>
+        <p:spPr>
+          <a:xfrm>
+            <a:off x="1188720" y="2743200"/>
+            <a:ext cx="9875520" cy="310896"/>
           </a:xfrm>
           <a:prstGeom prst="rect">
             <a:avLst/>
@@ -4077,30 +2767,30 @@
               <a:buNone/>
             </a:pPr>
             <a:r>
-              <a:rPr lang="en-US" sz="1050" b="1" spc="60" kern="0" dirty="0">
+              <a:rPr lang="en-US" sz="1450" dirty="0">
                 <a:solidFill>
                   <a:srgbClr val="111111"/>
                 </a:solidFill>
-                <a:latin typeface="Pretendard" pitchFamily="34" charset="0"/>
-                <a:ea typeface="Pretendard" pitchFamily="34" charset="-122"/>
-                <a:cs typeface="Pretendard" pitchFamily="34" charset="-120"/>
-              </a:rPr>
-              <a:t>00:20–01:05</a:t>
-            </a:r>
-            <a:endParaRPr lang="en-US" sz="1050" dirty="0"/>
-          </a:p>
-        </p:txBody>
-      </p:sp>
-      <p:sp>
-        <p:nvSpPr>
-          <p:cNvPr id="15" name="Text 13"/>
-          <p:cNvSpPr/>
-          <p:nvPr/>
-        </p:nvSpPr>
-        <p:spPr>
-          <a:xfrm>
-            <a:off x="2377440" y="2549347"/>
-            <a:ext cx="6888175" cy="830275"/>
+                <a:latin typeface="Pretendard SemiBold" pitchFamily="34" charset="0"/>
+                <a:ea typeface="Pretendard SemiBold" pitchFamily="34" charset="-122"/>
+                <a:cs typeface="Pretendard SemiBold" pitchFamily="34" charset="-120"/>
+              </a:rPr>
+              <a:t>이미지 톤을 통일할 수 있다</a:t>
+            </a:r>
+            <a:endParaRPr lang="en-US" sz="1450" dirty="0"/>
+          </a:p>
+        </p:txBody>
+      </p:sp>
+      <p:sp>
+        <p:nvSpPr>
+          <p:cNvPr id="17" name="Text 15"/>
+          <p:cNvSpPr/>
+          <p:nvPr/>
+        </p:nvSpPr>
+        <p:spPr>
+          <a:xfrm>
+            <a:off x="1188720" y="3054096"/>
+            <a:ext cx="9875520" cy="292608"/>
           </a:xfrm>
           <a:prstGeom prst="rect">
             <a:avLst/>
@@ -4116,46 +2806,7 @@
               <a:buNone/>
             </a:pPr>
             <a:r>
-              <a:rPr lang="en-US" sz="1300" b="1" dirty="0">
-                <a:solidFill>
-                  <a:srgbClr val="111111"/>
-                </a:solidFill>
-                <a:latin typeface="Pretendard" pitchFamily="34" charset="0"/>
-                <a:ea typeface="Pretendard" pitchFamily="34" charset="-122"/>
-                <a:cs typeface="Pretendard" pitchFamily="34" charset="-120"/>
-              </a:rPr>
-              <a:t>이미지 보정 · 배치 실습 (1)</a:t>
-            </a:r>
-            <a:endParaRPr lang="en-US" sz="1300" dirty="0"/>
-          </a:p>
-        </p:txBody>
-      </p:sp>
-      <p:sp>
-        <p:nvSpPr>
-          <p:cNvPr id="16" name="Text 14"/>
-          <p:cNvSpPr/>
-          <p:nvPr/>
-        </p:nvSpPr>
-        <p:spPr>
-          <a:xfrm>
-            <a:off x="9265615" y="2549347"/>
-            <a:ext cx="2286000" cy="830275"/>
-          </a:xfrm>
-          <a:prstGeom prst="rect">
-            <a:avLst/>
-          </a:prstGeom>
-          <a:noFill/>
-          <a:ln/>
-        </p:spPr>
-        <p:txBody>
-          <a:bodyPr wrap="square" lIns="0" tIns="0" rIns="0" bIns="0" rtlCol="0" anchor="ctr"/>
-          <a:lstStyle/>
-          <a:p>
-            <a:pPr algn="r" indent="0" marL="0">
-              <a:buNone/>
-            </a:pPr>
-            <a:r>
-              <a:rPr lang="en-US" sz="1050" dirty="0">
+              <a:rPr lang="en-US" sz="1100" dirty="0">
                 <a:solidFill>
                   <a:srgbClr val="6E6E6E"/>
                 </a:solidFill>
@@ -4163,21 +2814,21 @@
                 <a:ea typeface="Pretendard" pitchFamily="34" charset="-122"/>
                 <a:cs typeface="Pretendard" pitchFamily="34" charset="-120"/>
               </a:rPr>
-              <a:t>개인 워크 + 순회</a:t>
-            </a:r>
-            <a:endParaRPr lang="en-US" sz="1050" dirty="0"/>
-          </a:p>
-        </p:txBody>
-      </p:sp>
-      <p:sp>
-        <p:nvSpPr>
-          <p:cNvPr id="17" name="Shape 15"/>
-          <p:cNvSpPr/>
-          <p:nvPr/>
-        </p:nvSpPr>
-        <p:spPr>
-          <a:xfrm>
-            <a:off x="640080" y="3361334"/>
+              <a:t>출처가 다른 이미지들이 한 벌로 보이게 만드는 일</a:t>
+            </a:r>
+            <a:endParaRPr lang="en-US" sz="1100" dirty="0"/>
+          </a:p>
+        </p:txBody>
+      </p:sp>
+      <p:sp>
+        <p:nvSpPr>
+          <p:cNvPr id="18" name="Shape 16"/>
+          <p:cNvSpPr/>
+          <p:nvPr/>
+        </p:nvSpPr>
+        <p:spPr>
+          <a:xfrm>
+            <a:off x="640080" y="3694176"/>
             <a:ext cx="10911535" cy="7315"/>
           </a:xfrm>
           <a:prstGeom prst="rect">
@@ -4196,102 +2847,24 @@
       </p:sp>
       <p:sp>
         <p:nvSpPr>
-          <p:cNvPr id="18" name="Text 16"/>
-          <p:cNvSpPr/>
-          <p:nvPr/>
-        </p:nvSpPr>
-        <p:spPr>
-          <a:xfrm>
-            <a:off x="640080" y="3379622"/>
-            <a:ext cx="1600200" cy="830275"/>
-          </a:xfrm>
-          <a:prstGeom prst="rect">
-            <a:avLst/>
-          </a:prstGeom>
-          <a:noFill/>
-          <a:ln/>
-        </p:spPr>
-        <p:txBody>
-          <a:bodyPr wrap="square" lIns="0" tIns="0" rIns="0" bIns="0" rtlCol="0" anchor="ctr"/>
-          <a:lstStyle/>
-          <a:p>
-            <a:pPr indent="0" marL="0">
-              <a:buNone/>
-            </a:pPr>
-            <a:r>
-              <a:rPr lang="en-US" sz="1050" spc="60" kern="0" dirty="0">
-                <a:solidFill>
-                  <a:srgbClr val="9B9B9B"/>
-                </a:solidFill>
-                <a:latin typeface="Pretendard" pitchFamily="34" charset="0"/>
-                <a:ea typeface="Pretendard" pitchFamily="34" charset="-122"/>
-                <a:cs typeface="Pretendard" pitchFamily="34" charset="-120"/>
-              </a:rPr>
-              <a:t>01:05–01:15</a:t>
-            </a:r>
-            <a:endParaRPr lang="en-US" sz="1050" dirty="0"/>
-          </a:p>
-        </p:txBody>
-      </p:sp>
-      <p:sp>
-        <p:nvSpPr>
-          <p:cNvPr id="19" name="Text 17"/>
-          <p:cNvSpPr/>
-          <p:nvPr/>
-        </p:nvSpPr>
-        <p:spPr>
-          <a:xfrm>
-            <a:off x="2377440" y="3379622"/>
-            <a:ext cx="6888175" cy="830275"/>
-          </a:xfrm>
-          <a:prstGeom prst="rect">
-            <a:avLst/>
-          </a:prstGeom>
-          <a:noFill/>
-          <a:ln/>
-        </p:spPr>
-        <p:txBody>
-          <a:bodyPr wrap="square" lIns="0" tIns="0" rIns="0" bIns="0" rtlCol="0" anchor="ctr"/>
-          <a:lstStyle/>
-          <a:p>
-            <a:pPr indent="0" marL="0">
-              <a:buNone/>
-            </a:pPr>
-            <a:r>
-              <a:rPr lang="en-US" sz="1100" dirty="0">
-                <a:solidFill>
-                  <a:srgbClr val="9B9B9B"/>
-                </a:solidFill>
-                <a:latin typeface="Pretendard" pitchFamily="34" charset="0"/>
-                <a:ea typeface="Pretendard" pitchFamily="34" charset="-122"/>
-                <a:cs typeface="Pretendard" pitchFamily="34" charset="-120"/>
-              </a:rPr>
-              <a:t>휴식</a:t>
-            </a:r>
-            <a:endParaRPr lang="en-US" sz="1100" dirty="0"/>
-          </a:p>
-        </p:txBody>
-      </p:sp>
-      <p:sp>
-        <p:nvSpPr>
-          <p:cNvPr id="20" name="Shape 18"/>
-          <p:cNvSpPr/>
-          <p:nvPr/>
-        </p:nvSpPr>
-        <p:spPr>
-          <a:xfrm>
-            <a:off x="640080" y="4191610"/>
-            <a:ext cx="10911535" cy="7315"/>
-          </a:xfrm>
-          <a:prstGeom prst="rect">
+          <p:cNvPr id="19" name="Shape 17"/>
+          <p:cNvSpPr/>
+          <p:nvPr/>
+        </p:nvSpPr>
+        <p:spPr>
+          <a:xfrm>
+            <a:off x="640080" y="3858768"/>
+            <a:ext cx="310896" cy="310896"/>
+          </a:xfrm>
+          <a:prstGeom prst="ellipse">
             <a:avLst/>
           </a:prstGeom>
           <a:solidFill>
-            <a:srgbClr val="EFEFEF"/>
+            <a:srgbClr val="FFFFFF"/>
           </a:solidFill>
           <a:ln w="12700">
             <a:solidFill>
-              <a:srgbClr val="EFEFEF"/>
+              <a:srgbClr val="111111"/>
             </a:solidFill>
             <a:prstDash val="solid"/>
           </a:ln>
@@ -4299,14 +2872,53 @@
       </p:sp>
       <p:sp>
         <p:nvSpPr>
+          <p:cNvPr id="20" name="Text 18"/>
+          <p:cNvSpPr/>
+          <p:nvPr/>
+        </p:nvSpPr>
+        <p:spPr>
+          <a:xfrm>
+            <a:off x="640080" y="3858768"/>
+            <a:ext cx="310896" cy="310896"/>
+          </a:xfrm>
+          <a:prstGeom prst="rect">
+            <a:avLst/>
+          </a:prstGeom>
+          <a:noFill/>
+          <a:ln/>
+        </p:spPr>
+        <p:txBody>
+          <a:bodyPr wrap="square" lIns="0" tIns="0" rIns="0" bIns="0" rtlCol="0" anchor="ctr"/>
+          <a:lstStyle/>
+          <a:p>
+            <a:pPr algn="ctr" indent="0" marL="0">
+              <a:buNone/>
+            </a:pPr>
+            <a:r>
+              <a:rPr lang="en-US" sz="1000" b="1" dirty="0">
+                <a:solidFill>
+                  <a:srgbClr val="111111"/>
+                </a:solidFill>
+                <a:latin typeface="Pretendard" pitchFamily="34" charset="0"/>
+                <a:ea typeface="Pretendard" pitchFamily="34" charset="-122"/>
+                <a:cs typeface="Pretendard" pitchFamily="34" charset="-120"/>
+              </a:rPr>
+              <a:t>3</a:t>
+            </a:r>
+            <a:endParaRPr lang="en-US" sz="1000" dirty="0"/>
+          </a:p>
+        </p:txBody>
+      </p:sp>
+      <p:sp>
+        <p:nvSpPr>
           <p:cNvPr id="21" name="Text 19"/>
           <p:cNvSpPr/>
           <p:nvPr/>
         </p:nvSpPr>
         <p:spPr>
           <a:xfrm>
-            <a:off x="640080" y="4209898"/>
-            <a:ext cx="1600200" cy="830275"/>
+            <a:off x="1188720" y="3767328"/>
+            <a:ext cx="9875520" cy="310896"/>
           </a:xfrm>
           <a:prstGeom prst="rect">
             <a:avLst/>
@@ -4322,17 +2934,17 @@
               <a:buNone/>
             </a:pPr>
             <a:r>
-              <a:rPr lang="en-US" sz="1050" b="1" spc="60" kern="0" dirty="0">
+              <a:rPr lang="en-US" sz="1450" dirty="0">
                 <a:solidFill>
                   <a:srgbClr val="111111"/>
                 </a:solidFill>
-                <a:latin typeface="Pretendard" pitchFamily="34" charset="0"/>
-                <a:ea typeface="Pretendard" pitchFamily="34" charset="-122"/>
-                <a:cs typeface="Pretendard" pitchFamily="34" charset="-120"/>
-              </a:rPr>
-              <a:t>01:15–01:50</a:t>
-            </a:r>
-            <a:endParaRPr lang="en-US" sz="1050" dirty="0"/>
+                <a:latin typeface="Pretendard SemiBold" pitchFamily="34" charset="0"/>
+                <a:ea typeface="Pretendard SemiBold" pitchFamily="34" charset="-122"/>
+                <a:cs typeface="Pretendard SemiBold" pitchFamily="34" charset="-120"/>
+              </a:rPr>
+              <a:t>이미지와 텍스트의 균형을 잡을 수 있다</a:t>
+            </a:r>
+            <a:endParaRPr lang="en-US" sz="1450" dirty="0"/>
           </a:p>
         </p:txBody>
       </p:sp>
@@ -4344,8 +2956,8 @@
         </p:nvSpPr>
         <p:spPr>
           <a:xfrm>
-            <a:off x="2377440" y="4209898"/>
-            <a:ext cx="6888175" cy="830275"/>
+            <a:off x="1188720" y="4078224"/>
+            <a:ext cx="9875520" cy="292608"/>
           </a:xfrm>
           <a:prstGeom prst="rect">
             <a:avLst/>
@@ -4361,46 +2973,7 @@
               <a:buNone/>
             </a:pPr>
             <a:r>
-              <a:rPr lang="en-US" sz="1300" b="1" dirty="0">
-                <a:solidFill>
-                  <a:srgbClr val="111111"/>
-                </a:solidFill>
-                <a:latin typeface="Pretendard" pitchFamily="34" charset="0"/>
-                <a:ea typeface="Pretendard" pitchFamily="34" charset="-122"/>
-                <a:cs typeface="Pretendard" pitchFamily="34" charset="-120"/>
-              </a:rPr>
-              <a:t>이미지 보정 · 배치 실습 (2)</a:t>
-            </a:r>
-            <a:endParaRPr lang="en-US" sz="1300" dirty="0"/>
-          </a:p>
-        </p:txBody>
-      </p:sp>
-      <p:sp>
-        <p:nvSpPr>
-          <p:cNvPr id="23" name="Text 21"/>
-          <p:cNvSpPr/>
-          <p:nvPr/>
-        </p:nvSpPr>
-        <p:spPr>
-          <a:xfrm>
-            <a:off x="9265615" y="4209898"/>
-            <a:ext cx="2286000" cy="830275"/>
-          </a:xfrm>
-          <a:prstGeom prst="rect">
-            <a:avLst/>
-          </a:prstGeom>
-          <a:noFill/>
-          <a:ln/>
-        </p:spPr>
-        <p:txBody>
-          <a:bodyPr wrap="square" lIns="0" tIns="0" rIns="0" bIns="0" rtlCol="0" anchor="ctr"/>
-          <a:lstStyle/>
-          <a:p>
-            <a:pPr algn="r" indent="0" marL="0">
-              <a:buNone/>
-            </a:pPr>
-            <a:r>
-              <a:rPr lang="en-US" sz="1050" dirty="0">
+              <a:rPr lang="en-US" sz="1100" dirty="0">
                 <a:solidFill>
                   <a:srgbClr val="6E6E6E"/>
                 </a:solidFill>
@@ -4408,21 +2981,21 @@
                 <a:ea typeface="Pretendard" pitchFamily="34" charset="-122"/>
                 <a:cs typeface="Pretendard" pitchFamily="34" charset="-120"/>
               </a:rPr>
-              <a:t>개인 워크 + 순회</a:t>
-            </a:r>
-            <a:endParaRPr lang="en-US" sz="1050" dirty="0"/>
-          </a:p>
-        </p:txBody>
-      </p:sp>
-      <p:sp>
-        <p:nvSpPr>
-          <p:cNvPr id="24" name="Shape 22"/>
-          <p:cNvSpPr/>
-          <p:nvPr/>
-        </p:nvSpPr>
-        <p:spPr>
-          <a:xfrm>
-            <a:off x="640080" y="5021885"/>
+              <a:t>비율과 정렬로 지면을 안정시킵니다</a:t>
+            </a:r>
+            <a:endParaRPr lang="en-US" sz="1100" dirty="0"/>
+          </a:p>
+        </p:txBody>
+      </p:sp>
+      <p:sp>
+        <p:nvSpPr>
+          <p:cNvPr id="23" name="Shape 21"/>
+          <p:cNvSpPr/>
+          <p:nvPr/>
+        </p:nvSpPr>
+        <p:spPr>
+          <a:xfrm>
+            <a:off x="640080" y="6291072"/>
             <a:ext cx="10911535" cy="7315"/>
           </a:xfrm>
           <a:prstGeom prst="rect">
@@ -4441,174 +3014,7 @@
       </p:sp>
       <p:sp>
         <p:nvSpPr>
-          <p:cNvPr id="25" name="Text 23"/>
-          <p:cNvSpPr/>
-          <p:nvPr/>
-        </p:nvSpPr>
-        <p:spPr>
-          <a:xfrm>
-            <a:off x="640080" y="5040173"/>
-            <a:ext cx="1600200" cy="830275"/>
-          </a:xfrm>
-          <a:prstGeom prst="rect">
-            <a:avLst/>
-          </a:prstGeom>
-          <a:noFill/>
-          <a:ln/>
-        </p:spPr>
-        <p:txBody>
-          <a:bodyPr wrap="square" lIns="0" tIns="0" rIns="0" bIns="0" rtlCol="0" anchor="ctr"/>
-          <a:lstStyle/>
-          <a:p>
-            <a:pPr indent="0" marL="0">
-              <a:buNone/>
-            </a:pPr>
-            <a:r>
-              <a:rPr lang="en-US" sz="1050" b="1" spc="60" kern="0" dirty="0">
-                <a:solidFill>
-                  <a:srgbClr val="111111"/>
-                </a:solidFill>
-                <a:latin typeface="Pretendard" pitchFamily="34" charset="0"/>
-                <a:ea typeface="Pretendard" pitchFamily="34" charset="-122"/>
-                <a:cs typeface="Pretendard" pitchFamily="34" charset="-120"/>
-              </a:rPr>
-              <a:t>01:50–02:00</a:t>
-            </a:r>
-            <a:endParaRPr lang="en-US" sz="1050" dirty="0"/>
-          </a:p>
-        </p:txBody>
-      </p:sp>
-      <p:sp>
-        <p:nvSpPr>
-          <p:cNvPr id="26" name="Text 24"/>
-          <p:cNvSpPr/>
-          <p:nvPr/>
-        </p:nvSpPr>
-        <p:spPr>
-          <a:xfrm>
-            <a:off x="2377440" y="5040173"/>
-            <a:ext cx="6888175" cy="830275"/>
-          </a:xfrm>
-          <a:prstGeom prst="rect">
-            <a:avLst/>
-          </a:prstGeom>
-          <a:noFill/>
-          <a:ln/>
-        </p:spPr>
-        <p:txBody>
-          <a:bodyPr wrap="square" lIns="0" tIns="0" rIns="0" bIns="0" rtlCol="0" anchor="ctr"/>
-          <a:lstStyle/>
-          <a:p>
-            <a:pPr indent="0" marL="0">
-              <a:buNone/>
-            </a:pPr>
-            <a:r>
-              <a:rPr lang="en-US" sz="1300" b="1" dirty="0">
-                <a:solidFill>
-                  <a:srgbClr val="111111"/>
-                </a:solidFill>
-                <a:latin typeface="Pretendard" pitchFamily="34" charset="0"/>
-                <a:ea typeface="Pretendard" pitchFamily="34" charset="-122"/>
-                <a:cs typeface="Pretendard" pitchFamily="34" charset="-120"/>
-              </a:rPr>
-              <a:t>진행 확인 · 과제 안내</a:t>
-            </a:r>
-            <a:endParaRPr lang="en-US" sz="1300" dirty="0"/>
-          </a:p>
-        </p:txBody>
-      </p:sp>
-      <p:sp>
-        <p:nvSpPr>
-          <p:cNvPr id="27" name="Text 25"/>
-          <p:cNvSpPr/>
-          <p:nvPr/>
-        </p:nvSpPr>
-        <p:spPr>
-          <a:xfrm>
-            <a:off x="9265615" y="5040173"/>
-            <a:ext cx="2286000" cy="830275"/>
-          </a:xfrm>
-          <a:prstGeom prst="rect">
-            <a:avLst/>
-          </a:prstGeom>
-          <a:noFill/>
-          <a:ln/>
-        </p:spPr>
-        <p:txBody>
-          <a:bodyPr wrap="square" lIns="0" tIns="0" rIns="0" bIns="0" rtlCol="0" anchor="ctr"/>
-          <a:lstStyle/>
-          <a:p>
-            <a:pPr algn="r" indent="0" marL="0">
-              <a:buNone/>
-            </a:pPr>
-            <a:r>
-              <a:rPr lang="en-US" sz="1050" dirty="0">
-                <a:solidFill>
-                  <a:srgbClr val="6E6E6E"/>
-                </a:solidFill>
-                <a:latin typeface="Pretendard" pitchFamily="34" charset="0"/>
-                <a:ea typeface="Pretendard" pitchFamily="34" charset="-122"/>
-                <a:cs typeface="Pretendard" pitchFamily="34" charset="-120"/>
-              </a:rPr>
-              <a:t>개별 확인</a:t>
-            </a:r>
-            <a:endParaRPr lang="en-US" sz="1050" dirty="0"/>
-          </a:p>
-        </p:txBody>
-      </p:sp>
-      <p:sp>
-        <p:nvSpPr>
-          <p:cNvPr id="28" name="Shape 26"/>
-          <p:cNvSpPr/>
-          <p:nvPr/>
-        </p:nvSpPr>
-        <p:spPr>
-          <a:xfrm>
-            <a:off x="640080" y="5852160"/>
-            <a:ext cx="10911535" cy="7315"/>
-          </a:xfrm>
-          <a:prstGeom prst="rect">
-            <a:avLst/>
-          </a:prstGeom>
-          <a:solidFill>
-            <a:srgbClr val="111111"/>
-          </a:solidFill>
-          <a:ln w="12700">
-            <a:solidFill>
-              <a:srgbClr val="111111"/>
-            </a:solidFill>
-            <a:prstDash val="solid"/>
-          </a:ln>
-        </p:spPr>
-      </p:sp>
-      <p:sp>
-        <p:nvSpPr>
-          <p:cNvPr id="29" name="Shape 27"/>
-          <p:cNvSpPr/>
-          <p:nvPr/>
-        </p:nvSpPr>
-        <p:spPr>
-          <a:xfrm>
-            <a:off x="640080" y="6291072"/>
-            <a:ext cx="10911535" cy="7315"/>
-          </a:xfrm>
-          <a:prstGeom prst="rect">
-            <a:avLst/>
-          </a:prstGeom>
-          <a:solidFill>
-            <a:srgbClr val="DCDCDC"/>
-          </a:solidFill>
-          <a:ln w="12700">
-            <a:solidFill>
-              <a:srgbClr val="DCDCDC"/>
-            </a:solidFill>
-            <a:prstDash val="solid"/>
-          </a:ln>
-        </p:spPr>
-      </p:sp>
-      <p:sp>
-        <p:nvSpPr>
-          <p:cNvPr id="30" name="Text 28"/>
+          <p:cNvPr id="24" name="Text 22"/>
           <p:cNvSpPr/>
           <p:nvPr/>
         </p:nvSpPr>
@@ -4647,7 +3053,7 @@
       </p:sp>
       <p:sp>
         <p:nvSpPr>
-          <p:cNvPr id="31" name="Text 29"/>
+          <p:cNvPr id="25" name="Text 23"/>
           <p:cNvSpPr/>
           <p:nvPr/>
         </p:nvSpPr>
@@ -4695,6 +3101,472 @@
 <file path=ppt/slides/slide3.xml><?xml version="1.0" encoding="utf-8"?>
 <p:sld xmlns:a="http://schemas.openxmlformats.org/drawingml/2006/main" xmlns:r="http://schemas.openxmlformats.org/officeDocument/2006/relationships" xmlns:p="http://schemas.openxmlformats.org/presentationml/2006/main">
   <p:cSld name="Slide 3">
+    <p:bg>
+      <p:bgPr>
+        <a:solidFill>
+          <a:srgbClr val="111111"/>
+        </a:solidFill>
+      </p:bgPr>
+    </p:bg>
+    <p:spTree>
+      <p:nvGrpSpPr>
+        <p:cNvPr id="1" name=""/>
+        <p:cNvGrpSpPr/>
+        <p:nvPr/>
+      </p:nvGrpSpPr>
+      <p:grpSpPr>
+        <a:xfrm>
+          <a:off x="0" y="0"/>
+          <a:ext cx="0" cy="0"/>
+          <a:chOff x="0" y="0"/>
+          <a:chExt cx="0" cy="0"/>
+        </a:xfrm>
+      </p:grpSpPr>
+      <p:sp>
+        <p:nvSpPr>
+          <p:cNvPr id="2" name="Text 0"/>
+          <p:cNvSpPr/>
+          <p:nvPr/>
+        </p:nvSpPr>
+        <p:spPr>
+          <a:xfrm>
+            <a:off x="640080" y="274320"/>
+            <a:ext cx="3657600" cy="219456"/>
+          </a:xfrm>
+          <a:prstGeom prst="rect">
+            <a:avLst/>
+          </a:prstGeom>
+          <a:noFill/>
+          <a:ln/>
+        </p:spPr>
+        <p:txBody>
+          <a:bodyPr wrap="square" lIns="0" tIns="0" rIns="0" bIns="0" rtlCol="0" anchor="ctr"/>
+          <a:lstStyle/>
+          <a:p>
+            <a:pPr indent="0" marL="0">
+              <a:buNone/>
+            </a:pPr>
+            <a:r>
+              <a:rPr lang="en-US" sz="900" spc="120" kern="0" dirty="0">
+                <a:solidFill>
+                  <a:srgbClr val="9A9A9A"/>
+                </a:solidFill>
+                <a:latin typeface="Pretendard" pitchFamily="34" charset="0"/>
+                <a:ea typeface="Pretendard" pitchFamily="34" charset="-122"/>
+                <a:cs typeface="Pretendard" pitchFamily="34" charset="-120"/>
+              </a:rPr>
+              <a:t>포트폴리오제작</a:t>
+            </a:r>
+            <a:endParaRPr lang="en-US" sz="900" dirty="0"/>
+          </a:p>
+        </p:txBody>
+      </p:sp>
+      <p:sp>
+        <p:nvSpPr>
+          <p:cNvPr id="3" name="Text 1"/>
+          <p:cNvSpPr/>
+          <p:nvPr/>
+        </p:nvSpPr>
+        <p:spPr>
+          <a:xfrm>
+            <a:off x="4480560" y="274320"/>
+            <a:ext cx="4572000" cy="219456"/>
+          </a:xfrm>
+          <a:prstGeom prst="rect">
+            <a:avLst/>
+          </a:prstGeom>
+          <a:noFill/>
+          <a:ln/>
+        </p:spPr>
+        <p:txBody>
+          <a:bodyPr wrap="square" lIns="0" tIns="0" rIns="0" bIns="0" rtlCol="0" anchor="ctr"/>
+          <a:lstStyle/>
+          <a:p>
+            <a:pPr algn="ctr" indent="0" marL="0">
+              <a:buNone/>
+            </a:pPr>
+            <a:r>
+              <a:rPr lang="en-US" sz="900" spc="120" kern="0" dirty="0">
+                <a:solidFill>
+                  <a:srgbClr val="9A9A9A"/>
+                </a:solidFill>
+                <a:latin typeface="Pretendard" pitchFamily="34" charset="0"/>
+                <a:ea typeface="Pretendard" pitchFamily="34" charset="-122"/>
+                <a:cs typeface="Pretendard" pitchFamily="34" charset="-120"/>
+              </a:rPr>
+              <a:t>PHASE 3 완성과 발표</a:t>
+            </a:r>
+            <a:endParaRPr lang="en-US" sz="900" dirty="0"/>
+          </a:p>
+        </p:txBody>
+      </p:sp>
+      <p:sp>
+        <p:nvSpPr>
+          <p:cNvPr id="4" name="Text 2"/>
+          <p:cNvSpPr/>
+          <p:nvPr/>
+        </p:nvSpPr>
+        <p:spPr>
+          <a:xfrm>
+            <a:off x="8808415" y="274320"/>
+            <a:ext cx="2743200" cy="219456"/>
+          </a:xfrm>
+          <a:prstGeom prst="rect">
+            <a:avLst/>
+          </a:prstGeom>
+          <a:noFill/>
+          <a:ln/>
+        </p:spPr>
+        <p:txBody>
+          <a:bodyPr wrap="square" lIns="0" tIns="0" rIns="0" bIns="0" rtlCol="0" anchor="ctr"/>
+          <a:lstStyle/>
+          <a:p>
+            <a:pPr algn="r" indent="0" marL="0">
+              <a:buNone/>
+            </a:pPr>
+            <a:r>
+              <a:rPr lang="en-US" sz="900" spc="200" kern="0" dirty="0">
+                <a:solidFill>
+                  <a:srgbClr val="9A9A9A"/>
+                </a:solidFill>
+                <a:latin typeface="Pretendard" pitchFamily="34" charset="0"/>
+                <a:ea typeface="Pretendard" pitchFamily="34" charset="-122"/>
+                <a:cs typeface="Pretendard" pitchFamily="34" charset="-120"/>
+              </a:rPr>
+              <a:t>WEEK 11</a:t>
+            </a:r>
+            <a:endParaRPr lang="en-US" sz="900" dirty="0"/>
+          </a:p>
+        </p:txBody>
+      </p:sp>
+      <p:sp>
+        <p:nvSpPr>
+          <p:cNvPr id="5" name="Shape 3"/>
+          <p:cNvSpPr/>
+          <p:nvPr/>
+        </p:nvSpPr>
+        <p:spPr>
+          <a:xfrm>
+            <a:off x="640080" y="548640"/>
+            <a:ext cx="10911535" cy="7315"/>
+          </a:xfrm>
+          <a:prstGeom prst="rect">
+            <a:avLst/>
+          </a:prstGeom>
+          <a:solidFill>
+            <a:srgbClr val="333333"/>
+          </a:solidFill>
+          <a:ln w="12700">
+            <a:solidFill>
+              <a:srgbClr val="333333"/>
+            </a:solidFill>
+            <a:prstDash val="solid"/>
+          </a:ln>
+        </p:spPr>
+      </p:sp>
+      <p:sp>
+        <p:nvSpPr>
+          <p:cNvPr id="6" name="Text 4"/>
+          <p:cNvSpPr/>
+          <p:nvPr/>
+        </p:nvSpPr>
+        <p:spPr>
+          <a:xfrm>
+            <a:off x="7345375" y="1737360"/>
+            <a:ext cx="4206240" cy="3291840"/>
+          </a:xfrm>
+          <a:prstGeom prst="rect">
+            <a:avLst/>
+          </a:prstGeom>
+          <a:noFill/>
+          <a:ln/>
+        </p:spPr>
+        <p:txBody>
+          <a:bodyPr wrap="square" lIns="0" tIns="0" rIns="0" bIns="0" rtlCol="0" anchor="ctr"/>
+          <a:lstStyle/>
+          <a:p>
+            <a:pPr algn="r" indent="0" marL="0">
+              <a:buNone/>
+            </a:pPr>
+            <a:r>
+              <a:rPr lang="en-US" sz="20000" dirty="0">
+                <a:solidFill>
+                  <a:srgbClr val="1B1B1B"/>
+                </a:solidFill>
+                <a:latin typeface="Pretendard SemiBold" pitchFamily="34" charset="0"/>
+                <a:ea typeface="Pretendard SemiBold" pitchFamily="34" charset="-122"/>
+                <a:cs typeface="Pretendard SemiBold" pitchFamily="34" charset="-120"/>
+              </a:rPr>
+              <a:t>01</a:t>
+            </a:r>
+            <a:endParaRPr lang="en-US" sz="20000" dirty="0"/>
+          </a:p>
+        </p:txBody>
+      </p:sp>
+      <p:sp>
+        <p:nvSpPr>
+          <p:cNvPr id="7" name="Shape 5"/>
+          <p:cNvSpPr/>
+          <p:nvPr/>
+        </p:nvSpPr>
+        <p:spPr>
+          <a:xfrm>
+            <a:off x="941832" y="1371600"/>
+            <a:ext cx="0" cy="603504"/>
+          </a:xfrm>
+          <a:prstGeom prst="line">
+            <a:avLst/>
+          </a:prstGeom>
+          <a:noFill/>
+          <a:ln w="15875">
+            <a:solidFill>
+              <a:srgbClr val="FFFFFF"/>
+            </a:solidFill>
+            <a:prstDash val="solid"/>
+          </a:ln>
+        </p:spPr>
+      </p:sp>
+      <p:sp>
+        <p:nvSpPr>
+          <p:cNvPr id="8" name="Shape 6"/>
+          <p:cNvSpPr/>
+          <p:nvPr/>
+        </p:nvSpPr>
+        <p:spPr>
+          <a:xfrm>
+            <a:off x="640080" y="1733702"/>
+            <a:ext cx="301752" cy="241402"/>
+          </a:xfrm>
+          <a:prstGeom prst="line">
+            <a:avLst/>
+          </a:prstGeom>
+          <a:noFill/>
+          <a:ln w="15875">
+            <a:solidFill>
+              <a:srgbClr val="FFFFFF"/>
+            </a:solidFill>
+            <a:prstDash val="solid"/>
+          </a:ln>
+        </p:spPr>
+      </p:sp>
+      <p:sp>
+        <p:nvSpPr>
+          <p:cNvPr id="9" name="Shape 7"/>
+          <p:cNvSpPr/>
+          <p:nvPr/>
+        </p:nvSpPr>
+        <p:spPr>
+          <a:xfrm flipV="1">
+            <a:off x="941832" y="1733702"/>
+            <a:ext cx="301752" cy="241402"/>
+          </a:xfrm>
+          <a:prstGeom prst="line">
+            <a:avLst/>
+          </a:prstGeom>
+          <a:noFill/>
+          <a:ln w="15875">
+            <a:solidFill>
+              <a:srgbClr val="FFFFFF"/>
+            </a:solidFill>
+            <a:prstDash val="solid"/>
+          </a:ln>
+        </p:spPr>
+      </p:sp>
+      <p:sp>
+        <p:nvSpPr>
+          <p:cNvPr id="10" name="Text 8"/>
+          <p:cNvSpPr/>
+          <p:nvPr/>
+        </p:nvSpPr>
+        <p:spPr>
+          <a:xfrm>
+            <a:off x="640080" y="2615184"/>
+            <a:ext cx="7863840" cy="256032"/>
+          </a:xfrm>
+          <a:prstGeom prst="rect">
+            <a:avLst/>
+          </a:prstGeom>
+          <a:noFill/>
+          <a:ln/>
+        </p:spPr>
+        <p:txBody>
+          <a:bodyPr wrap="square" lIns="0" tIns="0" rIns="0" bIns="0" rtlCol="0" anchor="ctr"/>
+          <a:lstStyle/>
+          <a:p>
+            <a:pPr indent="0" marL="0">
+              <a:buNone/>
+            </a:pPr>
+            <a:r>
+              <a:rPr lang="en-US" sz="950" spc="280" kern="0" dirty="0">
+                <a:solidFill>
+                  <a:srgbClr val="9A9A9A"/>
+                </a:solidFill>
+                <a:latin typeface="Pretendard" pitchFamily="34" charset="0"/>
+                <a:ea typeface="Pretendard" pitchFamily="34" charset="-122"/>
+                <a:cs typeface="Pretendard" pitchFamily="34" charset="-120"/>
+              </a:rPr>
+              <a:t>PART 01</a:t>
+            </a:r>
+            <a:endParaRPr lang="en-US" sz="950" dirty="0"/>
+          </a:p>
+        </p:txBody>
+      </p:sp>
+      <p:sp>
+        <p:nvSpPr>
+          <p:cNvPr id="11" name="Text 9"/>
+          <p:cNvSpPr/>
+          <p:nvPr/>
+        </p:nvSpPr>
+        <p:spPr>
+          <a:xfrm>
+            <a:off x="640080" y="2889504"/>
+            <a:ext cx="7863840" cy="786384"/>
+          </a:xfrm>
+          <a:prstGeom prst="rect">
+            <a:avLst/>
+          </a:prstGeom>
+          <a:noFill/>
+          <a:ln/>
+        </p:spPr>
+        <p:txBody>
+          <a:bodyPr wrap="square" lIns="0" tIns="0" rIns="0" bIns="0" rtlCol="0" anchor="ctr"/>
+          <a:lstStyle/>
+          <a:p>
+            <a:pPr indent="0" marL="0">
+              <a:buNone/>
+            </a:pPr>
+            <a:r>
+              <a:rPr lang="en-US" sz="4600" dirty="0">
+                <a:solidFill>
+                  <a:srgbClr val="FFFFFF"/>
+                </a:solidFill>
+                <a:latin typeface="Pretendard SemiBold" pitchFamily="34" charset="0"/>
+                <a:ea typeface="Pretendard SemiBold" pitchFamily="34" charset="-122"/>
+                <a:cs typeface="Pretendard SemiBold" pitchFamily="34" charset="-120"/>
+              </a:rPr>
+              <a:t>컬러 적용</a:t>
+            </a:r>
+            <a:endParaRPr lang="en-US" sz="4600" dirty="0"/>
+          </a:p>
+        </p:txBody>
+      </p:sp>
+      <p:sp>
+        <p:nvSpPr>
+          <p:cNvPr id="12" name="Shape 10"/>
+          <p:cNvSpPr/>
+          <p:nvPr/>
+        </p:nvSpPr>
+        <p:spPr>
+          <a:xfrm>
+            <a:off x="640080" y="3803904"/>
+            <a:ext cx="2194560" cy="7315"/>
+          </a:xfrm>
+          <a:prstGeom prst="rect">
+            <a:avLst/>
+          </a:prstGeom>
+          <a:solidFill>
+            <a:srgbClr val="FFFFFF"/>
+          </a:solidFill>
+          <a:ln w="12700">
+            <a:solidFill>
+              <a:srgbClr val="FFFFFF"/>
+            </a:solidFill>
+            <a:prstDash val="solid"/>
+          </a:ln>
+        </p:spPr>
+      </p:sp>
+      <p:sp>
+        <p:nvSpPr>
+          <p:cNvPr id="13" name="Text 11"/>
+          <p:cNvSpPr/>
+          <p:nvPr/>
+        </p:nvSpPr>
+        <p:spPr>
+          <a:xfrm>
+            <a:off x="640080" y="4005072"/>
+            <a:ext cx="6949440" cy="731520"/>
+          </a:xfrm>
+          <a:prstGeom prst="rect">
+            <a:avLst/>
+          </a:prstGeom>
+          <a:noFill/>
+          <a:ln/>
+        </p:spPr>
+        <p:txBody>
+          <a:bodyPr wrap="square" lIns="0" tIns="0" rIns="0" bIns="0" rtlCol="0" anchor="t"/>
+          <a:lstStyle/>
+          <a:p>
+            <a:pPr indent="0" marL="0">
+              <a:lnSpc>
+                <a:spcPct val="134000"/>
+              </a:lnSpc>
+              <a:buNone/>
+            </a:pPr>
+            <a:r>
+              <a:rPr lang="en-US" sz="1350" dirty="0">
+                <a:solidFill>
+                  <a:srgbClr val="B8B8B8"/>
+                </a:solidFill>
+                <a:latin typeface="Pretendard Light" pitchFamily="34" charset="0"/>
+                <a:ea typeface="Pretendard Light" pitchFamily="34" charset="-122"/>
+                <a:cs typeface="Pretendard Light" pitchFamily="34" charset="-120"/>
+              </a:rPr>
+              <a:t>20분. 정한 규칙을 지키는 것이 전부입니다.</a:t>
+            </a:r>
+            <a:endParaRPr lang="en-US" sz="1350" dirty="0"/>
+          </a:p>
+        </p:txBody>
+      </p:sp>
+      <p:sp>
+        <p:nvSpPr>
+          <p:cNvPr id="14" name="Text 12"/>
+          <p:cNvSpPr/>
+          <p:nvPr/>
+        </p:nvSpPr>
+        <p:spPr>
+          <a:xfrm rot="16200000">
+            <a:off x="10436047" y="3291840"/>
+            <a:ext cx="2743200" cy="274320"/>
+          </a:xfrm>
+          <a:prstGeom prst="rect">
+            <a:avLst/>
+          </a:prstGeom>
+          <a:noFill/>
+          <a:ln/>
+        </p:spPr>
+        <p:txBody>
+          <a:bodyPr wrap="square" lIns="0" tIns="0" rIns="0" bIns="0" rtlCol="0" anchor="ctr"/>
+          <a:lstStyle/>
+          <a:p>
+            <a:pPr algn="ctr" indent="0" marL="0">
+              <a:buNone/>
+            </a:pPr>
+            <a:r>
+              <a:rPr lang="en-US" sz="850" spc="260" kern="0" dirty="0">
+                <a:solidFill>
+                  <a:srgbClr val="7A7A7A"/>
+                </a:solidFill>
+                <a:latin typeface="Pretendard" pitchFamily="34" charset="0"/>
+                <a:ea typeface="Pretendard" pitchFamily="34" charset="-122"/>
+                <a:cs typeface="Pretendard" pitchFamily="34" charset="-120"/>
+              </a:rPr>
+              <a:t>SECTION 01</a:t>
+            </a:r>
+            <a:endParaRPr lang="en-US" sz="850" dirty="0"/>
+          </a:p>
+        </p:txBody>
+      </p:sp>
+    </p:spTree>
+  </p:cSld>
+  <p:clrMapOvr>
+    <a:masterClrMapping/>
+  </p:clrMapOvr>
+</p:sld>
+</file>
+
+<file path=ppt/slides/slide4.xml><?xml version="1.0" encoding="utf-8"?>
+<p:sld xmlns:a="http://schemas.openxmlformats.org/drawingml/2006/main" xmlns:r="http://schemas.openxmlformats.org/officeDocument/2006/relationships" xmlns:p="http://schemas.openxmlformats.org/presentationml/2006/main">
+  <p:cSld name="Slide 4">
     <p:bg>
       <p:bgPr>
         <a:solidFill>
@@ -4891,7 +3763,7 @@
                 <a:ea typeface="Pretendard" pitchFamily="34" charset="-122"/>
                 <a:cs typeface="Pretendard" pitchFamily="34" charset="-120"/>
               </a:rPr>
-              <a:t>OBJECTIVES</a:t>
+              <a:t>RULE</a:t>
             </a:r>
             <a:endParaRPr lang="en-US" sz="950" dirty="0"/>
           </a:p>
@@ -4926,11 +3798,11 @@
                 <a:solidFill>
                   <a:srgbClr val="111111"/>
                 </a:solidFill>
-                <a:latin typeface="Pretendard Black" pitchFamily="34" charset="0"/>
-                <a:ea typeface="Pretendard Black" pitchFamily="34" charset="-122"/>
-                <a:cs typeface="Pretendard Black" pitchFamily="34" charset="-120"/>
-              </a:rPr>
-              <a:t>오늘 끝나면 여러분은</a:t>
+                <a:latin typeface="Pretendard SemiBold" pitchFamily="34" charset="0"/>
+                <a:ea typeface="Pretendard SemiBold" pitchFamily="34" charset="-122"/>
+                <a:cs typeface="Pretendard SemiBold" pitchFamily="34" charset="-120"/>
+              </a:rPr>
+              <a:t>컬러 적용 세 원칙</a:t>
             </a:r>
             <a:endParaRPr lang="en-US" sz="3000" dirty="0"/>
           </a:p>
@@ -4938,13 +3810,571 @@
       </p:sp>
       <p:sp>
         <p:nvSpPr>
-          <p:cNvPr id="8" name="Shape 6"/>
-          <p:cNvSpPr/>
-          <p:nvPr/>
-        </p:nvSpPr>
-        <p:spPr>
-          <a:xfrm>
-            <a:off x="640080" y="1664208"/>
+          <p:cNvPr id="8" name="Text 6"/>
+          <p:cNvSpPr/>
+          <p:nvPr/>
+        </p:nvSpPr>
+        <p:spPr>
+          <a:xfrm>
+            <a:off x="640080" y="1371600"/>
+            <a:ext cx="10911535" cy="219456"/>
+          </a:xfrm>
+          <a:prstGeom prst="rect">
+            <a:avLst/>
+          </a:prstGeom>
+          <a:noFill/>
+          <a:ln/>
+        </p:spPr>
+        <p:txBody>
+          <a:bodyPr wrap="square" lIns="0" tIns="0" rIns="0" bIns="0" rtlCol="0" anchor="ctr"/>
+          <a:lstStyle/>
+          <a:p>
+            <a:pPr indent="0" marL="0">
+              <a:buNone/>
+            </a:pPr>
+            <a:r>
+              <a:rPr lang="en-US" sz="1150" dirty="0">
+                <a:solidFill>
+                  <a:srgbClr val="6E6E6E"/>
+                </a:solidFill>
+                <a:latin typeface="Pretendard" pitchFamily="34" charset="0"/>
+                <a:ea typeface="Pretendard" pitchFamily="34" charset="-122"/>
+                <a:cs typeface="Pretendard" pitchFamily="34" charset="-120"/>
+              </a:rPr>
+              <a:t>지키기 어려운 것이 아니라 잊기 쉬운 것들입니다.</a:t>
+            </a:r>
+            <a:endParaRPr lang="en-US" sz="1150" dirty="0"/>
+          </a:p>
+        </p:txBody>
+      </p:sp>
+      <p:sp>
+        <p:nvSpPr>
+          <p:cNvPr id="9" name="Shape 7"/>
+          <p:cNvSpPr/>
+          <p:nvPr/>
+        </p:nvSpPr>
+        <p:spPr>
+          <a:xfrm>
+            <a:off x="640080" y="1737360"/>
+            <a:ext cx="3393338" cy="3035808"/>
+          </a:xfrm>
+          <a:prstGeom prst="rect">
+            <a:avLst/>
+          </a:prstGeom>
+          <a:solidFill>
+            <a:srgbClr val="FFFFFF"/>
+          </a:solidFill>
+          <a:ln w="12700">
+            <a:solidFill>
+              <a:srgbClr val="DCDCDC"/>
+            </a:solidFill>
+            <a:prstDash val="solid"/>
+          </a:ln>
+        </p:spPr>
+      </p:sp>
+      <p:sp>
+        <p:nvSpPr>
+          <p:cNvPr id="10" name="Shape 8"/>
+          <p:cNvSpPr/>
+          <p:nvPr/>
+        </p:nvSpPr>
+        <p:spPr>
+          <a:xfrm>
+            <a:off x="1024128" y="2011680"/>
+            <a:ext cx="365760" cy="365760"/>
+          </a:xfrm>
+          <a:prstGeom prst="ellipse">
+            <a:avLst/>
+          </a:prstGeom>
+          <a:solidFill>
+            <a:srgbClr val="FFFFFF"/>
+          </a:solidFill>
+          <a:ln w="12700">
+            <a:solidFill>
+              <a:srgbClr val="111111"/>
+            </a:solidFill>
+            <a:prstDash val="solid"/>
+          </a:ln>
+        </p:spPr>
+      </p:sp>
+      <p:sp>
+        <p:nvSpPr>
+          <p:cNvPr id="11" name="Text 9"/>
+          <p:cNvSpPr/>
+          <p:nvPr/>
+        </p:nvSpPr>
+        <p:spPr>
+          <a:xfrm>
+            <a:off x="1024128" y="2011680"/>
+            <a:ext cx="365760" cy="365760"/>
+          </a:xfrm>
+          <a:prstGeom prst="rect">
+            <a:avLst/>
+          </a:prstGeom>
+          <a:noFill/>
+          <a:ln/>
+        </p:spPr>
+        <p:txBody>
+          <a:bodyPr wrap="square" lIns="0" tIns="0" rIns="0" bIns="0" rtlCol="0" anchor="ctr"/>
+          <a:lstStyle/>
+          <a:p>
+            <a:pPr algn="ctr" indent="0" marL="0">
+              <a:buNone/>
+            </a:pPr>
+            <a:r>
+              <a:rPr lang="en-US" sz="1150" b="1" dirty="0">
+                <a:solidFill>
+                  <a:srgbClr val="111111"/>
+                </a:solidFill>
+                <a:latin typeface="Pretendard" pitchFamily="34" charset="0"/>
+                <a:ea typeface="Pretendard" pitchFamily="34" charset="-122"/>
+                <a:cs typeface="Pretendard" pitchFamily="34" charset="-120"/>
+              </a:rPr>
+              <a:t>01</a:t>
+            </a:r>
+            <a:endParaRPr lang="en-US" sz="1150" dirty="0"/>
+          </a:p>
+        </p:txBody>
+      </p:sp>
+      <p:sp>
+        <p:nvSpPr>
+          <p:cNvPr id="12" name="Text 10"/>
+          <p:cNvSpPr/>
+          <p:nvPr/>
+        </p:nvSpPr>
+        <p:spPr>
+          <a:xfrm>
+            <a:off x="1024128" y="2505456"/>
+            <a:ext cx="2625242" cy="457200"/>
+          </a:xfrm>
+          <a:prstGeom prst="rect">
+            <a:avLst/>
+          </a:prstGeom>
+          <a:noFill/>
+          <a:ln/>
+        </p:spPr>
+        <p:txBody>
+          <a:bodyPr wrap="square" lIns="0" tIns="0" rIns="0" bIns="0" rtlCol="0" anchor="t"/>
+          <a:lstStyle/>
+          <a:p>
+            <a:pPr indent="0" marL="0">
+              <a:lnSpc>
+                <a:spcPct val="114000"/>
+              </a:lnSpc>
+              <a:buNone/>
+            </a:pPr>
+            <a:r>
+              <a:rPr lang="en-US" sz="1700" dirty="0">
+                <a:solidFill>
+                  <a:srgbClr val="111111"/>
+                </a:solidFill>
+                <a:latin typeface="Pretendard SemiBold" pitchFamily="34" charset="0"/>
+                <a:ea typeface="Pretendard SemiBold" pitchFamily="34" charset="-122"/>
+                <a:cs typeface="Pretendard SemiBold" pitchFamily="34" charset="-120"/>
+              </a:rPr>
+              <a:t>강조색은 한 지면에 한 번</a:t>
+            </a:r>
+            <a:endParaRPr lang="en-US" sz="1700" dirty="0"/>
+          </a:p>
+        </p:txBody>
+      </p:sp>
+      <p:sp>
+        <p:nvSpPr>
+          <p:cNvPr id="13" name="Text 11"/>
+          <p:cNvSpPr/>
+          <p:nvPr/>
+        </p:nvSpPr>
+        <p:spPr>
+          <a:xfrm>
+            <a:off x="1024128" y="2999232"/>
+            <a:ext cx="2625242" cy="1645920"/>
+          </a:xfrm>
+          <a:prstGeom prst="rect">
+            <a:avLst/>
+          </a:prstGeom>
+          <a:noFill/>
+          <a:ln/>
+        </p:spPr>
+        <p:txBody>
+          <a:bodyPr wrap="square" lIns="0" tIns="0" rIns="0" bIns="0" rtlCol="0" anchor="t"/>
+          <a:lstStyle/>
+          <a:p>
+            <a:pPr indent="0" marL="0">
+              <a:lnSpc>
+                <a:spcPct val="130000"/>
+              </a:lnSpc>
+              <a:buNone/>
+            </a:pPr>
+            <a:r>
+              <a:rPr lang="en-US" sz="1150" dirty="0">
+                <a:solidFill>
+                  <a:srgbClr val="6E6E6E"/>
+                </a:solidFill>
+                <a:latin typeface="Pretendard" pitchFamily="34" charset="0"/>
+                <a:ea typeface="Pretendard" pitchFamily="34" charset="-122"/>
+                <a:cs typeface="Pretendard" pitchFamily="34" charset="-120"/>
+              </a:rPr>
+              <a:t>제목이든 태그든 하나에만. 두 곳에 쓰면 시선이 나뉘고 강조가 사라집니다.</a:t>
+            </a:r>
+            <a:endParaRPr lang="en-US" sz="1150" dirty="0"/>
+          </a:p>
+        </p:txBody>
+      </p:sp>
+      <p:sp>
+        <p:nvSpPr>
+          <p:cNvPr id="14" name="Shape 12"/>
+          <p:cNvSpPr/>
+          <p:nvPr/>
+        </p:nvSpPr>
+        <p:spPr>
+          <a:xfrm>
+            <a:off x="4399178" y="1737360"/>
+            <a:ext cx="3393338" cy="3035808"/>
+          </a:xfrm>
+          <a:prstGeom prst="rect">
+            <a:avLst/>
+          </a:prstGeom>
+          <a:solidFill>
+            <a:srgbClr val="FFFFFF"/>
+          </a:solidFill>
+          <a:ln w="12700">
+            <a:solidFill>
+              <a:srgbClr val="DCDCDC"/>
+            </a:solidFill>
+            <a:prstDash val="solid"/>
+          </a:ln>
+        </p:spPr>
+      </p:sp>
+      <p:sp>
+        <p:nvSpPr>
+          <p:cNvPr id="15" name="Shape 13"/>
+          <p:cNvSpPr/>
+          <p:nvPr/>
+        </p:nvSpPr>
+        <p:spPr>
+          <a:xfrm>
+            <a:off x="4783226" y="2011680"/>
+            <a:ext cx="365760" cy="365760"/>
+          </a:xfrm>
+          <a:prstGeom prst="ellipse">
+            <a:avLst/>
+          </a:prstGeom>
+          <a:solidFill>
+            <a:srgbClr val="FFFFFF"/>
+          </a:solidFill>
+          <a:ln w="12700">
+            <a:solidFill>
+              <a:srgbClr val="111111"/>
+            </a:solidFill>
+            <a:prstDash val="solid"/>
+          </a:ln>
+        </p:spPr>
+      </p:sp>
+      <p:sp>
+        <p:nvSpPr>
+          <p:cNvPr id="16" name="Text 14"/>
+          <p:cNvSpPr/>
+          <p:nvPr/>
+        </p:nvSpPr>
+        <p:spPr>
+          <a:xfrm>
+            <a:off x="4783226" y="2011680"/>
+            <a:ext cx="365760" cy="365760"/>
+          </a:xfrm>
+          <a:prstGeom prst="rect">
+            <a:avLst/>
+          </a:prstGeom>
+          <a:noFill/>
+          <a:ln/>
+        </p:spPr>
+        <p:txBody>
+          <a:bodyPr wrap="square" lIns="0" tIns="0" rIns="0" bIns="0" rtlCol="0" anchor="ctr"/>
+          <a:lstStyle/>
+          <a:p>
+            <a:pPr algn="ctr" indent="0" marL="0">
+              <a:buNone/>
+            </a:pPr>
+            <a:r>
+              <a:rPr lang="en-US" sz="1150" b="1" dirty="0">
+                <a:solidFill>
+                  <a:srgbClr val="111111"/>
+                </a:solidFill>
+                <a:latin typeface="Pretendard" pitchFamily="34" charset="0"/>
+                <a:ea typeface="Pretendard" pitchFamily="34" charset="-122"/>
+                <a:cs typeface="Pretendard" pitchFamily="34" charset="-120"/>
+              </a:rPr>
+              <a:t>02</a:t>
+            </a:r>
+            <a:endParaRPr lang="en-US" sz="1150" dirty="0"/>
+          </a:p>
+        </p:txBody>
+      </p:sp>
+      <p:sp>
+        <p:nvSpPr>
+          <p:cNvPr id="17" name="Text 15"/>
+          <p:cNvSpPr/>
+          <p:nvPr/>
+        </p:nvSpPr>
+        <p:spPr>
+          <a:xfrm>
+            <a:off x="4783226" y="2505456"/>
+            <a:ext cx="2625242" cy="457200"/>
+          </a:xfrm>
+          <a:prstGeom prst="rect">
+            <a:avLst/>
+          </a:prstGeom>
+          <a:noFill/>
+          <a:ln/>
+        </p:spPr>
+        <p:txBody>
+          <a:bodyPr wrap="square" lIns="0" tIns="0" rIns="0" bIns="0" rtlCol="0" anchor="t"/>
+          <a:lstStyle/>
+          <a:p>
+            <a:pPr indent="0" marL="0">
+              <a:lnSpc>
+                <a:spcPct val="114000"/>
+              </a:lnSpc>
+              <a:buNone/>
+            </a:pPr>
+            <a:r>
+              <a:rPr lang="en-US" sz="1700" dirty="0">
+                <a:solidFill>
+                  <a:srgbClr val="111111"/>
+                </a:solidFill>
+                <a:latin typeface="Pretendard SemiBold" pitchFamily="34" charset="0"/>
+                <a:ea typeface="Pretendard SemiBold" pitchFamily="34" charset="-122"/>
+                <a:cs typeface="Pretendard SemiBold" pitchFamily="34" charset="-120"/>
+              </a:rPr>
+              <a:t>작업 이미지의 색과 부딪히지 않게</a:t>
+            </a:r>
+            <a:endParaRPr lang="en-US" sz="1700" dirty="0"/>
+          </a:p>
+        </p:txBody>
+      </p:sp>
+      <p:sp>
+        <p:nvSpPr>
+          <p:cNvPr id="18" name="Text 16"/>
+          <p:cNvSpPr/>
+          <p:nvPr/>
+        </p:nvSpPr>
+        <p:spPr>
+          <a:xfrm>
+            <a:off x="4783226" y="2999232"/>
+            <a:ext cx="2625242" cy="1645920"/>
+          </a:xfrm>
+          <a:prstGeom prst="rect">
+            <a:avLst/>
+          </a:prstGeom>
+          <a:noFill/>
+          <a:ln/>
+        </p:spPr>
+        <p:txBody>
+          <a:bodyPr wrap="square" lIns="0" tIns="0" rIns="0" bIns="0" rtlCol="0" anchor="t"/>
+          <a:lstStyle/>
+          <a:p>
+            <a:pPr indent="0" marL="0">
+              <a:lnSpc>
+                <a:spcPct val="130000"/>
+              </a:lnSpc>
+              <a:buNone/>
+            </a:pPr>
+            <a:r>
+              <a:rPr lang="en-US" sz="1150" dirty="0">
+                <a:solidFill>
+                  <a:srgbClr val="6E6E6E"/>
+                </a:solidFill>
+                <a:latin typeface="Pretendard" pitchFamily="34" charset="0"/>
+                <a:ea typeface="Pretendard" pitchFamily="34" charset="-122"/>
+                <a:cs typeface="Pretendard" pitchFamily="34" charset="-120"/>
+              </a:rPr>
+              <a:t>결과 이미지가 이미 강한 색이면 지면은 무채색으로. 지면 색이 작업과 경쟁하면 둘 다 죽습니다.</a:t>
+            </a:r>
+            <a:endParaRPr lang="en-US" sz="1150" dirty="0"/>
+          </a:p>
+        </p:txBody>
+      </p:sp>
+      <p:sp>
+        <p:nvSpPr>
+          <p:cNvPr id="19" name="Shape 17"/>
+          <p:cNvSpPr/>
+          <p:nvPr/>
+        </p:nvSpPr>
+        <p:spPr>
+          <a:xfrm>
+            <a:off x="8158277" y="1737360"/>
+            <a:ext cx="3393338" cy="3035808"/>
+          </a:xfrm>
+          <a:prstGeom prst="rect">
+            <a:avLst/>
+          </a:prstGeom>
+          <a:solidFill>
+            <a:srgbClr val="FFFFFF"/>
+          </a:solidFill>
+          <a:ln w="12700">
+            <a:solidFill>
+              <a:srgbClr val="DCDCDC"/>
+            </a:solidFill>
+            <a:prstDash val="solid"/>
+          </a:ln>
+        </p:spPr>
+      </p:sp>
+      <p:sp>
+        <p:nvSpPr>
+          <p:cNvPr id="20" name="Shape 18"/>
+          <p:cNvSpPr/>
+          <p:nvPr/>
+        </p:nvSpPr>
+        <p:spPr>
+          <a:xfrm>
+            <a:off x="8542325" y="2011680"/>
+            <a:ext cx="365760" cy="365760"/>
+          </a:xfrm>
+          <a:prstGeom prst="ellipse">
+            <a:avLst/>
+          </a:prstGeom>
+          <a:solidFill>
+            <a:srgbClr val="FFFFFF"/>
+          </a:solidFill>
+          <a:ln w="12700">
+            <a:solidFill>
+              <a:srgbClr val="111111"/>
+            </a:solidFill>
+            <a:prstDash val="solid"/>
+          </a:ln>
+        </p:spPr>
+      </p:sp>
+      <p:sp>
+        <p:nvSpPr>
+          <p:cNvPr id="21" name="Text 19"/>
+          <p:cNvSpPr/>
+          <p:nvPr/>
+        </p:nvSpPr>
+        <p:spPr>
+          <a:xfrm>
+            <a:off x="8542325" y="2011680"/>
+            <a:ext cx="365760" cy="365760"/>
+          </a:xfrm>
+          <a:prstGeom prst="rect">
+            <a:avLst/>
+          </a:prstGeom>
+          <a:noFill/>
+          <a:ln/>
+        </p:spPr>
+        <p:txBody>
+          <a:bodyPr wrap="square" lIns="0" tIns="0" rIns="0" bIns="0" rtlCol="0" anchor="ctr"/>
+          <a:lstStyle/>
+          <a:p>
+            <a:pPr algn="ctr" indent="0" marL="0">
+              <a:buNone/>
+            </a:pPr>
+            <a:r>
+              <a:rPr lang="en-US" sz="1150" b="1" dirty="0">
+                <a:solidFill>
+                  <a:srgbClr val="111111"/>
+                </a:solidFill>
+                <a:latin typeface="Pretendard" pitchFamily="34" charset="0"/>
+                <a:ea typeface="Pretendard" pitchFamily="34" charset="-122"/>
+                <a:cs typeface="Pretendard" pitchFamily="34" charset="-120"/>
+              </a:rPr>
+              <a:t>03</a:t>
+            </a:r>
+            <a:endParaRPr lang="en-US" sz="1150" dirty="0"/>
+          </a:p>
+        </p:txBody>
+      </p:sp>
+      <p:sp>
+        <p:nvSpPr>
+          <p:cNvPr id="22" name="Text 20"/>
+          <p:cNvSpPr/>
+          <p:nvPr/>
+        </p:nvSpPr>
+        <p:spPr>
+          <a:xfrm>
+            <a:off x="8542325" y="2505456"/>
+            <a:ext cx="2625242" cy="457200"/>
+          </a:xfrm>
+          <a:prstGeom prst="rect">
+            <a:avLst/>
+          </a:prstGeom>
+          <a:noFill/>
+          <a:ln/>
+        </p:spPr>
+        <p:txBody>
+          <a:bodyPr wrap="square" lIns="0" tIns="0" rIns="0" bIns="0" rtlCol="0" anchor="t"/>
+          <a:lstStyle/>
+          <a:p>
+            <a:pPr indent="0" marL="0">
+              <a:lnSpc>
+                <a:spcPct val="114000"/>
+              </a:lnSpc>
+              <a:buNone/>
+            </a:pPr>
+            <a:r>
+              <a:rPr lang="en-US" sz="1700" dirty="0">
+                <a:solidFill>
+                  <a:srgbClr val="111111"/>
+                </a:solidFill>
+                <a:latin typeface="Pretendard SemiBold" pitchFamily="34" charset="0"/>
+                <a:ea typeface="Pretendard SemiBold" pitchFamily="34" charset="-122"/>
+                <a:cs typeface="Pretendard SemiBold" pitchFamily="34" charset="-120"/>
+              </a:rPr>
+              <a:t>화면과 인쇄를 함께 확인</a:t>
+            </a:r>
+            <a:endParaRPr lang="en-US" sz="1700" dirty="0"/>
+          </a:p>
+        </p:txBody>
+      </p:sp>
+      <p:sp>
+        <p:nvSpPr>
+          <p:cNvPr id="23" name="Text 21"/>
+          <p:cNvSpPr/>
+          <p:nvPr/>
+        </p:nvSpPr>
+        <p:spPr>
+          <a:xfrm>
+            <a:off x="8542325" y="2999232"/>
+            <a:ext cx="2625242" cy="1645920"/>
+          </a:xfrm>
+          <a:prstGeom prst="rect">
+            <a:avLst/>
+          </a:prstGeom>
+          <a:noFill/>
+          <a:ln/>
+        </p:spPr>
+        <p:txBody>
+          <a:bodyPr wrap="square" lIns="0" tIns="0" rIns="0" bIns="0" rtlCol="0" anchor="t"/>
+          <a:lstStyle/>
+          <a:p>
+            <a:pPr indent="0" marL="0">
+              <a:lnSpc>
+                <a:spcPct val="130000"/>
+              </a:lnSpc>
+              <a:buNone/>
+            </a:pPr>
+            <a:r>
+              <a:rPr lang="en-US" sz="1150" dirty="0">
+                <a:solidFill>
+                  <a:srgbClr val="6E6E6E"/>
+                </a:solidFill>
+                <a:latin typeface="Pretendard" pitchFamily="34" charset="0"/>
+                <a:ea typeface="Pretendard" pitchFamily="34" charset="-122"/>
+                <a:cs typeface="Pretendard" pitchFamily="34" charset="-120"/>
+              </a:rPr>
+              <a:t>화면에서 선명한 색이 인쇄에서 탁해집니다. 인쇄본을 낼 계획이면 지금 한 장 뽑아 확인하세요.</a:t>
+            </a:r>
+            <a:endParaRPr lang="en-US" sz="1150" dirty="0"/>
+          </a:p>
+        </p:txBody>
+      </p:sp>
+      <p:sp>
+        <p:nvSpPr>
+          <p:cNvPr id="24" name="Shape 22"/>
+          <p:cNvSpPr/>
+          <p:nvPr/>
+        </p:nvSpPr>
+        <p:spPr>
+          <a:xfrm>
+            <a:off x="640080" y="5084064"/>
             <a:ext cx="10911535" cy="7315"/>
           </a:xfrm>
           <a:prstGeom prst="rect">
@@ -4963,55 +4393,33 @@
       </p:sp>
       <p:sp>
         <p:nvSpPr>
-          <p:cNvPr id="9" name="Shape 7"/>
-          <p:cNvSpPr/>
-          <p:nvPr/>
-        </p:nvSpPr>
-        <p:spPr>
-          <a:xfrm>
-            <a:off x="640080" y="1810512"/>
-            <a:ext cx="310896" cy="310896"/>
-          </a:xfrm>
-          <a:prstGeom prst="ellipse">
-            <a:avLst/>
-          </a:prstGeom>
-          <a:solidFill>
-            <a:srgbClr val="FFFFFF"/>
-          </a:solidFill>
-          <a:ln w="12700">
-            <a:solidFill>
-              <a:srgbClr val="111111"/>
-            </a:solidFill>
-            <a:prstDash val="solid"/>
-          </a:ln>
-        </p:spPr>
-      </p:sp>
-      <p:sp>
-        <p:nvSpPr>
-          <p:cNvPr id="10" name="Text 8"/>
-          <p:cNvSpPr/>
-          <p:nvPr/>
-        </p:nvSpPr>
-        <p:spPr>
-          <a:xfrm>
-            <a:off x="640080" y="1810512"/>
-            <a:ext cx="310896" cy="310896"/>
-          </a:xfrm>
-          <a:prstGeom prst="rect">
-            <a:avLst/>
-          </a:prstGeom>
-          <a:noFill/>
-          <a:ln/>
-        </p:spPr>
-        <p:txBody>
-          <a:bodyPr wrap="square" lIns="0" tIns="0" rIns="0" bIns="0" rtlCol="0" anchor="ctr"/>
-          <a:lstStyle/>
-          <a:p>
-            <a:pPr algn="ctr" indent="0" marL="0">
-              <a:buNone/>
-            </a:pPr>
-            <a:r>
-              <a:rPr lang="en-US" sz="1000" b="1" dirty="0">
+          <p:cNvPr id="25" name="Text 23"/>
+          <p:cNvSpPr/>
+          <p:nvPr/>
+        </p:nvSpPr>
+        <p:spPr>
+          <a:xfrm>
+            <a:off x="640080" y="5193792"/>
+            <a:ext cx="10911535" cy="438912"/>
+          </a:xfrm>
+          <a:prstGeom prst="rect">
+            <a:avLst/>
+          </a:prstGeom>
+          <a:noFill/>
+          <a:ln/>
+        </p:spPr>
+        <p:txBody>
+          <a:bodyPr wrap="square" lIns="0" tIns="0" rIns="0" bIns="0" rtlCol="0" anchor="t"/>
+          <a:lstStyle/>
+          <a:p>
+            <a:pPr indent="0" marL="0">
+              <a:lnSpc>
+                <a:spcPct val="120000"/>
+              </a:lnSpc>
+              <a:buNone/>
+            </a:pPr>
+            <a:r>
+              <a:rPr lang="en-US" sz="1300" b="1" dirty="0">
                 <a:solidFill>
                   <a:srgbClr val="111111"/>
                 </a:solidFill>
@@ -5019,99 +4427,21 @@
                 <a:ea typeface="Pretendard" pitchFamily="34" charset="-122"/>
                 <a:cs typeface="Pretendard" pitchFamily="34" charset="-120"/>
               </a:rPr>
-              <a:t>1</a:t>
-            </a:r>
-            <a:endParaRPr lang="en-US" sz="1000" dirty="0"/>
-          </a:p>
-        </p:txBody>
-      </p:sp>
-      <p:sp>
-        <p:nvSpPr>
-          <p:cNvPr id="11" name="Text 9"/>
-          <p:cNvSpPr/>
-          <p:nvPr/>
-        </p:nvSpPr>
-        <p:spPr>
-          <a:xfrm>
-            <a:off x="1188720" y="1719072"/>
-            <a:ext cx="9875520" cy="310896"/>
-          </a:xfrm>
-          <a:prstGeom prst="rect">
-            <a:avLst/>
-          </a:prstGeom>
-          <a:noFill/>
-          <a:ln/>
-        </p:spPr>
-        <p:txBody>
-          <a:bodyPr wrap="square" lIns="0" tIns="0" rIns="0" bIns="0" rtlCol="0" anchor="ctr"/>
-          <a:lstStyle/>
-          <a:p>
-            <a:pPr indent="0" marL="0">
-              <a:buNone/>
-            </a:pPr>
-            <a:r>
-              <a:rPr lang="en-US" sz="1450" dirty="0">
-                <a:solidFill>
-                  <a:srgbClr val="111111"/>
-                </a:solidFill>
-                <a:latin typeface="Pretendard Black" pitchFamily="34" charset="0"/>
-                <a:ea typeface="Pretendard Black" pitchFamily="34" charset="-122"/>
-                <a:cs typeface="Pretendard Black" pitchFamily="34" charset="-120"/>
-              </a:rPr>
-              <a:t>컬러를 규칙대로 쓸 수 있다</a:t>
-            </a:r>
-            <a:endParaRPr lang="en-US" sz="1450" dirty="0"/>
-          </a:p>
-        </p:txBody>
-      </p:sp>
-      <p:sp>
-        <p:nvSpPr>
-          <p:cNvPr id="12" name="Text 10"/>
-          <p:cNvSpPr/>
-          <p:nvPr/>
-        </p:nvSpPr>
-        <p:spPr>
-          <a:xfrm>
-            <a:off x="1188720" y="2029968"/>
-            <a:ext cx="9875520" cy="292608"/>
-          </a:xfrm>
-          <a:prstGeom prst="rect">
-            <a:avLst/>
-          </a:prstGeom>
-          <a:noFill/>
-          <a:ln/>
-        </p:spPr>
-        <p:txBody>
-          <a:bodyPr wrap="square" lIns="0" tIns="0" rIns="0" bIns="0" rtlCol="0" anchor="ctr"/>
-          <a:lstStyle/>
-          <a:p>
-            <a:pPr indent="0" marL="0">
-              <a:buNone/>
-            </a:pPr>
-            <a:r>
-              <a:rPr lang="en-US" sz="1100" dirty="0">
-                <a:solidFill>
-                  <a:srgbClr val="6E6E6E"/>
-                </a:solidFill>
-                <a:latin typeface="Pretendard" pitchFamily="34" charset="0"/>
-                <a:ea typeface="Pretendard" pitchFamily="34" charset="-122"/>
-                <a:cs typeface="Pretendard" pitchFamily="34" charset="-120"/>
-              </a:rPr>
-              <a:t>9주차에 정한 세 색을 예외 없이 적용합니다</a:t>
-            </a:r>
-            <a:endParaRPr lang="en-US" sz="1100" dirty="0"/>
-          </a:p>
-        </p:txBody>
-      </p:sp>
-      <p:sp>
-        <p:nvSpPr>
-          <p:cNvPr id="13" name="Shape 11"/>
-          <p:cNvSpPr/>
-          <p:nvPr/>
-        </p:nvSpPr>
-        <p:spPr>
-          <a:xfrm>
-            <a:off x="640080" y="2670048"/>
+              <a:t>9주차에 정한 세 색 외의 색이 지면에 등장했다면, 그건 결정이 아니라 실수일 가능성이 높습니다.</a:t>
+            </a:r>
+            <a:endParaRPr lang="en-US" sz="1300" dirty="0"/>
+          </a:p>
+        </p:txBody>
+      </p:sp>
+      <p:sp>
+        <p:nvSpPr>
+          <p:cNvPr id="26" name="Shape 24"/>
+          <p:cNvSpPr/>
+          <p:nvPr/>
+        </p:nvSpPr>
+        <p:spPr>
+          <a:xfrm>
+            <a:off x="640080" y="6291072"/>
             <a:ext cx="10911535" cy="7315"/>
           </a:xfrm>
           <a:prstGeom prst="rect">
@@ -5130,341 +4460,7 @@
       </p:sp>
       <p:sp>
         <p:nvSpPr>
-          <p:cNvPr id="14" name="Shape 12"/>
-          <p:cNvSpPr/>
-          <p:nvPr/>
-        </p:nvSpPr>
-        <p:spPr>
-          <a:xfrm>
-            <a:off x="640080" y="2834640"/>
-            <a:ext cx="310896" cy="310896"/>
-          </a:xfrm>
-          <a:prstGeom prst="ellipse">
-            <a:avLst/>
-          </a:prstGeom>
-          <a:solidFill>
-            <a:srgbClr val="FFFFFF"/>
-          </a:solidFill>
-          <a:ln w="12700">
-            <a:solidFill>
-              <a:srgbClr val="111111"/>
-            </a:solidFill>
-            <a:prstDash val="solid"/>
-          </a:ln>
-        </p:spPr>
-      </p:sp>
-      <p:sp>
-        <p:nvSpPr>
-          <p:cNvPr id="15" name="Text 13"/>
-          <p:cNvSpPr/>
-          <p:nvPr/>
-        </p:nvSpPr>
-        <p:spPr>
-          <a:xfrm>
-            <a:off x="640080" y="2834640"/>
-            <a:ext cx="310896" cy="310896"/>
-          </a:xfrm>
-          <a:prstGeom prst="rect">
-            <a:avLst/>
-          </a:prstGeom>
-          <a:noFill/>
-          <a:ln/>
-        </p:spPr>
-        <p:txBody>
-          <a:bodyPr wrap="square" lIns="0" tIns="0" rIns="0" bIns="0" rtlCol="0" anchor="ctr"/>
-          <a:lstStyle/>
-          <a:p>
-            <a:pPr algn="ctr" indent="0" marL="0">
-              <a:buNone/>
-            </a:pPr>
-            <a:r>
-              <a:rPr lang="en-US" sz="1000" b="1" dirty="0">
-                <a:solidFill>
-                  <a:srgbClr val="111111"/>
-                </a:solidFill>
-                <a:latin typeface="Pretendard" pitchFamily="34" charset="0"/>
-                <a:ea typeface="Pretendard" pitchFamily="34" charset="-122"/>
-                <a:cs typeface="Pretendard" pitchFamily="34" charset="-120"/>
-              </a:rPr>
-              <a:t>2</a:t>
-            </a:r>
-            <a:endParaRPr lang="en-US" sz="1000" dirty="0"/>
-          </a:p>
-        </p:txBody>
-      </p:sp>
-      <p:sp>
-        <p:nvSpPr>
-          <p:cNvPr id="16" name="Text 14"/>
-          <p:cNvSpPr/>
-          <p:nvPr/>
-        </p:nvSpPr>
-        <p:spPr>
-          <a:xfrm>
-            <a:off x="1188720" y="2743200"/>
-            <a:ext cx="9875520" cy="310896"/>
-          </a:xfrm>
-          <a:prstGeom prst="rect">
-            <a:avLst/>
-          </a:prstGeom>
-          <a:noFill/>
-          <a:ln/>
-        </p:spPr>
-        <p:txBody>
-          <a:bodyPr wrap="square" lIns="0" tIns="0" rIns="0" bIns="0" rtlCol="0" anchor="ctr"/>
-          <a:lstStyle/>
-          <a:p>
-            <a:pPr indent="0" marL="0">
-              <a:buNone/>
-            </a:pPr>
-            <a:r>
-              <a:rPr lang="en-US" sz="1450" dirty="0">
-                <a:solidFill>
-                  <a:srgbClr val="111111"/>
-                </a:solidFill>
-                <a:latin typeface="Pretendard Black" pitchFamily="34" charset="0"/>
-                <a:ea typeface="Pretendard Black" pitchFamily="34" charset="-122"/>
-                <a:cs typeface="Pretendard Black" pitchFamily="34" charset="-120"/>
-              </a:rPr>
-              <a:t>이미지 톤을 통일할 수 있다</a:t>
-            </a:r>
-            <a:endParaRPr lang="en-US" sz="1450" dirty="0"/>
-          </a:p>
-        </p:txBody>
-      </p:sp>
-      <p:sp>
-        <p:nvSpPr>
-          <p:cNvPr id="17" name="Text 15"/>
-          <p:cNvSpPr/>
-          <p:nvPr/>
-        </p:nvSpPr>
-        <p:spPr>
-          <a:xfrm>
-            <a:off x="1188720" y="3054096"/>
-            <a:ext cx="9875520" cy="292608"/>
-          </a:xfrm>
-          <a:prstGeom prst="rect">
-            <a:avLst/>
-          </a:prstGeom>
-          <a:noFill/>
-          <a:ln/>
-        </p:spPr>
-        <p:txBody>
-          <a:bodyPr wrap="square" lIns="0" tIns="0" rIns="0" bIns="0" rtlCol="0" anchor="ctr"/>
-          <a:lstStyle/>
-          <a:p>
-            <a:pPr indent="0" marL="0">
-              <a:buNone/>
-            </a:pPr>
-            <a:r>
-              <a:rPr lang="en-US" sz="1100" dirty="0">
-                <a:solidFill>
-                  <a:srgbClr val="6E6E6E"/>
-                </a:solidFill>
-                <a:latin typeface="Pretendard" pitchFamily="34" charset="0"/>
-                <a:ea typeface="Pretendard" pitchFamily="34" charset="-122"/>
-                <a:cs typeface="Pretendard" pitchFamily="34" charset="-120"/>
-              </a:rPr>
-              <a:t>출처가 다른 이미지들이 한 벌로 보이게 만드는 일</a:t>
-            </a:r>
-            <a:endParaRPr lang="en-US" sz="1100" dirty="0"/>
-          </a:p>
-        </p:txBody>
-      </p:sp>
-      <p:sp>
-        <p:nvSpPr>
-          <p:cNvPr id="18" name="Shape 16"/>
-          <p:cNvSpPr/>
-          <p:nvPr/>
-        </p:nvSpPr>
-        <p:spPr>
-          <a:xfrm>
-            <a:off x="640080" y="3694176"/>
-            <a:ext cx="10911535" cy="7315"/>
-          </a:xfrm>
-          <a:prstGeom prst="rect">
-            <a:avLst/>
-          </a:prstGeom>
-          <a:solidFill>
-            <a:srgbClr val="DCDCDC"/>
-          </a:solidFill>
-          <a:ln w="12700">
-            <a:solidFill>
-              <a:srgbClr val="DCDCDC"/>
-            </a:solidFill>
-            <a:prstDash val="solid"/>
-          </a:ln>
-        </p:spPr>
-      </p:sp>
-      <p:sp>
-        <p:nvSpPr>
-          <p:cNvPr id="19" name="Shape 17"/>
-          <p:cNvSpPr/>
-          <p:nvPr/>
-        </p:nvSpPr>
-        <p:spPr>
-          <a:xfrm>
-            <a:off x="640080" y="3858768"/>
-            <a:ext cx="310896" cy="310896"/>
-          </a:xfrm>
-          <a:prstGeom prst="ellipse">
-            <a:avLst/>
-          </a:prstGeom>
-          <a:solidFill>
-            <a:srgbClr val="FFFFFF"/>
-          </a:solidFill>
-          <a:ln w="12700">
-            <a:solidFill>
-              <a:srgbClr val="111111"/>
-            </a:solidFill>
-            <a:prstDash val="solid"/>
-          </a:ln>
-        </p:spPr>
-      </p:sp>
-      <p:sp>
-        <p:nvSpPr>
-          <p:cNvPr id="20" name="Text 18"/>
-          <p:cNvSpPr/>
-          <p:nvPr/>
-        </p:nvSpPr>
-        <p:spPr>
-          <a:xfrm>
-            <a:off x="640080" y="3858768"/>
-            <a:ext cx="310896" cy="310896"/>
-          </a:xfrm>
-          <a:prstGeom prst="rect">
-            <a:avLst/>
-          </a:prstGeom>
-          <a:noFill/>
-          <a:ln/>
-        </p:spPr>
-        <p:txBody>
-          <a:bodyPr wrap="square" lIns="0" tIns="0" rIns="0" bIns="0" rtlCol="0" anchor="ctr"/>
-          <a:lstStyle/>
-          <a:p>
-            <a:pPr algn="ctr" indent="0" marL="0">
-              <a:buNone/>
-            </a:pPr>
-            <a:r>
-              <a:rPr lang="en-US" sz="1000" b="1" dirty="0">
-                <a:solidFill>
-                  <a:srgbClr val="111111"/>
-                </a:solidFill>
-                <a:latin typeface="Pretendard" pitchFamily="34" charset="0"/>
-                <a:ea typeface="Pretendard" pitchFamily="34" charset="-122"/>
-                <a:cs typeface="Pretendard" pitchFamily="34" charset="-120"/>
-              </a:rPr>
-              <a:t>3</a:t>
-            </a:r>
-            <a:endParaRPr lang="en-US" sz="1000" dirty="0"/>
-          </a:p>
-        </p:txBody>
-      </p:sp>
-      <p:sp>
-        <p:nvSpPr>
-          <p:cNvPr id="21" name="Text 19"/>
-          <p:cNvSpPr/>
-          <p:nvPr/>
-        </p:nvSpPr>
-        <p:spPr>
-          <a:xfrm>
-            <a:off x="1188720" y="3767328"/>
-            <a:ext cx="9875520" cy="310896"/>
-          </a:xfrm>
-          <a:prstGeom prst="rect">
-            <a:avLst/>
-          </a:prstGeom>
-          <a:noFill/>
-          <a:ln/>
-        </p:spPr>
-        <p:txBody>
-          <a:bodyPr wrap="square" lIns="0" tIns="0" rIns="0" bIns="0" rtlCol="0" anchor="ctr"/>
-          <a:lstStyle/>
-          <a:p>
-            <a:pPr indent="0" marL="0">
-              <a:buNone/>
-            </a:pPr>
-            <a:r>
-              <a:rPr lang="en-US" sz="1450" dirty="0">
-                <a:solidFill>
-                  <a:srgbClr val="111111"/>
-                </a:solidFill>
-                <a:latin typeface="Pretendard Black" pitchFamily="34" charset="0"/>
-                <a:ea typeface="Pretendard Black" pitchFamily="34" charset="-122"/>
-                <a:cs typeface="Pretendard Black" pitchFamily="34" charset="-120"/>
-              </a:rPr>
-              <a:t>이미지와 텍스트의 균형을 잡을 수 있다</a:t>
-            </a:r>
-            <a:endParaRPr lang="en-US" sz="1450" dirty="0"/>
-          </a:p>
-        </p:txBody>
-      </p:sp>
-      <p:sp>
-        <p:nvSpPr>
-          <p:cNvPr id="22" name="Text 20"/>
-          <p:cNvSpPr/>
-          <p:nvPr/>
-        </p:nvSpPr>
-        <p:spPr>
-          <a:xfrm>
-            <a:off x="1188720" y="4078224"/>
-            <a:ext cx="9875520" cy="292608"/>
-          </a:xfrm>
-          <a:prstGeom prst="rect">
-            <a:avLst/>
-          </a:prstGeom>
-          <a:noFill/>
-          <a:ln/>
-        </p:spPr>
-        <p:txBody>
-          <a:bodyPr wrap="square" lIns="0" tIns="0" rIns="0" bIns="0" rtlCol="0" anchor="ctr"/>
-          <a:lstStyle/>
-          <a:p>
-            <a:pPr indent="0" marL="0">
-              <a:buNone/>
-            </a:pPr>
-            <a:r>
-              <a:rPr lang="en-US" sz="1100" dirty="0">
-                <a:solidFill>
-                  <a:srgbClr val="6E6E6E"/>
-                </a:solidFill>
-                <a:latin typeface="Pretendard" pitchFamily="34" charset="0"/>
-                <a:ea typeface="Pretendard" pitchFamily="34" charset="-122"/>
-                <a:cs typeface="Pretendard" pitchFamily="34" charset="-120"/>
-              </a:rPr>
-              <a:t>비율과 정렬로 지면을 안정시킵니다</a:t>
-            </a:r>
-            <a:endParaRPr lang="en-US" sz="1100" dirty="0"/>
-          </a:p>
-        </p:txBody>
-      </p:sp>
-      <p:sp>
-        <p:nvSpPr>
-          <p:cNvPr id="23" name="Shape 21"/>
-          <p:cNvSpPr/>
-          <p:nvPr/>
-        </p:nvSpPr>
-        <p:spPr>
-          <a:xfrm>
-            <a:off x="640080" y="6291072"/>
-            <a:ext cx="10911535" cy="7315"/>
-          </a:xfrm>
-          <a:prstGeom prst="rect">
-            <a:avLst/>
-          </a:prstGeom>
-          <a:solidFill>
-            <a:srgbClr val="DCDCDC"/>
-          </a:solidFill>
-          <a:ln w="12700">
-            <a:solidFill>
-              <a:srgbClr val="DCDCDC"/>
-            </a:solidFill>
-            <a:prstDash val="solid"/>
-          </a:ln>
-        </p:spPr>
-      </p:sp>
-      <p:sp>
-        <p:nvSpPr>
-          <p:cNvPr id="24" name="Text 22"/>
+          <p:cNvPr id="27" name="Text 25"/>
           <p:cNvSpPr/>
           <p:nvPr/>
         </p:nvSpPr>
@@ -5503,7 +4499,7 @@
       </p:sp>
       <p:sp>
         <p:nvSpPr>
-          <p:cNvPr id="25" name="Text 23"/>
+          <p:cNvPr id="28" name="Text 26"/>
           <p:cNvSpPr/>
           <p:nvPr/>
         </p:nvSpPr>
@@ -5548,9 +4544,9 @@
 </p:sld>
 </file>
 
-<file path=ppt/slides/slide4.xml><?xml version="1.0" encoding="utf-8"?>
+<file path=ppt/slides/slide5.xml><?xml version="1.0" encoding="utf-8"?>
 <p:sld xmlns:a="http://schemas.openxmlformats.org/drawingml/2006/main" xmlns:r="http://schemas.openxmlformats.org/officeDocument/2006/relationships" xmlns:p="http://schemas.openxmlformats.org/presentationml/2006/main">
-  <p:cSld name="Slide 4">
+  <p:cSld name="Slide 5">
     <p:bg>
       <p:bgPr>
         <a:solidFill>
@@ -5743,11 +4739,11 @@
                 <a:solidFill>
                   <a:srgbClr val="1B1B1B"/>
                 </a:solidFill>
-                <a:latin typeface="Pretendard Black" pitchFamily="34" charset="0"/>
-                <a:ea typeface="Pretendard Black" pitchFamily="34" charset="-122"/>
-                <a:cs typeface="Pretendard Black" pitchFamily="34" charset="-120"/>
-              </a:rPr>
-              <a:t>01</a:t>
+                <a:latin typeface="Pretendard SemiBold" pitchFamily="34" charset="0"/>
+                <a:ea typeface="Pretendard SemiBold" pitchFamily="34" charset="-122"/>
+                <a:cs typeface="Pretendard SemiBold" pitchFamily="34" charset="-120"/>
+              </a:rPr>
+              <a:t>02</a:t>
             </a:r>
             <a:endParaRPr lang="en-US" sz="20000" dirty="0"/>
           </a:p>
@@ -5855,7 +4851,7 @@
                 <a:ea typeface="Pretendard" pitchFamily="34" charset="-122"/>
                 <a:cs typeface="Pretendard" pitchFamily="34" charset="-120"/>
               </a:rPr>
-              <a:t>PART 01</a:t>
+              <a:t>PART 02</a:t>
             </a:r>
             <a:endParaRPr lang="en-US" sz="950" dirty="0"/>
           </a:p>
@@ -5890,11 +4886,11 @@
                 <a:solidFill>
                   <a:srgbClr val="FFFFFF"/>
                 </a:solidFill>
-                <a:latin typeface="Pretendard Black" pitchFamily="34" charset="0"/>
-                <a:ea typeface="Pretendard Black" pitchFamily="34" charset="-122"/>
-                <a:cs typeface="Pretendard Black" pitchFamily="34" charset="-120"/>
-              </a:rPr>
-              <a:t>컬러 적용</a:t>
+                <a:latin typeface="Pretendard SemiBold" pitchFamily="34" charset="0"/>
+                <a:ea typeface="Pretendard SemiBold" pitchFamily="34" charset="-122"/>
+                <a:cs typeface="Pretendard SemiBold" pitchFamily="34" charset="-120"/>
+              </a:rPr>
+              <a:t>이미지 다루기</a:t>
             </a:r>
             <a:endParaRPr lang="en-US" sz="4600" dirty="0"/>
           </a:p>
@@ -5961,7 +4957,7 @@
                 <a:ea typeface="Pretendard Light" pitchFamily="34" charset="-122"/>
                 <a:cs typeface="Pretendard Light" pitchFamily="34" charset="-120"/>
               </a:rPr>
-              <a:t>20분. 정한 규칙을 지키는 것이 전부입니다.</a:t>
+              <a:t>보정의 목적은 예쁘게가 아니라 톤을 맞추는 것입니다.</a:t>
             </a:r>
             <a:endParaRPr lang="en-US" sz="1350" dirty="0"/>
           </a:p>
@@ -6000,7 +4996,7 @@
                 <a:ea typeface="Pretendard" pitchFamily="34" charset="-122"/>
                 <a:cs typeface="Pretendard" pitchFamily="34" charset="-120"/>
               </a:rPr>
-              <a:t>SECTION 01</a:t>
+              <a:t>SECTION 02</a:t>
             </a:r>
             <a:endParaRPr lang="en-US" sz="850" dirty="0"/>
           </a:p>
@@ -6014,9 +5010,9 @@
 </p:sld>
 </file>
 
-<file path=ppt/slides/slide5.xml><?xml version="1.0" encoding="utf-8"?>
+<file path=ppt/slides/slide6.xml><?xml version="1.0" encoding="utf-8"?>
 <p:sld xmlns:a="http://schemas.openxmlformats.org/drawingml/2006/main" xmlns:r="http://schemas.openxmlformats.org/officeDocument/2006/relationships" xmlns:p="http://schemas.openxmlformats.org/presentationml/2006/main">
-  <p:cSld name="Slide 5">
+  <p:cSld name="Slide 6">
     <p:bg>
       <p:bgPr>
         <a:solidFill>
@@ -6213,7 +5209,7 @@
                 <a:ea typeface="Pretendard" pitchFamily="34" charset="-122"/>
                 <a:cs typeface="Pretendard" pitchFamily="34" charset="-120"/>
               </a:rPr>
-              <a:t>RULE</a:t>
+              <a:t>IMAGE</a:t>
             </a:r>
             <a:endParaRPr lang="en-US" sz="950" dirty="0"/>
           </a:p>
@@ -6248,11 +5244,11 @@
                 <a:solidFill>
                   <a:srgbClr val="111111"/>
                 </a:solidFill>
-                <a:latin typeface="Pretendard Black" pitchFamily="34" charset="0"/>
-                <a:ea typeface="Pretendard Black" pitchFamily="34" charset="-122"/>
-                <a:cs typeface="Pretendard Black" pitchFamily="34" charset="-120"/>
-              </a:rPr>
-              <a:t>컬러 적용 세 원칙</a:t>
+                <a:latin typeface="Pretendard SemiBold" pitchFamily="34" charset="0"/>
+                <a:ea typeface="Pretendard SemiBold" pitchFamily="34" charset="-122"/>
+                <a:cs typeface="Pretendard SemiBold" pitchFamily="34" charset="-120"/>
+              </a:rPr>
+              <a:t>이미지 보정 — 이 셋만</a:t>
             </a:r>
             <a:endParaRPr lang="en-US" sz="3000" dirty="0"/>
           </a:p>
@@ -6291,7 +5287,7 @@
                 <a:ea typeface="Pretendard" pitchFamily="34" charset="-122"/>
                 <a:cs typeface="Pretendard" pitchFamily="34" charset="-120"/>
               </a:rPr>
-              <a:t>지키기 어려운 것이 아니라 잊기 쉬운 것들입니다.</a:t>
+              <a:t>복잡한 리터칭은 필요 없습니다. 톤이 맞으면 충분합니다.</a:t>
             </a:r>
             <a:endParaRPr lang="en-US" sz="1150" dirty="0"/>
           </a:p>
@@ -6418,11 +5414,11 @@
                 <a:solidFill>
                   <a:srgbClr val="111111"/>
                 </a:solidFill>
-                <a:latin typeface="Pretendard Black" pitchFamily="34" charset="0"/>
-                <a:ea typeface="Pretendard Black" pitchFamily="34" charset="-122"/>
-                <a:cs typeface="Pretendard Black" pitchFamily="34" charset="-120"/>
-              </a:rPr>
-              <a:t>강조색은 한 지면에 한 번</a:t>
+                <a:latin typeface="Pretendard SemiBold" pitchFamily="34" charset="0"/>
+                <a:ea typeface="Pretendard SemiBold" pitchFamily="34" charset="-122"/>
+                <a:cs typeface="Pretendard SemiBold" pitchFamily="34" charset="-120"/>
+              </a:rPr>
+              <a:t>밝기와 대비 맞추기</a:t>
             </a:r>
             <a:endParaRPr lang="en-US" sz="1700" dirty="0"/>
           </a:p>
@@ -6464,7 +5460,7 @@
                 <a:ea typeface="Pretendard" pitchFamily="34" charset="-122"/>
                 <a:cs typeface="Pretendard" pitchFamily="34" charset="-120"/>
               </a:rPr>
-              <a:t>제목이든 태그든 하나에만. 두 곳에 쓰면 시선이 나뉘고 강조가 사라집니다.</a:t>
+              <a:t>여러 날 여러 장소에서 찍은 사진은 밝기가 제각각입니다. 한 벌로 보이게 기준 하나를 정해 맞춥니다.</a:t>
             </a:r>
             <a:endParaRPr lang="en-US" sz="1150" dirty="0"/>
           </a:p>
@@ -6479,6 +5475,179 @@
         <p:spPr>
           <a:xfrm>
             <a:off x="4399178" y="1737360"/>
+            <a:ext cx="3393338" cy="3035808"/>
+          </a:xfrm>
+          <a:prstGeom prst="rect">
+            <a:avLst/>
+          </a:prstGeom>
+          <a:solidFill>
+            <a:srgbClr val="111111"/>
+          </a:solidFill>
+          <a:ln w="12700">
+            <a:solidFill>
+              <a:srgbClr val="111111"/>
+            </a:solidFill>
+            <a:prstDash val="solid"/>
+          </a:ln>
+        </p:spPr>
+      </p:sp>
+      <p:sp>
+        <p:nvSpPr>
+          <p:cNvPr id="15" name="Shape 13"/>
+          <p:cNvSpPr/>
+          <p:nvPr/>
+        </p:nvSpPr>
+        <p:spPr>
+          <a:xfrm>
+            <a:off x="4783226" y="2011680"/>
+            <a:ext cx="365760" cy="365760"/>
+          </a:xfrm>
+          <a:prstGeom prst="ellipse">
+            <a:avLst/>
+          </a:prstGeom>
+          <a:solidFill>
+            <a:srgbClr val="111111"/>
+          </a:solidFill>
+          <a:ln w="12700">
+            <a:solidFill>
+              <a:srgbClr val="FFFFFF"/>
+            </a:solidFill>
+            <a:prstDash val="solid"/>
+          </a:ln>
+        </p:spPr>
+      </p:sp>
+      <p:sp>
+        <p:nvSpPr>
+          <p:cNvPr id="16" name="Text 14"/>
+          <p:cNvSpPr/>
+          <p:nvPr/>
+        </p:nvSpPr>
+        <p:spPr>
+          <a:xfrm>
+            <a:off x="4783226" y="2011680"/>
+            <a:ext cx="365760" cy="365760"/>
+          </a:xfrm>
+          <a:prstGeom prst="rect">
+            <a:avLst/>
+          </a:prstGeom>
+          <a:noFill/>
+          <a:ln/>
+        </p:spPr>
+        <p:txBody>
+          <a:bodyPr wrap="square" lIns="0" tIns="0" rIns="0" bIns="0" rtlCol="0" anchor="ctr"/>
+          <a:lstStyle/>
+          <a:p>
+            <a:pPr algn="ctr" indent="0" marL="0">
+              <a:buNone/>
+            </a:pPr>
+            <a:r>
+              <a:rPr lang="en-US" sz="1150" b="1" dirty="0">
+                <a:solidFill>
+                  <a:srgbClr val="FFFFFF"/>
+                </a:solidFill>
+                <a:latin typeface="Pretendard" pitchFamily="34" charset="0"/>
+                <a:ea typeface="Pretendard" pitchFamily="34" charset="-122"/>
+                <a:cs typeface="Pretendard" pitchFamily="34" charset="-120"/>
+              </a:rPr>
+              <a:t>02</a:t>
+            </a:r>
+            <a:endParaRPr lang="en-US" sz="1150" dirty="0"/>
+          </a:p>
+        </p:txBody>
+      </p:sp>
+      <p:sp>
+        <p:nvSpPr>
+          <p:cNvPr id="17" name="Text 15"/>
+          <p:cNvSpPr/>
+          <p:nvPr/>
+        </p:nvSpPr>
+        <p:spPr>
+          <a:xfrm>
+            <a:off x="4783226" y="2505456"/>
+            <a:ext cx="2625242" cy="457200"/>
+          </a:xfrm>
+          <a:prstGeom prst="rect">
+            <a:avLst/>
+          </a:prstGeom>
+          <a:noFill/>
+          <a:ln/>
+        </p:spPr>
+        <p:txBody>
+          <a:bodyPr wrap="square" lIns="0" tIns="0" rIns="0" bIns="0" rtlCol="0" anchor="t"/>
+          <a:lstStyle/>
+          <a:p>
+            <a:pPr indent="0" marL="0">
+              <a:lnSpc>
+                <a:spcPct val="114000"/>
+              </a:lnSpc>
+              <a:buNone/>
+            </a:pPr>
+            <a:r>
+              <a:rPr lang="en-US" sz="1700" dirty="0">
+                <a:solidFill>
+                  <a:srgbClr val="FFFFFF"/>
+                </a:solidFill>
+                <a:latin typeface="Pretendard SemiBold" pitchFamily="34" charset="0"/>
+                <a:ea typeface="Pretendard SemiBold" pitchFamily="34" charset="-122"/>
+                <a:cs typeface="Pretendard SemiBold" pitchFamily="34" charset="-120"/>
+              </a:rPr>
+              <a:t>색온도 통일</a:t>
+            </a:r>
+            <a:endParaRPr lang="en-US" sz="1700" dirty="0"/>
+          </a:p>
+        </p:txBody>
+      </p:sp>
+      <p:sp>
+        <p:nvSpPr>
+          <p:cNvPr id="18" name="Text 16"/>
+          <p:cNvSpPr/>
+          <p:nvPr/>
+        </p:nvSpPr>
+        <p:spPr>
+          <a:xfrm>
+            <a:off x="4783226" y="2999232"/>
+            <a:ext cx="2625242" cy="1645920"/>
+          </a:xfrm>
+          <a:prstGeom prst="rect">
+            <a:avLst/>
+          </a:prstGeom>
+          <a:noFill/>
+          <a:ln/>
+        </p:spPr>
+        <p:txBody>
+          <a:bodyPr wrap="square" lIns="0" tIns="0" rIns="0" bIns="0" rtlCol="0" anchor="t"/>
+          <a:lstStyle/>
+          <a:p>
+            <a:pPr indent="0" marL="0">
+              <a:lnSpc>
+                <a:spcPct val="130000"/>
+              </a:lnSpc>
+              <a:buNone/>
+            </a:pPr>
+            <a:r>
+              <a:rPr lang="en-US" sz="1150" dirty="0">
+                <a:solidFill>
+                  <a:srgbClr val="B8B8B8"/>
+                </a:solidFill>
+                <a:latin typeface="Pretendard" pitchFamily="34" charset="0"/>
+                <a:ea typeface="Pretendard" pitchFamily="34" charset="-122"/>
+                <a:cs typeface="Pretendard" pitchFamily="34" charset="-120"/>
+              </a:rPr>
+              <a:t>어떤 건 노랗고 어떤 건 파랗습니다. 중간값을 정해 전부 맞춥니다. 이것만 해도 완성도가 크게 올라갑니다.</a:t>
+            </a:r>
+            <a:endParaRPr lang="en-US" sz="1150" dirty="0"/>
+          </a:p>
+        </p:txBody>
+      </p:sp>
+      <p:sp>
+        <p:nvSpPr>
+          <p:cNvPr id="19" name="Shape 17"/>
+          <p:cNvSpPr/>
+          <p:nvPr/>
+        </p:nvSpPr>
+        <p:spPr>
+          <a:xfrm>
+            <a:off x="8158277" y="1737360"/>
             <a:ext cx="3393338" cy="3035808"/>
           </a:xfrm>
           <a:prstGeom prst="rect">
@@ -6497,13 +5666,13 @@
       </p:sp>
       <p:sp>
         <p:nvSpPr>
-          <p:cNvPr id="15" name="Shape 13"/>
-          <p:cNvSpPr/>
-          <p:nvPr/>
-        </p:nvSpPr>
-        <p:spPr>
-          <a:xfrm>
-            <a:off x="4783226" y="2011680"/>
+          <p:cNvPr id="20" name="Shape 18"/>
+          <p:cNvSpPr/>
+          <p:nvPr/>
+        </p:nvSpPr>
+        <p:spPr>
+          <a:xfrm>
+            <a:off x="8542325" y="2011680"/>
             <a:ext cx="365760" cy="365760"/>
           </a:xfrm>
           <a:prstGeom prst="ellipse">
@@ -6522,13 +5691,13 @@
       </p:sp>
       <p:sp>
         <p:nvSpPr>
-          <p:cNvPr id="16" name="Text 14"/>
-          <p:cNvSpPr/>
-          <p:nvPr/>
-        </p:nvSpPr>
-        <p:spPr>
-          <a:xfrm>
-            <a:off x="4783226" y="2011680"/>
+          <p:cNvPr id="21" name="Text 19"/>
+          <p:cNvSpPr/>
+          <p:nvPr/>
+        </p:nvSpPr>
+        <p:spPr>
+          <a:xfrm>
+            <a:off x="8542325" y="2011680"/>
             <a:ext cx="365760" cy="365760"/>
           </a:xfrm>
           <a:prstGeom prst="rect">
@@ -6553,7 +5722,7 @@
                 <a:ea typeface="Pretendard" pitchFamily="34" charset="-122"/>
                 <a:cs typeface="Pretendard" pitchFamily="34" charset="-120"/>
               </a:rPr>
-              <a:t>02</a:t>
+              <a:t>03</a:t>
             </a:r>
             <a:endParaRPr lang="en-US" sz="1150" dirty="0"/>
           </a:p>
@@ -6561,13 +5730,13 @@
       </p:sp>
       <p:sp>
         <p:nvSpPr>
-          <p:cNvPr id="17" name="Text 15"/>
-          <p:cNvSpPr/>
-          <p:nvPr/>
-        </p:nvSpPr>
-        <p:spPr>
-          <a:xfrm>
-            <a:off x="4783226" y="2505456"/>
+          <p:cNvPr id="22" name="Text 20"/>
+          <p:cNvSpPr/>
+          <p:nvPr/>
+        </p:nvSpPr>
+        <p:spPr>
+          <a:xfrm>
+            <a:off x="8542325" y="2505456"/>
             <a:ext cx="2625242" cy="457200"/>
           </a:xfrm>
           <a:prstGeom prst="rect">
@@ -6591,11 +5760,11 @@
                 <a:solidFill>
                   <a:srgbClr val="111111"/>
                 </a:solidFill>
-                <a:latin typeface="Pretendard Black" pitchFamily="34" charset="0"/>
-                <a:ea typeface="Pretendard Black" pitchFamily="34" charset="-122"/>
-                <a:cs typeface="Pretendard Black" pitchFamily="34" charset="-120"/>
-              </a:rPr>
-              <a:t>작업 이미지의 색과 부딪히지 않게</a:t>
+                <a:latin typeface="Pretendard SemiBold" pitchFamily="34" charset="0"/>
+                <a:ea typeface="Pretendard SemiBold" pitchFamily="34" charset="-122"/>
+                <a:cs typeface="Pretendard SemiBold" pitchFamily="34" charset="-120"/>
+              </a:rPr>
+              <a:t>크롭과 배경 정리</a:t>
             </a:r>
             <a:endParaRPr lang="en-US" sz="1700" dirty="0"/>
           </a:p>
@@ -6603,13 +5772,13 @@
       </p:sp>
       <p:sp>
         <p:nvSpPr>
-          <p:cNvPr id="18" name="Text 16"/>
-          <p:cNvSpPr/>
-          <p:nvPr/>
-        </p:nvSpPr>
-        <p:spPr>
-          <a:xfrm>
-            <a:off x="4783226" y="2999232"/>
+          <p:cNvPr id="23" name="Text 21"/>
+          <p:cNvSpPr/>
+          <p:nvPr/>
+        </p:nvSpPr>
+        <p:spPr>
+          <a:xfrm>
+            <a:off x="8542325" y="2999232"/>
             <a:ext cx="2625242" cy="1645920"/>
           </a:xfrm>
           <a:prstGeom prst="rect">
@@ -6637,180 +5806,7 @@
                 <a:ea typeface="Pretendard" pitchFamily="34" charset="-122"/>
                 <a:cs typeface="Pretendard" pitchFamily="34" charset="-120"/>
               </a:rPr>
-              <a:t>결과 이미지가 이미 강한 색이면 지면은 무채색으로. 지면 색이 작업과 경쟁하면 둘 다 죽습니다.</a:t>
-            </a:r>
-            <a:endParaRPr lang="en-US" sz="1150" dirty="0"/>
-          </a:p>
-        </p:txBody>
-      </p:sp>
-      <p:sp>
-        <p:nvSpPr>
-          <p:cNvPr id="19" name="Shape 17"/>
-          <p:cNvSpPr/>
-          <p:nvPr/>
-        </p:nvSpPr>
-        <p:spPr>
-          <a:xfrm>
-            <a:off x="8158277" y="1737360"/>
-            <a:ext cx="3393338" cy="3035808"/>
-          </a:xfrm>
-          <a:prstGeom prst="rect">
-            <a:avLst/>
-          </a:prstGeom>
-          <a:solidFill>
-            <a:srgbClr val="FFFFFF"/>
-          </a:solidFill>
-          <a:ln w="12700">
-            <a:solidFill>
-              <a:srgbClr val="DCDCDC"/>
-            </a:solidFill>
-            <a:prstDash val="solid"/>
-          </a:ln>
-        </p:spPr>
-      </p:sp>
-      <p:sp>
-        <p:nvSpPr>
-          <p:cNvPr id="20" name="Shape 18"/>
-          <p:cNvSpPr/>
-          <p:nvPr/>
-        </p:nvSpPr>
-        <p:spPr>
-          <a:xfrm>
-            <a:off x="8542325" y="2011680"/>
-            <a:ext cx="365760" cy="365760"/>
-          </a:xfrm>
-          <a:prstGeom prst="ellipse">
-            <a:avLst/>
-          </a:prstGeom>
-          <a:solidFill>
-            <a:srgbClr val="FFFFFF"/>
-          </a:solidFill>
-          <a:ln w="12700">
-            <a:solidFill>
-              <a:srgbClr val="111111"/>
-            </a:solidFill>
-            <a:prstDash val="solid"/>
-          </a:ln>
-        </p:spPr>
-      </p:sp>
-      <p:sp>
-        <p:nvSpPr>
-          <p:cNvPr id="21" name="Text 19"/>
-          <p:cNvSpPr/>
-          <p:nvPr/>
-        </p:nvSpPr>
-        <p:spPr>
-          <a:xfrm>
-            <a:off x="8542325" y="2011680"/>
-            <a:ext cx="365760" cy="365760"/>
-          </a:xfrm>
-          <a:prstGeom prst="rect">
-            <a:avLst/>
-          </a:prstGeom>
-          <a:noFill/>
-          <a:ln/>
-        </p:spPr>
-        <p:txBody>
-          <a:bodyPr wrap="square" lIns="0" tIns="0" rIns="0" bIns="0" rtlCol="0" anchor="ctr"/>
-          <a:lstStyle/>
-          <a:p>
-            <a:pPr algn="ctr" indent="0" marL="0">
-              <a:buNone/>
-            </a:pPr>
-            <a:r>
-              <a:rPr lang="en-US" sz="1150" b="1" dirty="0">
-                <a:solidFill>
-                  <a:srgbClr val="111111"/>
-                </a:solidFill>
-                <a:latin typeface="Pretendard" pitchFamily="34" charset="0"/>
-                <a:ea typeface="Pretendard" pitchFamily="34" charset="-122"/>
-                <a:cs typeface="Pretendard" pitchFamily="34" charset="-120"/>
-              </a:rPr>
-              <a:t>03</a:t>
-            </a:r>
-            <a:endParaRPr lang="en-US" sz="1150" dirty="0"/>
-          </a:p>
-        </p:txBody>
-      </p:sp>
-      <p:sp>
-        <p:nvSpPr>
-          <p:cNvPr id="22" name="Text 20"/>
-          <p:cNvSpPr/>
-          <p:nvPr/>
-        </p:nvSpPr>
-        <p:spPr>
-          <a:xfrm>
-            <a:off x="8542325" y="2505456"/>
-            <a:ext cx="2625242" cy="457200"/>
-          </a:xfrm>
-          <a:prstGeom prst="rect">
-            <a:avLst/>
-          </a:prstGeom>
-          <a:noFill/>
-          <a:ln/>
-        </p:spPr>
-        <p:txBody>
-          <a:bodyPr wrap="square" lIns="0" tIns="0" rIns="0" bIns="0" rtlCol="0" anchor="t"/>
-          <a:lstStyle/>
-          <a:p>
-            <a:pPr indent="0" marL="0">
-              <a:lnSpc>
-                <a:spcPct val="114000"/>
-              </a:lnSpc>
-              <a:buNone/>
-            </a:pPr>
-            <a:r>
-              <a:rPr lang="en-US" sz="1700" dirty="0">
-                <a:solidFill>
-                  <a:srgbClr val="111111"/>
-                </a:solidFill>
-                <a:latin typeface="Pretendard Black" pitchFamily="34" charset="0"/>
-                <a:ea typeface="Pretendard Black" pitchFamily="34" charset="-122"/>
-                <a:cs typeface="Pretendard Black" pitchFamily="34" charset="-120"/>
-              </a:rPr>
-              <a:t>화면과 인쇄를 함께 확인</a:t>
-            </a:r>
-            <a:endParaRPr lang="en-US" sz="1700" dirty="0"/>
-          </a:p>
-        </p:txBody>
-      </p:sp>
-      <p:sp>
-        <p:nvSpPr>
-          <p:cNvPr id="23" name="Text 21"/>
-          <p:cNvSpPr/>
-          <p:nvPr/>
-        </p:nvSpPr>
-        <p:spPr>
-          <a:xfrm>
-            <a:off x="8542325" y="2999232"/>
-            <a:ext cx="2625242" cy="1645920"/>
-          </a:xfrm>
-          <a:prstGeom prst="rect">
-            <a:avLst/>
-          </a:prstGeom>
-          <a:noFill/>
-          <a:ln/>
-        </p:spPr>
-        <p:txBody>
-          <a:bodyPr wrap="square" lIns="0" tIns="0" rIns="0" bIns="0" rtlCol="0" anchor="t"/>
-          <a:lstStyle/>
-          <a:p>
-            <a:pPr indent="0" marL="0">
-              <a:lnSpc>
-                <a:spcPct val="130000"/>
-              </a:lnSpc>
-              <a:buNone/>
-            </a:pPr>
-            <a:r>
-              <a:rPr lang="en-US" sz="1150" dirty="0">
-                <a:solidFill>
-                  <a:srgbClr val="6E6E6E"/>
-                </a:solidFill>
-                <a:latin typeface="Pretendard" pitchFamily="34" charset="0"/>
-                <a:ea typeface="Pretendard" pitchFamily="34" charset="-122"/>
-                <a:cs typeface="Pretendard" pitchFamily="34" charset="-120"/>
-              </a:rPr>
-              <a:t>화면에서 선명한 색이 인쇄에서 탁해집니다. 인쇄본을 낼 계획이면 지금 한 장 뽑아 확인하세요.</a:t>
+              <a:t>불필요한 주변을 잘라내고, 배경이 지저분하면 단순하게. 작업이 주인공이 되게 합니다.</a:t>
             </a:r>
             <a:endParaRPr lang="en-US" sz="1150" dirty="0"/>
           </a:p>
@@ -6877,7 +5873,7 @@
                 <a:ea typeface="Pretendard" pitchFamily="34" charset="-122"/>
                 <a:cs typeface="Pretendard" pitchFamily="34" charset="-120"/>
               </a:rPr>
-              <a:t>9주차에 정한 세 색 외의 색이 지면에 등장했다면, 그건 결정이 아니라 실수일 가능성이 높습니다.</a:t>
+              <a:t>해상도가 부족한 이미지는 보정으로 해결되지 않습니다. 작게 배치하거나 다시 찍으세요.</a:t>
             </a:r>
             <a:endParaRPr lang="en-US" sz="1300" dirty="0"/>
           </a:p>
@@ -6981,472 +5977,6 @@
                 <a:cs typeface="Pretendard" pitchFamily="34" charset="-120"/>
               </a:rPr>
               <a:t>P.03</a:t>
-            </a:r>
-            <a:endParaRPr lang="en-US" sz="850" dirty="0"/>
-          </a:p>
-        </p:txBody>
-      </p:sp>
-    </p:spTree>
-  </p:cSld>
-  <p:clrMapOvr>
-    <a:masterClrMapping/>
-  </p:clrMapOvr>
-</p:sld>
-</file>
-
-<file path=ppt/slides/slide6.xml><?xml version="1.0" encoding="utf-8"?>
-<p:sld xmlns:a="http://schemas.openxmlformats.org/drawingml/2006/main" xmlns:r="http://schemas.openxmlformats.org/officeDocument/2006/relationships" xmlns:p="http://schemas.openxmlformats.org/presentationml/2006/main">
-  <p:cSld name="Slide 6">
-    <p:bg>
-      <p:bgPr>
-        <a:solidFill>
-          <a:srgbClr val="111111"/>
-        </a:solidFill>
-      </p:bgPr>
-    </p:bg>
-    <p:spTree>
-      <p:nvGrpSpPr>
-        <p:cNvPr id="1" name=""/>
-        <p:cNvGrpSpPr/>
-        <p:nvPr/>
-      </p:nvGrpSpPr>
-      <p:grpSpPr>
-        <a:xfrm>
-          <a:off x="0" y="0"/>
-          <a:ext cx="0" cy="0"/>
-          <a:chOff x="0" y="0"/>
-          <a:chExt cx="0" cy="0"/>
-        </a:xfrm>
-      </p:grpSpPr>
-      <p:sp>
-        <p:nvSpPr>
-          <p:cNvPr id="2" name="Text 0"/>
-          <p:cNvSpPr/>
-          <p:nvPr/>
-        </p:nvSpPr>
-        <p:spPr>
-          <a:xfrm>
-            <a:off x="640080" y="274320"/>
-            <a:ext cx="3657600" cy="219456"/>
-          </a:xfrm>
-          <a:prstGeom prst="rect">
-            <a:avLst/>
-          </a:prstGeom>
-          <a:noFill/>
-          <a:ln/>
-        </p:spPr>
-        <p:txBody>
-          <a:bodyPr wrap="square" lIns="0" tIns="0" rIns="0" bIns="0" rtlCol="0" anchor="ctr"/>
-          <a:lstStyle/>
-          <a:p>
-            <a:pPr indent="0" marL="0">
-              <a:buNone/>
-            </a:pPr>
-            <a:r>
-              <a:rPr lang="en-US" sz="900" spc="120" kern="0" dirty="0">
-                <a:solidFill>
-                  <a:srgbClr val="9A9A9A"/>
-                </a:solidFill>
-                <a:latin typeface="Pretendard" pitchFamily="34" charset="0"/>
-                <a:ea typeface="Pretendard" pitchFamily="34" charset="-122"/>
-                <a:cs typeface="Pretendard" pitchFamily="34" charset="-120"/>
-              </a:rPr>
-              <a:t>포트폴리오제작</a:t>
-            </a:r>
-            <a:endParaRPr lang="en-US" sz="900" dirty="0"/>
-          </a:p>
-        </p:txBody>
-      </p:sp>
-      <p:sp>
-        <p:nvSpPr>
-          <p:cNvPr id="3" name="Text 1"/>
-          <p:cNvSpPr/>
-          <p:nvPr/>
-        </p:nvSpPr>
-        <p:spPr>
-          <a:xfrm>
-            <a:off x="4480560" y="274320"/>
-            <a:ext cx="4572000" cy="219456"/>
-          </a:xfrm>
-          <a:prstGeom prst="rect">
-            <a:avLst/>
-          </a:prstGeom>
-          <a:noFill/>
-          <a:ln/>
-        </p:spPr>
-        <p:txBody>
-          <a:bodyPr wrap="square" lIns="0" tIns="0" rIns="0" bIns="0" rtlCol="0" anchor="ctr"/>
-          <a:lstStyle/>
-          <a:p>
-            <a:pPr algn="ctr" indent="0" marL="0">
-              <a:buNone/>
-            </a:pPr>
-            <a:r>
-              <a:rPr lang="en-US" sz="900" spc="120" kern="0" dirty="0">
-                <a:solidFill>
-                  <a:srgbClr val="9A9A9A"/>
-                </a:solidFill>
-                <a:latin typeface="Pretendard" pitchFamily="34" charset="0"/>
-                <a:ea typeface="Pretendard" pitchFamily="34" charset="-122"/>
-                <a:cs typeface="Pretendard" pitchFamily="34" charset="-120"/>
-              </a:rPr>
-              <a:t>PHASE 3 완성과 발표</a:t>
-            </a:r>
-            <a:endParaRPr lang="en-US" sz="900" dirty="0"/>
-          </a:p>
-        </p:txBody>
-      </p:sp>
-      <p:sp>
-        <p:nvSpPr>
-          <p:cNvPr id="4" name="Text 2"/>
-          <p:cNvSpPr/>
-          <p:nvPr/>
-        </p:nvSpPr>
-        <p:spPr>
-          <a:xfrm>
-            <a:off x="8808415" y="274320"/>
-            <a:ext cx="2743200" cy="219456"/>
-          </a:xfrm>
-          <a:prstGeom prst="rect">
-            <a:avLst/>
-          </a:prstGeom>
-          <a:noFill/>
-          <a:ln/>
-        </p:spPr>
-        <p:txBody>
-          <a:bodyPr wrap="square" lIns="0" tIns="0" rIns="0" bIns="0" rtlCol="0" anchor="ctr"/>
-          <a:lstStyle/>
-          <a:p>
-            <a:pPr algn="r" indent="0" marL="0">
-              <a:buNone/>
-            </a:pPr>
-            <a:r>
-              <a:rPr lang="en-US" sz="900" spc="200" kern="0" dirty="0">
-                <a:solidFill>
-                  <a:srgbClr val="9A9A9A"/>
-                </a:solidFill>
-                <a:latin typeface="Pretendard" pitchFamily="34" charset="0"/>
-                <a:ea typeface="Pretendard" pitchFamily="34" charset="-122"/>
-                <a:cs typeface="Pretendard" pitchFamily="34" charset="-120"/>
-              </a:rPr>
-              <a:t>WEEK 11</a:t>
-            </a:r>
-            <a:endParaRPr lang="en-US" sz="900" dirty="0"/>
-          </a:p>
-        </p:txBody>
-      </p:sp>
-      <p:sp>
-        <p:nvSpPr>
-          <p:cNvPr id="5" name="Shape 3"/>
-          <p:cNvSpPr/>
-          <p:nvPr/>
-        </p:nvSpPr>
-        <p:spPr>
-          <a:xfrm>
-            <a:off x="640080" y="548640"/>
-            <a:ext cx="10911535" cy="7315"/>
-          </a:xfrm>
-          <a:prstGeom prst="rect">
-            <a:avLst/>
-          </a:prstGeom>
-          <a:solidFill>
-            <a:srgbClr val="333333"/>
-          </a:solidFill>
-          <a:ln w="12700">
-            <a:solidFill>
-              <a:srgbClr val="333333"/>
-            </a:solidFill>
-            <a:prstDash val="solid"/>
-          </a:ln>
-        </p:spPr>
-      </p:sp>
-      <p:sp>
-        <p:nvSpPr>
-          <p:cNvPr id="6" name="Text 4"/>
-          <p:cNvSpPr/>
-          <p:nvPr/>
-        </p:nvSpPr>
-        <p:spPr>
-          <a:xfrm>
-            <a:off x="7345375" y="1737360"/>
-            <a:ext cx="4206240" cy="3291840"/>
-          </a:xfrm>
-          <a:prstGeom prst="rect">
-            <a:avLst/>
-          </a:prstGeom>
-          <a:noFill/>
-          <a:ln/>
-        </p:spPr>
-        <p:txBody>
-          <a:bodyPr wrap="square" lIns="0" tIns="0" rIns="0" bIns="0" rtlCol="0" anchor="ctr"/>
-          <a:lstStyle/>
-          <a:p>
-            <a:pPr algn="r" indent="0" marL="0">
-              <a:buNone/>
-            </a:pPr>
-            <a:r>
-              <a:rPr lang="en-US" sz="20000" dirty="0">
-                <a:solidFill>
-                  <a:srgbClr val="1B1B1B"/>
-                </a:solidFill>
-                <a:latin typeface="Pretendard Black" pitchFamily="34" charset="0"/>
-                <a:ea typeface="Pretendard Black" pitchFamily="34" charset="-122"/>
-                <a:cs typeface="Pretendard Black" pitchFamily="34" charset="-120"/>
-              </a:rPr>
-              <a:t>02</a:t>
-            </a:r>
-            <a:endParaRPr lang="en-US" sz="20000" dirty="0"/>
-          </a:p>
-        </p:txBody>
-      </p:sp>
-      <p:sp>
-        <p:nvSpPr>
-          <p:cNvPr id="7" name="Shape 5"/>
-          <p:cNvSpPr/>
-          <p:nvPr/>
-        </p:nvSpPr>
-        <p:spPr>
-          <a:xfrm>
-            <a:off x="941832" y="1371600"/>
-            <a:ext cx="0" cy="603504"/>
-          </a:xfrm>
-          <a:prstGeom prst="line">
-            <a:avLst/>
-          </a:prstGeom>
-          <a:noFill/>
-          <a:ln w="15875">
-            <a:solidFill>
-              <a:srgbClr val="FFFFFF"/>
-            </a:solidFill>
-            <a:prstDash val="solid"/>
-          </a:ln>
-        </p:spPr>
-      </p:sp>
-      <p:sp>
-        <p:nvSpPr>
-          <p:cNvPr id="8" name="Shape 6"/>
-          <p:cNvSpPr/>
-          <p:nvPr/>
-        </p:nvSpPr>
-        <p:spPr>
-          <a:xfrm>
-            <a:off x="640080" y="1733702"/>
-            <a:ext cx="301752" cy="241402"/>
-          </a:xfrm>
-          <a:prstGeom prst="line">
-            <a:avLst/>
-          </a:prstGeom>
-          <a:noFill/>
-          <a:ln w="15875">
-            <a:solidFill>
-              <a:srgbClr val="FFFFFF"/>
-            </a:solidFill>
-            <a:prstDash val="solid"/>
-          </a:ln>
-        </p:spPr>
-      </p:sp>
-      <p:sp>
-        <p:nvSpPr>
-          <p:cNvPr id="9" name="Shape 7"/>
-          <p:cNvSpPr/>
-          <p:nvPr/>
-        </p:nvSpPr>
-        <p:spPr>
-          <a:xfrm flipV="1">
-            <a:off x="941832" y="1733702"/>
-            <a:ext cx="301752" cy="241402"/>
-          </a:xfrm>
-          <a:prstGeom prst="line">
-            <a:avLst/>
-          </a:prstGeom>
-          <a:noFill/>
-          <a:ln w="15875">
-            <a:solidFill>
-              <a:srgbClr val="FFFFFF"/>
-            </a:solidFill>
-            <a:prstDash val="solid"/>
-          </a:ln>
-        </p:spPr>
-      </p:sp>
-      <p:sp>
-        <p:nvSpPr>
-          <p:cNvPr id="10" name="Text 8"/>
-          <p:cNvSpPr/>
-          <p:nvPr/>
-        </p:nvSpPr>
-        <p:spPr>
-          <a:xfrm>
-            <a:off x="640080" y="2615184"/>
-            <a:ext cx="7863840" cy="256032"/>
-          </a:xfrm>
-          <a:prstGeom prst="rect">
-            <a:avLst/>
-          </a:prstGeom>
-          <a:noFill/>
-          <a:ln/>
-        </p:spPr>
-        <p:txBody>
-          <a:bodyPr wrap="square" lIns="0" tIns="0" rIns="0" bIns="0" rtlCol="0" anchor="ctr"/>
-          <a:lstStyle/>
-          <a:p>
-            <a:pPr indent="0" marL="0">
-              <a:buNone/>
-            </a:pPr>
-            <a:r>
-              <a:rPr lang="en-US" sz="950" spc="280" kern="0" dirty="0">
-                <a:solidFill>
-                  <a:srgbClr val="9A9A9A"/>
-                </a:solidFill>
-                <a:latin typeface="Pretendard" pitchFamily="34" charset="0"/>
-                <a:ea typeface="Pretendard" pitchFamily="34" charset="-122"/>
-                <a:cs typeface="Pretendard" pitchFamily="34" charset="-120"/>
-              </a:rPr>
-              <a:t>PART 02</a:t>
-            </a:r>
-            <a:endParaRPr lang="en-US" sz="950" dirty="0"/>
-          </a:p>
-        </p:txBody>
-      </p:sp>
-      <p:sp>
-        <p:nvSpPr>
-          <p:cNvPr id="11" name="Text 9"/>
-          <p:cNvSpPr/>
-          <p:nvPr/>
-        </p:nvSpPr>
-        <p:spPr>
-          <a:xfrm>
-            <a:off x="640080" y="2889504"/>
-            <a:ext cx="7863840" cy="786384"/>
-          </a:xfrm>
-          <a:prstGeom prst="rect">
-            <a:avLst/>
-          </a:prstGeom>
-          <a:noFill/>
-          <a:ln/>
-        </p:spPr>
-        <p:txBody>
-          <a:bodyPr wrap="square" lIns="0" tIns="0" rIns="0" bIns="0" rtlCol="0" anchor="ctr"/>
-          <a:lstStyle/>
-          <a:p>
-            <a:pPr indent="0" marL="0">
-              <a:buNone/>
-            </a:pPr>
-            <a:r>
-              <a:rPr lang="en-US" sz="4600" dirty="0">
-                <a:solidFill>
-                  <a:srgbClr val="FFFFFF"/>
-                </a:solidFill>
-                <a:latin typeface="Pretendard Black" pitchFamily="34" charset="0"/>
-                <a:ea typeface="Pretendard Black" pitchFamily="34" charset="-122"/>
-                <a:cs typeface="Pretendard Black" pitchFamily="34" charset="-120"/>
-              </a:rPr>
-              <a:t>이미지 다루기</a:t>
-            </a:r>
-            <a:endParaRPr lang="en-US" sz="4600" dirty="0"/>
-          </a:p>
-        </p:txBody>
-      </p:sp>
-      <p:sp>
-        <p:nvSpPr>
-          <p:cNvPr id="12" name="Shape 10"/>
-          <p:cNvSpPr/>
-          <p:nvPr/>
-        </p:nvSpPr>
-        <p:spPr>
-          <a:xfrm>
-            <a:off x="640080" y="3803904"/>
-            <a:ext cx="2194560" cy="7315"/>
-          </a:xfrm>
-          <a:prstGeom prst="rect">
-            <a:avLst/>
-          </a:prstGeom>
-          <a:solidFill>
-            <a:srgbClr val="FFFFFF"/>
-          </a:solidFill>
-          <a:ln w="12700">
-            <a:solidFill>
-              <a:srgbClr val="FFFFFF"/>
-            </a:solidFill>
-            <a:prstDash val="solid"/>
-          </a:ln>
-        </p:spPr>
-      </p:sp>
-      <p:sp>
-        <p:nvSpPr>
-          <p:cNvPr id="13" name="Text 11"/>
-          <p:cNvSpPr/>
-          <p:nvPr/>
-        </p:nvSpPr>
-        <p:spPr>
-          <a:xfrm>
-            <a:off x="640080" y="4005072"/>
-            <a:ext cx="6949440" cy="731520"/>
-          </a:xfrm>
-          <a:prstGeom prst="rect">
-            <a:avLst/>
-          </a:prstGeom>
-          <a:noFill/>
-          <a:ln/>
-        </p:spPr>
-        <p:txBody>
-          <a:bodyPr wrap="square" lIns="0" tIns="0" rIns="0" bIns="0" rtlCol="0" anchor="t"/>
-          <a:lstStyle/>
-          <a:p>
-            <a:pPr indent="0" marL="0">
-              <a:lnSpc>
-                <a:spcPct val="134000"/>
-              </a:lnSpc>
-              <a:buNone/>
-            </a:pPr>
-            <a:r>
-              <a:rPr lang="en-US" sz="1350" dirty="0">
-                <a:solidFill>
-                  <a:srgbClr val="B8B8B8"/>
-                </a:solidFill>
-                <a:latin typeface="Pretendard Light" pitchFamily="34" charset="0"/>
-                <a:ea typeface="Pretendard Light" pitchFamily="34" charset="-122"/>
-                <a:cs typeface="Pretendard Light" pitchFamily="34" charset="-120"/>
-              </a:rPr>
-              <a:t>보정의 목적은 예쁘게가 아니라 톤을 맞추는 것입니다.</a:t>
-            </a:r>
-            <a:endParaRPr lang="en-US" sz="1350" dirty="0"/>
-          </a:p>
-        </p:txBody>
-      </p:sp>
-      <p:sp>
-        <p:nvSpPr>
-          <p:cNvPr id="14" name="Text 12"/>
-          <p:cNvSpPr/>
-          <p:nvPr/>
-        </p:nvSpPr>
-        <p:spPr>
-          <a:xfrm rot="16200000">
-            <a:off x="10436047" y="3291840"/>
-            <a:ext cx="2743200" cy="274320"/>
-          </a:xfrm>
-          <a:prstGeom prst="rect">
-            <a:avLst/>
-          </a:prstGeom>
-          <a:noFill/>
-          <a:ln/>
-        </p:spPr>
-        <p:txBody>
-          <a:bodyPr wrap="square" lIns="0" tIns="0" rIns="0" bIns="0" rtlCol="0" anchor="ctr"/>
-          <a:lstStyle/>
-          <a:p>
-            <a:pPr algn="ctr" indent="0" marL="0">
-              <a:buNone/>
-            </a:pPr>
-            <a:r>
-              <a:rPr lang="en-US" sz="850" spc="260" kern="0" dirty="0">
-                <a:solidFill>
-                  <a:srgbClr val="7A7A7A"/>
-                </a:solidFill>
-                <a:latin typeface="Pretendard" pitchFamily="34" charset="0"/>
-                <a:ea typeface="Pretendard" pitchFamily="34" charset="-122"/>
-                <a:cs typeface="Pretendard" pitchFamily="34" charset="-120"/>
-              </a:rPr>
-              <a:t>SECTION 02</a:t>
             </a:r>
             <a:endParaRPr lang="en-US" sz="850" dirty="0"/>
           </a:p>
@@ -7659,7 +6189,7 @@
                 <a:ea typeface="Pretendard" pitchFamily="34" charset="-122"/>
                 <a:cs typeface="Pretendard" pitchFamily="34" charset="-120"/>
               </a:rPr>
-              <a:t>IMAGE</a:t>
+              <a:t>BALANCE</a:t>
             </a:r>
             <a:endParaRPr lang="en-US" sz="950" dirty="0"/>
           </a:p>
@@ -7694,11 +6224,11 @@
                 <a:solidFill>
                   <a:srgbClr val="111111"/>
                 </a:solidFill>
-                <a:latin typeface="Pretendard Black" pitchFamily="34" charset="0"/>
-                <a:ea typeface="Pretendard Black" pitchFamily="34" charset="-122"/>
-                <a:cs typeface="Pretendard Black" pitchFamily="34" charset="-120"/>
-              </a:rPr>
-              <a:t>이미지 보정 — 이 셋만</a:t>
+                <a:latin typeface="Pretendard SemiBold" pitchFamily="34" charset="0"/>
+                <a:ea typeface="Pretendard SemiBold" pitchFamily="34" charset="-122"/>
+                <a:cs typeface="Pretendard SemiBold" pitchFamily="34" charset="-120"/>
+              </a:rPr>
+              <a:t>이미지와 텍스트의 균형</a:t>
             </a:r>
             <a:endParaRPr lang="en-US" sz="3000" dirty="0"/>
           </a:p>
@@ -7737,7 +6267,7 @@
                 <a:ea typeface="Pretendard" pitchFamily="34" charset="-122"/>
                 <a:cs typeface="Pretendard" pitchFamily="34" charset="-120"/>
               </a:rPr>
-              <a:t>복잡한 리터칭은 필요 없습니다. 톤이 맞으면 충분합니다.</a:t>
+              <a:t>지면이 불안정해 보이는 이유는 대개 이 넷 중 하나입니다.</a:t>
             </a:r>
             <a:endParaRPr lang="en-US" sz="1150" dirty="0"/>
           </a:p>
@@ -7751,18 +6281,18 @@
         </p:nvSpPr>
         <p:spPr>
           <a:xfrm>
-            <a:off x="640080" y="1737360"/>
-            <a:ext cx="3393338" cy="3035808"/>
+            <a:off x="640080" y="1664208"/>
+            <a:ext cx="10911535" cy="7315"/>
           </a:xfrm>
           <a:prstGeom prst="rect">
             <a:avLst/>
           </a:prstGeom>
           <a:solidFill>
-            <a:srgbClr val="FFFFFF"/>
+            <a:srgbClr val="111111"/>
           </a:solidFill>
           <a:ln w="12700">
             <a:solidFill>
-              <a:srgbClr val="DCDCDC"/>
+              <a:srgbClr val="111111"/>
             </a:solidFill>
             <a:prstDash val="solid"/>
           </a:ln>
@@ -7776,8 +6306,8 @@
         </p:nvSpPr>
         <p:spPr>
           <a:xfrm>
-            <a:off x="1024128" y="2011680"/>
-            <a:ext cx="365760" cy="365760"/>
+            <a:off x="640080" y="1810512"/>
+            <a:ext cx="310896" cy="310896"/>
           </a:xfrm>
           <a:prstGeom prst="ellipse">
             <a:avLst/>
@@ -7801,8 +6331,8 @@
         </p:nvSpPr>
         <p:spPr>
           <a:xfrm>
-            <a:off x="1024128" y="2011680"/>
-            <a:ext cx="365760" cy="365760"/>
+            <a:off x="640080" y="1810512"/>
+            <a:ext cx="310896" cy="310896"/>
           </a:xfrm>
           <a:prstGeom prst="rect">
             <a:avLst/>
@@ -7818,7 +6348,7 @@
               <a:buNone/>
             </a:pPr>
             <a:r>
-              <a:rPr lang="en-US" sz="1150" b="1" dirty="0">
+              <a:rPr lang="en-US" sz="1000" b="1" dirty="0">
                 <a:solidFill>
                   <a:srgbClr val="111111"/>
                 </a:solidFill>
@@ -7826,9 +6356,9 @@
                 <a:ea typeface="Pretendard" pitchFamily="34" charset="-122"/>
                 <a:cs typeface="Pretendard" pitchFamily="34" charset="-120"/>
               </a:rPr>
-              <a:t>01</a:t>
-            </a:r>
-            <a:endParaRPr lang="en-US" sz="1150" dirty="0"/>
+              <a:t>1</a:t>
+            </a:r>
+            <a:endParaRPr lang="en-US" sz="1000" dirty="0"/>
           </a:p>
         </p:txBody>
       </p:sp>
@@ -7840,37 +6370,34 @@
         </p:nvSpPr>
         <p:spPr>
           <a:xfrm>
-            <a:off x="1024128" y="2505456"/>
-            <a:ext cx="2625242" cy="457200"/>
-          </a:xfrm>
-          <a:prstGeom prst="rect">
-            <a:avLst/>
-          </a:prstGeom>
-          <a:noFill/>
-          <a:ln/>
-        </p:spPr>
-        <p:txBody>
-          <a:bodyPr wrap="square" lIns="0" tIns="0" rIns="0" bIns="0" rtlCol="0" anchor="t"/>
+            <a:off x="1188720" y="1719072"/>
+            <a:ext cx="9875520" cy="310896"/>
+          </a:xfrm>
+          <a:prstGeom prst="rect">
+            <a:avLst/>
+          </a:prstGeom>
+          <a:noFill/>
+          <a:ln/>
+        </p:spPr>
+        <p:txBody>
+          <a:bodyPr wrap="square" lIns="0" tIns="0" rIns="0" bIns="0" rtlCol="0" anchor="ctr"/>
           <a:lstStyle/>
           <a:p>
             <a:pPr indent="0" marL="0">
-              <a:lnSpc>
-                <a:spcPct val="114000"/>
-              </a:lnSpc>
-              <a:buNone/>
-            </a:pPr>
-            <a:r>
-              <a:rPr lang="en-US" sz="1700" dirty="0">
+              <a:buNone/>
+            </a:pPr>
+            <a:r>
+              <a:rPr lang="en-US" sz="1450" dirty="0">
                 <a:solidFill>
                   <a:srgbClr val="111111"/>
                 </a:solidFill>
-                <a:latin typeface="Pretendard Black" pitchFamily="34" charset="0"/>
-                <a:ea typeface="Pretendard Black" pitchFamily="34" charset="-122"/>
-                <a:cs typeface="Pretendard Black" pitchFamily="34" charset="-120"/>
-              </a:rPr>
-              <a:t>밝기와 대비 맞추기</a:t>
-            </a:r>
-            <a:endParaRPr lang="en-US" sz="1700" dirty="0"/>
+                <a:latin typeface="Pretendard SemiBold" pitchFamily="34" charset="0"/>
+                <a:ea typeface="Pretendard SemiBold" pitchFamily="34" charset="-122"/>
+                <a:cs typeface="Pretendard SemiBold" pitchFamily="34" charset="-120"/>
+              </a:rPr>
+              <a:t>이미지 크기에 위계가 없다</a:t>
+            </a:r>
+            <a:endParaRPr lang="en-US" sz="1450" dirty="0"/>
           </a:p>
         </p:txBody>
       </p:sp>
@@ -7882,27 +6409,24 @@
         </p:nvSpPr>
         <p:spPr>
           <a:xfrm>
-            <a:off x="1024128" y="2999232"/>
-            <a:ext cx="2625242" cy="1645920"/>
-          </a:xfrm>
-          <a:prstGeom prst="rect">
-            <a:avLst/>
-          </a:prstGeom>
-          <a:noFill/>
-          <a:ln/>
-        </p:spPr>
-        <p:txBody>
-          <a:bodyPr wrap="square" lIns="0" tIns="0" rIns="0" bIns="0" rtlCol="0" anchor="t"/>
+            <a:off x="1188720" y="2029968"/>
+            <a:ext cx="9875520" cy="292608"/>
+          </a:xfrm>
+          <a:prstGeom prst="rect">
+            <a:avLst/>
+          </a:prstGeom>
+          <a:noFill/>
+          <a:ln/>
+        </p:spPr>
+        <p:txBody>
+          <a:bodyPr wrap="square" lIns="0" tIns="0" rIns="0" bIns="0" rtlCol="0" anchor="ctr"/>
           <a:lstStyle/>
           <a:p>
             <a:pPr indent="0" marL="0">
-              <a:lnSpc>
-                <a:spcPct val="130000"/>
-              </a:lnSpc>
-              <a:buNone/>
-            </a:pPr>
-            <a:r>
-              <a:rPr lang="en-US" sz="1150" dirty="0">
+              <a:buNone/>
+            </a:pPr>
+            <a:r>
+              <a:rPr lang="en-US" sz="1100" dirty="0">
                 <a:solidFill>
                   <a:srgbClr val="6E6E6E"/>
                 </a:solidFill>
@@ -7910,9 +6434,9 @@
                 <a:ea typeface="Pretendard" pitchFamily="34" charset="-122"/>
                 <a:cs typeface="Pretendard" pitchFamily="34" charset="-120"/>
               </a:rPr>
-              <a:t>여러 날 여러 장소에서 찍은 사진은 밝기가 제각각입니다. 한 벌로 보이게 기준 하나를 정해 맞춥니다.</a:t>
-            </a:r>
-            <a:endParaRPr lang="en-US" sz="1150" dirty="0"/>
+              <a:t>같은 크기 여러 장 대신, 대표 하나를 크게 나머지를 작게</a:t>
+            </a:r>
+            <a:endParaRPr lang="en-US" sz="1100" dirty="0"/>
           </a:p>
         </p:txBody>
       </p:sp>
@@ -7924,8 +6448,509 @@
         </p:nvSpPr>
         <p:spPr>
           <a:xfrm>
-            <a:off x="4399178" y="1737360"/>
-            <a:ext cx="3393338" cy="3035808"/>
+            <a:off x="640080" y="2596896"/>
+            <a:ext cx="10911535" cy="7315"/>
+          </a:xfrm>
+          <a:prstGeom prst="rect">
+            <a:avLst/>
+          </a:prstGeom>
+          <a:solidFill>
+            <a:srgbClr val="DCDCDC"/>
+          </a:solidFill>
+          <a:ln w="12700">
+            <a:solidFill>
+              <a:srgbClr val="DCDCDC"/>
+            </a:solidFill>
+            <a:prstDash val="solid"/>
+          </a:ln>
+        </p:spPr>
+      </p:sp>
+      <p:sp>
+        <p:nvSpPr>
+          <p:cNvPr id="15" name="Shape 13"/>
+          <p:cNvSpPr/>
+          <p:nvPr/>
+        </p:nvSpPr>
+        <p:spPr>
+          <a:xfrm>
+            <a:off x="640080" y="2761488"/>
+            <a:ext cx="310896" cy="310896"/>
+          </a:xfrm>
+          <a:prstGeom prst="ellipse">
+            <a:avLst/>
+          </a:prstGeom>
+          <a:solidFill>
+            <a:srgbClr val="FFFFFF"/>
+          </a:solidFill>
+          <a:ln w="12700">
+            <a:solidFill>
+              <a:srgbClr val="111111"/>
+            </a:solidFill>
+            <a:prstDash val="solid"/>
+          </a:ln>
+        </p:spPr>
+      </p:sp>
+      <p:sp>
+        <p:nvSpPr>
+          <p:cNvPr id="16" name="Text 14"/>
+          <p:cNvSpPr/>
+          <p:nvPr/>
+        </p:nvSpPr>
+        <p:spPr>
+          <a:xfrm>
+            <a:off x="640080" y="2761488"/>
+            <a:ext cx="310896" cy="310896"/>
+          </a:xfrm>
+          <a:prstGeom prst="rect">
+            <a:avLst/>
+          </a:prstGeom>
+          <a:noFill/>
+          <a:ln/>
+        </p:spPr>
+        <p:txBody>
+          <a:bodyPr wrap="square" lIns="0" tIns="0" rIns="0" bIns="0" rtlCol="0" anchor="ctr"/>
+          <a:lstStyle/>
+          <a:p>
+            <a:pPr algn="ctr" indent="0" marL="0">
+              <a:buNone/>
+            </a:pPr>
+            <a:r>
+              <a:rPr lang="en-US" sz="1000" b="1" dirty="0">
+                <a:solidFill>
+                  <a:srgbClr val="111111"/>
+                </a:solidFill>
+                <a:latin typeface="Pretendard" pitchFamily="34" charset="0"/>
+                <a:ea typeface="Pretendard" pitchFamily="34" charset="-122"/>
+                <a:cs typeface="Pretendard" pitchFamily="34" charset="-120"/>
+              </a:rPr>
+              <a:t>2</a:t>
+            </a:r>
+            <a:endParaRPr lang="en-US" sz="1000" dirty="0"/>
+          </a:p>
+        </p:txBody>
+      </p:sp>
+      <p:sp>
+        <p:nvSpPr>
+          <p:cNvPr id="17" name="Text 15"/>
+          <p:cNvSpPr/>
+          <p:nvPr/>
+        </p:nvSpPr>
+        <p:spPr>
+          <a:xfrm>
+            <a:off x="1188720" y="2670048"/>
+            <a:ext cx="9875520" cy="310896"/>
+          </a:xfrm>
+          <a:prstGeom prst="rect">
+            <a:avLst/>
+          </a:prstGeom>
+          <a:noFill/>
+          <a:ln/>
+        </p:spPr>
+        <p:txBody>
+          <a:bodyPr wrap="square" lIns="0" tIns="0" rIns="0" bIns="0" rtlCol="0" anchor="ctr"/>
+          <a:lstStyle/>
+          <a:p>
+            <a:pPr indent="0" marL="0">
+              <a:buNone/>
+            </a:pPr>
+            <a:r>
+              <a:rPr lang="en-US" sz="1450" dirty="0">
+                <a:solidFill>
+                  <a:srgbClr val="111111"/>
+                </a:solidFill>
+                <a:latin typeface="Pretendard SemiBold" pitchFamily="34" charset="0"/>
+                <a:ea typeface="Pretendard SemiBold" pitchFamily="34" charset="-122"/>
+                <a:cs typeface="Pretendard SemiBold" pitchFamily="34" charset="-120"/>
+              </a:rPr>
+              <a:t>글과 이미지가 서로 안 맞물린다</a:t>
+            </a:r>
+            <a:endParaRPr lang="en-US" sz="1450" dirty="0"/>
+          </a:p>
+        </p:txBody>
+      </p:sp>
+      <p:sp>
+        <p:nvSpPr>
+          <p:cNvPr id="18" name="Text 16"/>
+          <p:cNvSpPr/>
+          <p:nvPr/>
+        </p:nvSpPr>
+        <p:spPr>
+          <a:xfrm>
+            <a:off x="1188720" y="2980944"/>
+            <a:ext cx="9875520" cy="292608"/>
+          </a:xfrm>
+          <a:prstGeom prst="rect">
+            <a:avLst/>
+          </a:prstGeom>
+          <a:noFill/>
+          <a:ln/>
+        </p:spPr>
+        <p:txBody>
+          <a:bodyPr wrap="square" lIns="0" tIns="0" rIns="0" bIns="0" rtlCol="0" anchor="ctr"/>
+          <a:lstStyle/>
+          <a:p>
+            <a:pPr indent="0" marL="0">
+              <a:buNone/>
+            </a:pPr>
+            <a:r>
+              <a:rPr lang="en-US" sz="1100" dirty="0">
+                <a:solidFill>
+                  <a:srgbClr val="6E6E6E"/>
+                </a:solidFill>
+                <a:latin typeface="Pretendard" pitchFamily="34" charset="0"/>
+                <a:ea typeface="Pretendard" pitchFamily="34" charset="-122"/>
+                <a:cs typeface="Pretendard" pitchFamily="34" charset="-120"/>
+              </a:rPr>
+              <a:t>캡션은 설명하는 이미지에 붙이고, 본문은 관련 이미지와 같은 단에</a:t>
+            </a:r>
+            <a:endParaRPr lang="en-US" sz="1100" dirty="0"/>
+          </a:p>
+        </p:txBody>
+      </p:sp>
+      <p:sp>
+        <p:nvSpPr>
+          <p:cNvPr id="19" name="Shape 17"/>
+          <p:cNvSpPr/>
+          <p:nvPr/>
+        </p:nvSpPr>
+        <p:spPr>
+          <a:xfrm>
+            <a:off x="640080" y="3547872"/>
+            <a:ext cx="10911535" cy="7315"/>
+          </a:xfrm>
+          <a:prstGeom prst="rect">
+            <a:avLst/>
+          </a:prstGeom>
+          <a:solidFill>
+            <a:srgbClr val="DCDCDC"/>
+          </a:solidFill>
+          <a:ln w="12700">
+            <a:solidFill>
+              <a:srgbClr val="DCDCDC"/>
+            </a:solidFill>
+            <a:prstDash val="solid"/>
+          </a:ln>
+        </p:spPr>
+      </p:sp>
+      <p:sp>
+        <p:nvSpPr>
+          <p:cNvPr id="20" name="Shape 18"/>
+          <p:cNvSpPr/>
+          <p:nvPr/>
+        </p:nvSpPr>
+        <p:spPr>
+          <a:xfrm>
+            <a:off x="640080" y="3712464"/>
+            <a:ext cx="310896" cy="310896"/>
+          </a:xfrm>
+          <a:prstGeom prst="ellipse">
+            <a:avLst/>
+          </a:prstGeom>
+          <a:solidFill>
+            <a:srgbClr val="FFFFFF"/>
+          </a:solidFill>
+          <a:ln w="12700">
+            <a:solidFill>
+              <a:srgbClr val="111111"/>
+            </a:solidFill>
+            <a:prstDash val="solid"/>
+          </a:ln>
+        </p:spPr>
+      </p:sp>
+      <p:sp>
+        <p:nvSpPr>
+          <p:cNvPr id="21" name="Text 19"/>
+          <p:cNvSpPr/>
+          <p:nvPr/>
+        </p:nvSpPr>
+        <p:spPr>
+          <a:xfrm>
+            <a:off x="640080" y="3712464"/>
+            <a:ext cx="310896" cy="310896"/>
+          </a:xfrm>
+          <a:prstGeom prst="rect">
+            <a:avLst/>
+          </a:prstGeom>
+          <a:noFill/>
+          <a:ln/>
+        </p:spPr>
+        <p:txBody>
+          <a:bodyPr wrap="square" lIns="0" tIns="0" rIns="0" bIns="0" rtlCol="0" anchor="ctr"/>
+          <a:lstStyle/>
+          <a:p>
+            <a:pPr algn="ctr" indent="0" marL="0">
+              <a:buNone/>
+            </a:pPr>
+            <a:r>
+              <a:rPr lang="en-US" sz="1000" b="1" dirty="0">
+                <a:solidFill>
+                  <a:srgbClr val="111111"/>
+                </a:solidFill>
+                <a:latin typeface="Pretendard" pitchFamily="34" charset="0"/>
+                <a:ea typeface="Pretendard" pitchFamily="34" charset="-122"/>
+                <a:cs typeface="Pretendard" pitchFamily="34" charset="-120"/>
+              </a:rPr>
+              <a:t>3</a:t>
+            </a:r>
+            <a:endParaRPr lang="en-US" sz="1000" dirty="0"/>
+          </a:p>
+        </p:txBody>
+      </p:sp>
+      <p:sp>
+        <p:nvSpPr>
+          <p:cNvPr id="22" name="Text 20"/>
+          <p:cNvSpPr/>
+          <p:nvPr/>
+        </p:nvSpPr>
+        <p:spPr>
+          <a:xfrm>
+            <a:off x="1188720" y="3621024"/>
+            <a:ext cx="9875520" cy="310896"/>
+          </a:xfrm>
+          <a:prstGeom prst="rect">
+            <a:avLst/>
+          </a:prstGeom>
+          <a:noFill/>
+          <a:ln/>
+        </p:spPr>
+        <p:txBody>
+          <a:bodyPr wrap="square" lIns="0" tIns="0" rIns="0" bIns="0" rtlCol="0" anchor="ctr"/>
+          <a:lstStyle/>
+          <a:p>
+            <a:pPr indent="0" marL="0">
+              <a:buNone/>
+            </a:pPr>
+            <a:r>
+              <a:rPr lang="en-US" sz="1450" dirty="0">
+                <a:solidFill>
+                  <a:srgbClr val="111111"/>
+                </a:solidFill>
+                <a:latin typeface="Pretendard SemiBold" pitchFamily="34" charset="0"/>
+                <a:ea typeface="Pretendard SemiBold" pitchFamily="34" charset="-122"/>
+                <a:cs typeface="Pretendard SemiBold" pitchFamily="34" charset="-120"/>
+              </a:rPr>
+              <a:t>정렬 기준이 섞여 있다</a:t>
+            </a:r>
+            <a:endParaRPr lang="en-US" sz="1450" dirty="0"/>
+          </a:p>
+        </p:txBody>
+      </p:sp>
+      <p:sp>
+        <p:nvSpPr>
+          <p:cNvPr id="23" name="Text 21"/>
+          <p:cNvSpPr/>
+          <p:nvPr/>
+        </p:nvSpPr>
+        <p:spPr>
+          <a:xfrm>
+            <a:off x="1188720" y="3931920"/>
+            <a:ext cx="9875520" cy="292608"/>
+          </a:xfrm>
+          <a:prstGeom prst="rect">
+            <a:avLst/>
+          </a:prstGeom>
+          <a:noFill/>
+          <a:ln/>
+        </p:spPr>
+        <p:txBody>
+          <a:bodyPr wrap="square" lIns="0" tIns="0" rIns="0" bIns="0" rtlCol="0" anchor="ctr"/>
+          <a:lstStyle/>
+          <a:p>
+            <a:pPr indent="0" marL="0">
+              <a:buNone/>
+            </a:pPr>
+            <a:r>
+              <a:rPr lang="en-US" sz="1100" dirty="0">
+                <a:solidFill>
+                  <a:srgbClr val="6E6E6E"/>
+                </a:solidFill>
+                <a:latin typeface="Pretendard" pitchFamily="34" charset="0"/>
+                <a:ea typeface="Pretendard" pitchFamily="34" charset="-122"/>
+                <a:cs typeface="Pretendard" pitchFamily="34" charset="-120"/>
+              </a:rPr>
+              <a:t>왼쪽 정렬과 가운데 정렬이 한 지면에 섞이면 산만합니다. 하나로 통일</a:t>
+            </a:r>
+            <a:endParaRPr lang="en-US" sz="1100" dirty="0"/>
+          </a:p>
+        </p:txBody>
+      </p:sp>
+      <p:sp>
+        <p:nvSpPr>
+          <p:cNvPr id="24" name="Shape 22"/>
+          <p:cNvSpPr/>
+          <p:nvPr/>
+        </p:nvSpPr>
+        <p:spPr>
+          <a:xfrm>
+            <a:off x="640080" y="4498848"/>
+            <a:ext cx="10911535" cy="7315"/>
+          </a:xfrm>
+          <a:prstGeom prst="rect">
+            <a:avLst/>
+          </a:prstGeom>
+          <a:solidFill>
+            <a:srgbClr val="DCDCDC"/>
+          </a:solidFill>
+          <a:ln w="12700">
+            <a:solidFill>
+              <a:srgbClr val="DCDCDC"/>
+            </a:solidFill>
+            <a:prstDash val="solid"/>
+          </a:ln>
+        </p:spPr>
+      </p:sp>
+      <p:sp>
+        <p:nvSpPr>
+          <p:cNvPr id="25" name="Shape 23"/>
+          <p:cNvSpPr/>
+          <p:nvPr/>
+        </p:nvSpPr>
+        <p:spPr>
+          <a:xfrm>
+            <a:off x="640080" y="4663440"/>
+            <a:ext cx="310896" cy="310896"/>
+          </a:xfrm>
+          <a:prstGeom prst="ellipse">
+            <a:avLst/>
+          </a:prstGeom>
+          <a:solidFill>
+            <a:srgbClr val="FFFFFF"/>
+          </a:solidFill>
+          <a:ln w="12700">
+            <a:solidFill>
+              <a:srgbClr val="111111"/>
+            </a:solidFill>
+            <a:prstDash val="solid"/>
+          </a:ln>
+        </p:spPr>
+      </p:sp>
+      <p:sp>
+        <p:nvSpPr>
+          <p:cNvPr id="26" name="Text 24"/>
+          <p:cNvSpPr/>
+          <p:nvPr/>
+        </p:nvSpPr>
+        <p:spPr>
+          <a:xfrm>
+            <a:off x="640080" y="4663440"/>
+            <a:ext cx="310896" cy="310896"/>
+          </a:xfrm>
+          <a:prstGeom prst="rect">
+            <a:avLst/>
+          </a:prstGeom>
+          <a:noFill/>
+          <a:ln/>
+        </p:spPr>
+        <p:txBody>
+          <a:bodyPr wrap="square" lIns="0" tIns="0" rIns="0" bIns="0" rtlCol="0" anchor="ctr"/>
+          <a:lstStyle/>
+          <a:p>
+            <a:pPr algn="ctr" indent="0" marL="0">
+              <a:buNone/>
+            </a:pPr>
+            <a:r>
+              <a:rPr lang="en-US" sz="1000" b="1" dirty="0">
+                <a:solidFill>
+                  <a:srgbClr val="111111"/>
+                </a:solidFill>
+                <a:latin typeface="Pretendard" pitchFamily="34" charset="0"/>
+                <a:ea typeface="Pretendard" pitchFamily="34" charset="-122"/>
+                <a:cs typeface="Pretendard" pitchFamily="34" charset="-120"/>
+              </a:rPr>
+              <a:t>4</a:t>
+            </a:r>
+            <a:endParaRPr lang="en-US" sz="1000" dirty="0"/>
+          </a:p>
+        </p:txBody>
+      </p:sp>
+      <p:sp>
+        <p:nvSpPr>
+          <p:cNvPr id="27" name="Text 25"/>
+          <p:cNvSpPr/>
+          <p:nvPr/>
+        </p:nvSpPr>
+        <p:spPr>
+          <a:xfrm>
+            <a:off x="1188720" y="4572000"/>
+            <a:ext cx="9875520" cy="310896"/>
+          </a:xfrm>
+          <a:prstGeom prst="rect">
+            <a:avLst/>
+          </a:prstGeom>
+          <a:noFill/>
+          <a:ln/>
+        </p:spPr>
+        <p:txBody>
+          <a:bodyPr wrap="square" lIns="0" tIns="0" rIns="0" bIns="0" rtlCol="0" anchor="ctr"/>
+          <a:lstStyle/>
+          <a:p>
+            <a:pPr indent="0" marL="0">
+              <a:buNone/>
+            </a:pPr>
+            <a:r>
+              <a:rPr lang="en-US" sz="1450" dirty="0">
+                <a:solidFill>
+                  <a:srgbClr val="111111"/>
+                </a:solidFill>
+                <a:latin typeface="Pretendard SemiBold" pitchFamily="34" charset="0"/>
+                <a:ea typeface="Pretendard SemiBold" pitchFamily="34" charset="-122"/>
+                <a:cs typeface="Pretendard SemiBold" pitchFamily="34" charset="-120"/>
+              </a:rPr>
+              <a:t>여백이 한쪽에 몰려 있다</a:t>
+            </a:r>
+            <a:endParaRPr lang="en-US" sz="1450" dirty="0"/>
+          </a:p>
+        </p:txBody>
+      </p:sp>
+      <p:sp>
+        <p:nvSpPr>
+          <p:cNvPr id="28" name="Text 26"/>
+          <p:cNvSpPr/>
+          <p:nvPr/>
+        </p:nvSpPr>
+        <p:spPr>
+          <a:xfrm>
+            <a:off x="1188720" y="4882896"/>
+            <a:ext cx="9875520" cy="292608"/>
+          </a:xfrm>
+          <a:prstGeom prst="rect">
+            <a:avLst/>
+          </a:prstGeom>
+          <a:noFill/>
+          <a:ln/>
+        </p:spPr>
+        <p:txBody>
+          <a:bodyPr wrap="square" lIns="0" tIns="0" rIns="0" bIns="0" rtlCol="0" anchor="ctr"/>
+          <a:lstStyle/>
+          <a:p>
+            <a:pPr indent="0" marL="0">
+              <a:buNone/>
+            </a:pPr>
+            <a:r>
+              <a:rPr lang="en-US" sz="1100" dirty="0">
+                <a:solidFill>
+                  <a:srgbClr val="6E6E6E"/>
+                </a:solidFill>
+                <a:latin typeface="Pretendard" pitchFamily="34" charset="0"/>
+                <a:ea typeface="Pretendard" pitchFamily="34" charset="-122"/>
+                <a:cs typeface="Pretendard" pitchFamily="34" charset="-120"/>
+              </a:rPr>
+              <a:t>요소를 옮기기 전에 그리드에 다시 맞춰 보세요. 대개 그리드를 벗어난 상태입니다</a:t>
+            </a:r>
+            <a:endParaRPr lang="en-US" sz="1100" dirty="0"/>
+          </a:p>
+        </p:txBody>
+      </p:sp>
+      <p:sp>
+        <p:nvSpPr>
+          <p:cNvPr id="29" name="Shape 27"/>
+          <p:cNvSpPr/>
+          <p:nvPr/>
+        </p:nvSpPr>
+        <p:spPr>
+          <a:xfrm>
+            <a:off x="640080" y="5522976"/>
+            <a:ext cx="10911535" cy="7315"/>
           </a:xfrm>
           <a:prstGeom prst="rect">
             <a:avLst/>
@@ -7943,360 +6968,14 @@
       </p:sp>
       <p:sp>
         <p:nvSpPr>
-          <p:cNvPr id="15" name="Shape 13"/>
-          <p:cNvSpPr/>
-          <p:nvPr/>
-        </p:nvSpPr>
-        <p:spPr>
-          <a:xfrm>
-            <a:off x="4783226" y="2011680"/>
-            <a:ext cx="365760" cy="365760"/>
-          </a:xfrm>
-          <a:prstGeom prst="ellipse">
-            <a:avLst/>
-          </a:prstGeom>
-          <a:solidFill>
-            <a:srgbClr val="111111"/>
-          </a:solidFill>
-          <a:ln w="12700">
-            <a:solidFill>
-              <a:srgbClr val="FFFFFF"/>
-            </a:solidFill>
-            <a:prstDash val="solid"/>
-          </a:ln>
-        </p:spPr>
-      </p:sp>
-      <p:sp>
-        <p:nvSpPr>
-          <p:cNvPr id="16" name="Text 14"/>
-          <p:cNvSpPr/>
-          <p:nvPr/>
-        </p:nvSpPr>
-        <p:spPr>
-          <a:xfrm>
-            <a:off x="4783226" y="2011680"/>
-            <a:ext cx="365760" cy="365760"/>
-          </a:xfrm>
-          <a:prstGeom prst="rect">
-            <a:avLst/>
-          </a:prstGeom>
-          <a:noFill/>
-          <a:ln/>
-        </p:spPr>
-        <p:txBody>
-          <a:bodyPr wrap="square" lIns="0" tIns="0" rIns="0" bIns="0" rtlCol="0" anchor="ctr"/>
-          <a:lstStyle/>
-          <a:p>
-            <a:pPr algn="ctr" indent="0" marL="0">
-              <a:buNone/>
-            </a:pPr>
-            <a:r>
-              <a:rPr lang="en-US" sz="1150" b="1" dirty="0">
-                <a:solidFill>
-                  <a:srgbClr val="FFFFFF"/>
-                </a:solidFill>
-                <a:latin typeface="Pretendard" pitchFamily="34" charset="0"/>
-                <a:ea typeface="Pretendard" pitchFamily="34" charset="-122"/>
-                <a:cs typeface="Pretendard" pitchFamily="34" charset="-120"/>
-              </a:rPr>
-              <a:t>02</a:t>
-            </a:r>
-            <a:endParaRPr lang="en-US" sz="1150" dirty="0"/>
-          </a:p>
-        </p:txBody>
-      </p:sp>
-      <p:sp>
-        <p:nvSpPr>
-          <p:cNvPr id="17" name="Text 15"/>
-          <p:cNvSpPr/>
-          <p:nvPr/>
-        </p:nvSpPr>
-        <p:spPr>
-          <a:xfrm>
-            <a:off x="4783226" y="2505456"/>
-            <a:ext cx="2625242" cy="457200"/>
-          </a:xfrm>
-          <a:prstGeom prst="rect">
-            <a:avLst/>
-          </a:prstGeom>
-          <a:noFill/>
-          <a:ln/>
-        </p:spPr>
-        <p:txBody>
-          <a:bodyPr wrap="square" lIns="0" tIns="0" rIns="0" bIns="0" rtlCol="0" anchor="t"/>
-          <a:lstStyle/>
-          <a:p>
-            <a:pPr indent="0" marL="0">
-              <a:lnSpc>
-                <a:spcPct val="114000"/>
-              </a:lnSpc>
-              <a:buNone/>
-            </a:pPr>
-            <a:r>
-              <a:rPr lang="en-US" sz="1700" dirty="0">
-                <a:solidFill>
-                  <a:srgbClr val="FFFFFF"/>
-                </a:solidFill>
-                <a:latin typeface="Pretendard Black" pitchFamily="34" charset="0"/>
-                <a:ea typeface="Pretendard Black" pitchFamily="34" charset="-122"/>
-                <a:cs typeface="Pretendard Black" pitchFamily="34" charset="-120"/>
-              </a:rPr>
-              <a:t>색온도 통일</a:t>
-            </a:r>
-            <a:endParaRPr lang="en-US" sz="1700" dirty="0"/>
-          </a:p>
-        </p:txBody>
-      </p:sp>
-      <p:sp>
-        <p:nvSpPr>
-          <p:cNvPr id="18" name="Text 16"/>
-          <p:cNvSpPr/>
-          <p:nvPr/>
-        </p:nvSpPr>
-        <p:spPr>
-          <a:xfrm>
-            <a:off x="4783226" y="2999232"/>
-            <a:ext cx="2625242" cy="1645920"/>
-          </a:xfrm>
-          <a:prstGeom prst="rect">
-            <a:avLst/>
-          </a:prstGeom>
-          <a:noFill/>
-          <a:ln/>
-        </p:spPr>
-        <p:txBody>
-          <a:bodyPr wrap="square" lIns="0" tIns="0" rIns="0" bIns="0" rtlCol="0" anchor="t"/>
-          <a:lstStyle/>
-          <a:p>
-            <a:pPr indent="0" marL="0">
-              <a:lnSpc>
-                <a:spcPct val="130000"/>
-              </a:lnSpc>
-              <a:buNone/>
-            </a:pPr>
-            <a:r>
-              <a:rPr lang="en-US" sz="1150" dirty="0">
-                <a:solidFill>
-                  <a:srgbClr val="B8B8B8"/>
-                </a:solidFill>
-                <a:latin typeface="Pretendard" pitchFamily="34" charset="0"/>
-                <a:ea typeface="Pretendard" pitchFamily="34" charset="-122"/>
-                <a:cs typeface="Pretendard" pitchFamily="34" charset="-120"/>
-              </a:rPr>
-              <a:t>어떤 건 노랗고 어떤 건 파랗습니다. 중간값을 정해 전부 맞춥니다. 이것만 해도 완성도가 크게 올라갑니다.</a:t>
-            </a:r>
-            <a:endParaRPr lang="en-US" sz="1150" dirty="0"/>
-          </a:p>
-        </p:txBody>
-      </p:sp>
-      <p:sp>
-        <p:nvSpPr>
-          <p:cNvPr id="19" name="Shape 17"/>
-          <p:cNvSpPr/>
-          <p:nvPr/>
-        </p:nvSpPr>
-        <p:spPr>
-          <a:xfrm>
-            <a:off x="8158277" y="1737360"/>
-            <a:ext cx="3393338" cy="3035808"/>
-          </a:xfrm>
-          <a:prstGeom prst="rect">
-            <a:avLst/>
-          </a:prstGeom>
-          <a:solidFill>
-            <a:srgbClr val="FFFFFF"/>
-          </a:solidFill>
-          <a:ln w="12700">
-            <a:solidFill>
-              <a:srgbClr val="DCDCDC"/>
-            </a:solidFill>
-            <a:prstDash val="solid"/>
-          </a:ln>
-        </p:spPr>
-      </p:sp>
-      <p:sp>
-        <p:nvSpPr>
-          <p:cNvPr id="20" name="Shape 18"/>
-          <p:cNvSpPr/>
-          <p:nvPr/>
-        </p:nvSpPr>
-        <p:spPr>
-          <a:xfrm>
-            <a:off x="8542325" y="2011680"/>
-            <a:ext cx="365760" cy="365760"/>
-          </a:xfrm>
-          <a:prstGeom prst="ellipse">
-            <a:avLst/>
-          </a:prstGeom>
-          <a:solidFill>
-            <a:srgbClr val="FFFFFF"/>
-          </a:solidFill>
-          <a:ln w="12700">
-            <a:solidFill>
-              <a:srgbClr val="111111"/>
-            </a:solidFill>
-            <a:prstDash val="solid"/>
-          </a:ln>
-        </p:spPr>
-      </p:sp>
-      <p:sp>
-        <p:nvSpPr>
-          <p:cNvPr id="21" name="Text 19"/>
-          <p:cNvSpPr/>
-          <p:nvPr/>
-        </p:nvSpPr>
-        <p:spPr>
-          <a:xfrm>
-            <a:off x="8542325" y="2011680"/>
-            <a:ext cx="365760" cy="365760"/>
-          </a:xfrm>
-          <a:prstGeom prst="rect">
-            <a:avLst/>
-          </a:prstGeom>
-          <a:noFill/>
-          <a:ln/>
-        </p:spPr>
-        <p:txBody>
-          <a:bodyPr wrap="square" lIns="0" tIns="0" rIns="0" bIns="0" rtlCol="0" anchor="ctr"/>
-          <a:lstStyle/>
-          <a:p>
-            <a:pPr algn="ctr" indent="0" marL="0">
-              <a:buNone/>
-            </a:pPr>
-            <a:r>
-              <a:rPr lang="en-US" sz="1150" b="1" dirty="0">
-                <a:solidFill>
-                  <a:srgbClr val="111111"/>
-                </a:solidFill>
-                <a:latin typeface="Pretendard" pitchFamily="34" charset="0"/>
-                <a:ea typeface="Pretendard" pitchFamily="34" charset="-122"/>
-                <a:cs typeface="Pretendard" pitchFamily="34" charset="-120"/>
-              </a:rPr>
-              <a:t>03</a:t>
-            </a:r>
-            <a:endParaRPr lang="en-US" sz="1150" dirty="0"/>
-          </a:p>
-        </p:txBody>
-      </p:sp>
-      <p:sp>
-        <p:nvSpPr>
-          <p:cNvPr id="22" name="Text 20"/>
-          <p:cNvSpPr/>
-          <p:nvPr/>
-        </p:nvSpPr>
-        <p:spPr>
-          <a:xfrm>
-            <a:off x="8542325" y="2505456"/>
-            <a:ext cx="2625242" cy="457200"/>
-          </a:xfrm>
-          <a:prstGeom prst="rect">
-            <a:avLst/>
-          </a:prstGeom>
-          <a:noFill/>
-          <a:ln/>
-        </p:spPr>
-        <p:txBody>
-          <a:bodyPr wrap="square" lIns="0" tIns="0" rIns="0" bIns="0" rtlCol="0" anchor="t"/>
-          <a:lstStyle/>
-          <a:p>
-            <a:pPr indent="0" marL="0">
-              <a:lnSpc>
-                <a:spcPct val="114000"/>
-              </a:lnSpc>
-              <a:buNone/>
-            </a:pPr>
-            <a:r>
-              <a:rPr lang="en-US" sz="1700" dirty="0">
-                <a:solidFill>
-                  <a:srgbClr val="111111"/>
-                </a:solidFill>
-                <a:latin typeface="Pretendard Black" pitchFamily="34" charset="0"/>
-                <a:ea typeface="Pretendard Black" pitchFamily="34" charset="-122"/>
-                <a:cs typeface="Pretendard Black" pitchFamily="34" charset="-120"/>
-              </a:rPr>
-              <a:t>크롭과 배경 정리</a:t>
-            </a:r>
-            <a:endParaRPr lang="en-US" sz="1700" dirty="0"/>
-          </a:p>
-        </p:txBody>
-      </p:sp>
-      <p:sp>
-        <p:nvSpPr>
-          <p:cNvPr id="23" name="Text 21"/>
-          <p:cNvSpPr/>
-          <p:nvPr/>
-        </p:nvSpPr>
-        <p:spPr>
-          <a:xfrm>
-            <a:off x="8542325" y="2999232"/>
-            <a:ext cx="2625242" cy="1645920"/>
-          </a:xfrm>
-          <a:prstGeom prst="rect">
-            <a:avLst/>
-          </a:prstGeom>
-          <a:noFill/>
-          <a:ln/>
-        </p:spPr>
-        <p:txBody>
-          <a:bodyPr wrap="square" lIns="0" tIns="0" rIns="0" bIns="0" rtlCol="0" anchor="t"/>
-          <a:lstStyle/>
-          <a:p>
-            <a:pPr indent="0" marL="0">
-              <a:lnSpc>
-                <a:spcPct val="130000"/>
-              </a:lnSpc>
-              <a:buNone/>
-            </a:pPr>
-            <a:r>
-              <a:rPr lang="en-US" sz="1150" dirty="0">
-                <a:solidFill>
-                  <a:srgbClr val="6E6E6E"/>
-                </a:solidFill>
-                <a:latin typeface="Pretendard" pitchFamily="34" charset="0"/>
-                <a:ea typeface="Pretendard" pitchFamily="34" charset="-122"/>
-                <a:cs typeface="Pretendard" pitchFamily="34" charset="-120"/>
-              </a:rPr>
-              <a:t>불필요한 주변을 잘라내고, 배경이 지저분하면 단순하게. 작업이 주인공이 되게 합니다.</a:t>
-            </a:r>
-            <a:endParaRPr lang="en-US" sz="1150" dirty="0"/>
-          </a:p>
-        </p:txBody>
-      </p:sp>
-      <p:sp>
-        <p:nvSpPr>
-          <p:cNvPr id="24" name="Shape 22"/>
-          <p:cNvSpPr/>
-          <p:nvPr/>
-        </p:nvSpPr>
-        <p:spPr>
-          <a:xfrm>
-            <a:off x="640080" y="5084064"/>
-            <a:ext cx="10911535" cy="7315"/>
-          </a:xfrm>
-          <a:prstGeom prst="rect">
-            <a:avLst/>
-          </a:prstGeom>
-          <a:solidFill>
-            <a:srgbClr val="111111"/>
-          </a:solidFill>
-          <a:ln w="12700">
-            <a:solidFill>
-              <a:srgbClr val="111111"/>
-            </a:solidFill>
-            <a:prstDash val="solid"/>
-          </a:ln>
-        </p:spPr>
-      </p:sp>
-      <p:sp>
-        <p:nvSpPr>
-          <p:cNvPr id="25" name="Text 23"/>
-          <p:cNvSpPr/>
-          <p:nvPr/>
-        </p:nvSpPr>
-        <p:spPr>
-          <a:xfrm>
-            <a:off x="640080" y="5193792"/>
-            <a:ext cx="10911535" cy="438912"/>
+          <p:cNvPr id="30" name="Text 28"/>
+          <p:cNvSpPr/>
+          <p:nvPr/>
+        </p:nvSpPr>
+        <p:spPr>
+          <a:xfrm>
+            <a:off x="640080" y="5632704"/>
+            <a:ext cx="10911535" cy="402336"/>
           </a:xfrm>
           <a:prstGeom prst="rect">
             <a:avLst/>
@@ -8315,7 +6994,7 @@
               <a:buNone/>
             </a:pPr>
             <a:r>
-              <a:rPr lang="en-US" sz="1300" b="1" dirty="0">
+              <a:rPr lang="en-US" sz="1250" b="1" dirty="0">
                 <a:solidFill>
                   <a:srgbClr val="111111"/>
                 </a:solidFill>
@@ -8323,15 +7002,15 @@
                 <a:ea typeface="Pretendard" pitchFamily="34" charset="-122"/>
                 <a:cs typeface="Pretendard" pitchFamily="34" charset="-120"/>
               </a:rPr>
-              <a:t>해상도가 부족한 이미지는 보정으로 해결되지 않습니다. 작게 배치하거나 다시 찍으세요.</a:t>
-            </a:r>
-            <a:endParaRPr lang="en-US" sz="1300" dirty="0"/>
-          </a:p>
-        </p:txBody>
-      </p:sp>
-      <p:sp>
-        <p:nvSpPr>
-          <p:cNvPr id="26" name="Shape 24"/>
+              <a:t>지면이 어색한데 이유를 모르겠다면 넷을 순서대로 확인하세요.</a:t>
+            </a:r>
+            <a:endParaRPr lang="en-US" sz="1250" dirty="0"/>
+          </a:p>
+        </p:txBody>
+      </p:sp>
+      <p:sp>
+        <p:nvSpPr>
+          <p:cNvPr id="31" name="Shape 29"/>
           <p:cNvSpPr/>
           <p:nvPr/>
         </p:nvSpPr>
@@ -8356,7 +7035,7 @@
       </p:sp>
       <p:sp>
         <p:nvSpPr>
-          <p:cNvPr id="27" name="Text 25"/>
+          <p:cNvPr id="32" name="Text 30"/>
           <p:cNvSpPr/>
           <p:nvPr/>
         </p:nvSpPr>
@@ -8395,7 +7074,7 @@
       </p:sp>
       <p:sp>
         <p:nvSpPr>
-          <p:cNvPr id="28" name="Text 26"/>
+          <p:cNvPr id="33" name="Text 31"/>
           <p:cNvSpPr/>
           <p:nvPr/>
         </p:nvSpPr>
@@ -8639,7 +7318,7 @@
                 <a:ea typeface="Pretendard" pitchFamily="34" charset="-122"/>
                 <a:cs typeface="Pretendard" pitchFamily="34" charset="-120"/>
               </a:rPr>
-              <a:t>BALANCE</a:t>
+              <a:t>WORKSHOP</a:t>
             </a:r>
             <a:endParaRPr lang="en-US" sz="950" dirty="0"/>
           </a:p>
@@ -8674,11 +7353,11 @@
                 <a:solidFill>
                   <a:srgbClr val="111111"/>
                 </a:solidFill>
-                <a:latin typeface="Pretendard Black" pitchFamily="34" charset="0"/>
-                <a:ea typeface="Pretendard Black" pitchFamily="34" charset="-122"/>
-                <a:cs typeface="Pretendard Black" pitchFamily="34" charset="-120"/>
-              </a:rPr>
-              <a:t>이미지와 텍스트의 균형</a:t>
+                <a:latin typeface="Pretendard SemiBold" pitchFamily="34" charset="0"/>
+                <a:ea typeface="Pretendard SemiBold" pitchFamily="34" charset="-122"/>
+                <a:cs typeface="Pretendard SemiBold" pitchFamily="34" charset="-120"/>
+              </a:rPr>
+              <a:t>실습 · 보정과 배치</a:t>
             </a:r>
             <a:endParaRPr lang="en-US" sz="3000" dirty="0"/>
           </a:p>
@@ -8717,7 +7396,7 @@
                 <a:ea typeface="Pretendard" pitchFamily="34" charset="-122"/>
                 <a:cs typeface="Pretendard" pitchFamily="34" charset="-120"/>
               </a:rPr>
-              <a:t>지면이 불안정해 보이는 이유는 대개 이 넷 중 하나입니다.</a:t>
+              <a:t>80분 · 개인 — 이미지 정리부터 시작합니다. 중간에 휴식이 한 번 들어갑니다.</a:t>
             </a:r>
             <a:endParaRPr lang="en-US" sz="1150" dirty="0"/>
           </a:p>
@@ -8731,8 +7410,326 @@
         </p:nvSpPr>
         <p:spPr>
           <a:xfrm>
-            <a:off x="640080" y="1664208"/>
-            <a:ext cx="10911535" cy="7315"/>
+            <a:off x="640080" y="1719072"/>
+            <a:ext cx="10911535" cy="822960"/>
+          </a:xfrm>
+          <a:prstGeom prst="rect">
+            <a:avLst/>
+          </a:prstGeom>
+          <a:solidFill>
+            <a:srgbClr val="FFFFFF"/>
+          </a:solidFill>
+          <a:ln w="12700">
+            <a:solidFill>
+              <a:srgbClr val="DCDCDC"/>
+            </a:solidFill>
+            <a:prstDash val="solid"/>
+          </a:ln>
+        </p:spPr>
+      </p:sp>
+      <p:sp>
+        <p:nvSpPr>
+          <p:cNvPr id="10" name="Text 8"/>
+          <p:cNvSpPr/>
+          <p:nvPr/>
+        </p:nvSpPr>
+        <p:spPr>
+          <a:xfrm>
+            <a:off x="1097280" y="1810512"/>
+            <a:ext cx="3291840" cy="640080"/>
+          </a:xfrm>
+          <a:prstGeom prst="rect">
+            <a:avLst/>
+          </a:prstGeom>
+          <a:noFill/>
+          <a:ln/>
+        </p:spPr>
+        <p:txBody>
+          <a:bodyPr wrap="square" lIns="0" tIns="0" rIns="0" bIns="0" rtlCol="0" anchor="ctr"/>
+          <a:lstStyle/>
+          <a:p>
+            <a:pPr indent="0" marL="0">
+              <a:buNone/>
+            </a:pPr>
+            <a:r>
+              <a:rPr lang="en-US" sz="1450" dirty="0">
+                <a:solidFill>
+                  <a:srgbClr val="111111"/>
+                </a:solidFill>
+                <a:latin typeface="Pretendard SemiBold" pitchFamily="34" charset="0"/>
+                <a:ea typeface="Pretendard SemiBold" pitchFamily="34" charset="-122"/>
+                <a:cs typeface="Pretendard SemiBold" pitchFamily="34" charset="-120"/>
+              </a:rPr>
+              <a:t>이미지 점검</a:t>
+            </a:r>
+            <a:endParaRPr lang="en-US" sz="1450" dirty="0"/>
+          </a:p>
+        </p:txBody>
+      </p:sp>
+      <p:sp>
+        <p:nvSpPr>
+          <p:cNvPr id="11" name="Text 9"/>
+          <p:cNvSpPr/>
+          <p:nvPr/>
+        </p:nvSpPr>
+        <p:spPr>
+          <a:xfrm>
+            <a:off x="4480560" y="1810512"/>
+            <a:ext cx="6705295" cy="640080"/>
+          </a:xfrm>
+          <a:prstGeom prst="rect">
+            <a:avLst/>
+          </a:prstGeom>
+          <a:noFill/>
+          <a:ln/>
+        </p:spPr>
+        <p:txBody>
+          <a:bodyPr wrap="square" lIns="0" tIns="0" rIns="0" bIns="0" rtlCol="0" anchor="ctr"/>
+          <a:lstStyle/>
+          <a:p>
+            <a:pPr indent="0" marL="0">
+              <a:lnSpc>
+                <a:spcPct val="124000"/>
+              </a:lnSpc>
+              <a:buNone/>
+            </a:pPr>
+            <a:r>
+              <a:rPr lang="en-US" sz="1150" dirty="0">
+                <a:solidFill>
+                  <a:srgbClr val="6E6E6E"/>
+                </a:solidFill>
+                <a:latin typeface="Pretendard" pitchFamily="34" charset="0"/>
+                <a:ea typeface="Pretendard" pitchFamily="34" charset="-122"/>
+                <a:cs typeface="Pretendard" pitchFamily="34" charset="-120"/>
+              </a:rPr>
+              <a:t>쓸 이미지를 전부 늘어놓고 해상도와 톤을 확인합니다. 못 쓸 것을 먼저 걸러냅니다.</a:t>
+            </a:r>
+            <a:endParaRPr lang="en-US" sz="1150" dirty="0"/>
+          </a:p>
+        </p:txBody>
+      </p:sp>
+      <p:sp>
+        <p:nvSpPr>
+          <p:cNvPr id="12" name="Shape 10"/>
+          <p:cNvSpPr/>
+          <p:nvPr/>
+        </p:nvSpPr>
+        <p:spPr>
+          <a:xfrm>
+            <a:off x="640080" y="2688336"/>
+            <a:ext cx="10911535" cy="822960"/>
+          </a:xfrm>
+          <a:prstGeom prst="rect">
+            <a:avLst/>
+          </a:prstGeom>
+          <a:solidFill>
+            <a:srgbClr val="FFFFFF"/>
+          </a:solidFill>
+          <a:ln w="12700">
+            <a:solidFill>
+              <a:srgbClr val="DCDCDC"/>
+            </a:solidFill>
+            <a:prstDash val="solid"/>
+          </a:ln>
+        </p:spPr>
+      </p:sp>
+      <p:sp>
+        <p:nvSpPr>
+          <p:cNvPr id="13" name="Text 11"/>
+          <p:cNvSpPr/>
+          <p:nvPr/>
+        </p:nvSpPr>
+        <p:spPr>
+          <a:xfrm>
+            <a:off x="1097280" y="2779776"/>
+            <a:ext cx="3291840" cy="640080"/>
+          </a:xfrm>
+          <a:prstGeom prst="rect">
+            <a:avLst/>
+          </a:prstGeom>
+          <a:noFill/>
+          <a:ln/>
+        </p:spPr>
+        <p:txBody>
+          <a:bodyPr wrap="square" lIns="0" tIns="0" rIns="0" bIns="0" rtlCol="0" anchor="ctr"/>
+          <a:lstStyle/>
+          <a:p>
+            <a:pPr indent="0" marL="0">
+              <a:buNone/>
+            </a:pPr>
+            <a:r>
+              <a:rPr lang="en-US" sz="1450" dirty="0">
+                <a:solidFill>
+                  <a:srgbClr val="111111"/>
+                </a:solidFill>
+                <a:latin typeface="Pretendard SemiBold" pitchFamily="34" charset="0"/>
+                <a:ea typeface="Pretendard SemiBold" pitchFamily="34" charset="-122"/>
+                <a:cs typeface="Pretendard SemiBold" pitchFamily="34" charset="-120"/>
+              </a:rPr>
+              <a:t>톤 통일</a:t>
+            </a:r>
+            <a:endParaRPr lang="en-US" sz="1450" dirty="0"/>
+          </a:p>
+        </p:txBody>
+      </p:sp>
+      <p:sp>
+        <p:nvSpPr>
+          <p:cNvPr id="14" name="Text 12"/>
+          <p:cNvSpPr/>
+          <p:nvPr/>
+        </p:nvSpPr>
+        <p:spPr>
+          <a:xfrm>
+            <a:off x="4480560" y="2779776"/>
+            <a:ext cx="6705295" cy="640080"/>
+          </a:xfrm>
+          <a:prstGeom prst="rect">
+            <a:avLst/>
+          </a:prstGeom>
+          <a:noFill/>
+          <a:ln/>
+        </p:spPr>
+        <p:txBody>
+          <a:bodyPr wrap="square" lIns="0" tIns="0" rIns="0" bIns="0" rtlCol="0" anchor="ctr"/>
+          <a:lstStyle/>
+          <a:p>
+            <a:pPr indent="0" marL="0">
+              <a:lnSpc>
+                <a:spcPct val="124000"/>
+              </a:lnSpc>
+              <a:buNone/>
+            </a:pPr>
+            <a:r>
+              <a:rPr lang="en-US" sz="1150" dirty="0">
+                <a:solidFill>
+                  <a:srgbClr val="6E6E6E"/>
+                </a:solidFill>
+                <a:latin typeface="Pretendard" pitchFamily="34" charset="0"/>
+                <a:ea typeface="Pretendard" pitchFamily="34" charset="-122"/>
+                <a:cs typeface="Pretendard" pitchFamily="34" charset="-120"/>
+              </a:rPr>
+              <a:t>기준 이미지 하나를 정하고 나머지를 거기에 맞춥니다. 밝기 · 대비 · 색온도 순서로.</a:t>
+            </a:r>
+            <a:endParaRPr lang="en-US" sz="1150" dirty="0"/>
+          </a:p>
+        </p:txBody>
+      </p:sp>
+      <p:sp>
+        <p:nvSpPr>
+          <p:cNvPr id="15" name="Shape 13"/>
+          <p:cNvSpPr/>
+          <p:nvPr/>
+        </p:nvSpPr>
+        <p:spPr>
+          <a:xfrm>
+            <a:off x="640080" y="3657600"/>
+            <a:ext cx="10911535" cy="822960"/>
+          </a:xfrm>
+          <a:prstGeom prst="rect">
+            <a:avLst/>
+          </a:prstGeom>
+          <a:solidFill>
+            <a:srgbClr val="FFFFFF"/>
+          </a:solidFill>
+          <a:ln w="12700">
+            <a:solidFill>
+              <a:srgbClr val="DCDCDC"/>
+            </a:solidFill>
+            <a:prstDash val="solid"/>
+          </a:ln>
+        </p:spPr>
+      </p:sp>
+      <p:sp>
+        <p:nvSpPr>
+          <p:cNvPr id="16" name="Text 14"/>
+          <p:cNvSpPr/>
+          <p:nvPr/>
+        </p:nvSpPr>
+        <p:spPr>
+          <a:xfrm>
+            <a:off x="1097280" y="3749040"/>
+            <a:ext cx="3291840" cy="640080"/>
+          </a:xfrm>
+          <a:prstGeom prst="rect">
+            <a:avLst/>
+          </a:prstGeom>
+          <a:noFill/>
+          <a:ln/>
+        </p:spPr>
+        <p:txBody>
+          <a:bodyPr wrap="square" lIns="0" tIns="0" rIns="0" bIns="0" rtlCol="0" anchor="ctr"/>
+          <a:lstStyle/>
+          <a:p>
+            <a:pPr indent="0" marL="0">
+              <a:buNone/>
+            </a:pPr>
+            <a:r>
+              <a:rPr lang="en-US" sz="1450" dirty="0">
+                <a:solidFill>
+                  <a:srgbClr val="111111"/>
+                </a:solidFill>
+                <a:latin typeface="Pretendard SemiBold" pitchFamily="34" charset="0"/>
+                <a:ea typeface="Pretendard SemiBold" pitchFamily="34" charset="-122"/>
+                <a:cs typeface="Pretendard SemiBold" pitchFamily="34" charset="-120"/>
+              </a:rPr>
+              <a:t>결과 페이지</a:t>
+            </a:r>
+            <a:endParaRPr lang="en-US" sz="1450" dirty="0"/>
+          </a:p>
+        </p:txBody>
+      </p:sp>
+      <p:sp>
+        <p:nvSpPr>
+          <p:cNvPr id="17" name="Text 15"/>
+          <p:cNvSpPr/>
+          <p:nvPr/>
+        </p:nvSpPr>
+        <p:spPr>
+          <a:xfrm>
+            <a:off x="4480560" y="3749040"/>
+            <a:ext cx="6705295" cy="640080"/>
+          </a:xfrm>
+          <a:prstGeom prst="rect">
+            <a:avLst/>
+          </a:prstGeom>
+          <a:noFill/>
+          <a:ln/>
+        </p:spPr>
+        <p:txBody>
+          <a:bodyPr wrap="square" lIns="0" tIns="0" rIns="0" bIns="0" rtlCol="0" anchor="ctr"/>
+          <a:lstStyle/>
+          <a:p>
+            <a:pPr indent="0" marL="0">
+              <a:lnSpc>
+                <a:spcPct val="124000"/>
+              </a:lnSpc>
+              <a:buNone/>
+            </a:pPr>
+            <a:r>
+              <a:rPr lang="en-US" sz="1150" dirty="0">
+                <a:solidFill>
+                  <a:srgbClr val="6E6E6E"/>
+                </a:solidFill>
+                <a:latin typeface="Pretendard" pitchFamily="34" charset="0"/>
+                <a:ea typeface="Pretendard" pitchFamily="34" charset="-122"/>
+                <a:cs typeface="Pretendard" pitchFamily="34" charset="-120"/>
+              </a:rPr>
+              <a:t>대표 이미지 하나를 크게 두고 나머지를 묶습니다. 그리드를 지킵니다.</a:t>
+            </a:r>
+            <a:endParaRPr lang="en-US" sz="1150" dirty="0"/>
+          </a:p>
+        </p:txBody>
+      </p:sp>
+      <p:sp>
+        <p:nvSpPr>
+          <p:cNvPr id="18" name="Shape 16"/>
+          <p:cNvSpPr/>
+          <p:nvPr/>
+        </p:nvSpPr>
+        <p:spPr>
+          <a:xfrm>
+            <a:off x="640080" y="4626864"/>
+            <a:ext cx="10911535" cy="822960"/>
           </a:xfrm>
           <a:prstGeom prst="rect">
             <a:avLst/>
@@ -8750,78 +7747,14 @@
       </p:sp>
       <p:sp>
         <p:nvSpPr>
-          <p:cNvPr id="10" name="Shape 8"/>
-          <p:cNvSpPr/>
-          <p:nvPr/>
-        </p:nvSpPr>
-        <p:spPr>
-          <a:xfrm>
-            <a:off x="640080" y="1810512"/>
-            <a:ext cx="310896" cy="310896"/>
-          </a:xfrm>
-          <a:prstGeom prst="ellipse">
-            <a:avLst/>
-          </a:prstGeom>
-          <a:solidFill>
-            <a:srgbClr val="FFFFFF"/>
-          </a:solidFill>
-          <a:ln w="12700">
-            <a:solidFill>
-              <a:srgbClr val="111111"/>
-            </a:solidFill>
-            <a:prstDash val="solid"/>
-          </a:ln>
-        </p:spPr>
-      </p:sp>
-      <p:sp>
-        <p:nvSpPr>
-          <p:cNvPr id="11" name="Text 9"/>
-          <p:cNvSpPr/>
-          <p:nvPr/>
-        </p:nvSpPr>
-        <p:spPr>
-          <a:xfrm>
-            <a:off x="640080" y="1810512"/>
-            <a:ext cx="310896" cy="310896"/>
-          </a:xfrm>
-          <a:prstGeom prst="rect">
-            <a:avLst/>
-          </a:prstGeom>
-          <a:noFill/>
-          <a:ln/>
-        </p:spPr>
-        <p:txBody>
-          <a:bodyPr wrap="square" lIns="0" tIns="0" rIns="0" bIns="0" rtlCol="0" anchor="ctr"/>
-          <a:lstStyle/>
-          <a:p>
-            <a:pPr algn="ctr" indent="0" marL="0">
-              <a:buNone/>
-            </a:pPr>
-            <a:r>
-              <a:rPr lang="en-US" sz="1000" b="1" dirty="0">
-                <a:solidFill>
-                  <a:srgbClr val="111111"/>
-                </a:solidFill>
-                <a:latin typeface="Pretendard" pitchFamily="34" charset="0"/>
-                <a:ea typeface="Pretendard" pitchFamily="34" charset="-122"/>
-                <a:cs typeface="Pretendard" pitchFamily="34" charset="-120"/>
-              </a:rPr>
-              <a:t>1</a:t>
-            </a:r>
-            <a:endParaRPr lang="en-US" sz="1000" dirty="0"/>
-          </a:p>
-        </p:txBody>
-      </p:sp>
-      <p:sp>
-        <p:nvSpPr>
-          <p:cNvPr id="12" name="Text 10"/>
-          <p:cNvSpPr/>
-          <p:nvPr/>
-        </p:nvSpPr>
-        <p:spPr>
-          <a:xfrm>
-            <a:off x="1188720" y="1719072"/>
-            <a:ext cx="9875520" cy="310896"/>
+          <p:cNvPr id="19" name="Text 17"/>
+          <p:cNvSpPr/>
+          <p:nvPr/>
+        </p:nvSpPr>
+        <p:spPr>
+          <a:xfrm>
+            <a:off x="1097280" y="4718304"/>
+            <a:ext cx="3291840" cy="640080"/>
           </a:xfrm>
           <a:prstGeom prst="rect">
             <a:avLst/>
@@ -8839,13 +7772,13 @@
             <a:r>
               <a:rPr lang="en-US" sz="1450" dirty="0">
                 <a:solidFill>
-                  <a:srgbClr val="111111"/>
-                </a:solidFill>
-                <a:latin typeface="Pretendard Black" pitchFamily="34" charset="0"/>
-                <a:ea typeface="Pretendard Black" pitchFamily="34" charset="-122"/>
-                <a:cs typeface="Pretendard Black" pitchFamily="34" charset="-120"/>
-              </a:rPr>
-              <a:t>이미지 크기에 위계가 없다</a:t>
+                  <a:srgbClr val="FFFFFF"/>
+                </a:solidFill>
+                <a:latin typeface="Pretendard SemiBold" pitchFamily="34" charset="0"/>
+                <a:ea typeface="Pretendard SemiBold" pitchFamily="34" charset="-122"/>
+                <a:cs typeface="Pretendard SemiBold" pitchFamily="34" charset="-120"/>
+              </a:rPr>
+              <a:t>전체 훑기</a:t>
             </a:r>
             <a:endParaRPr lang="en-US" sz="1450" dirty="0"/>
           </a:p>
@@ -8853,14 +7786,14 @@
       </p:sp>
       <p:sp>
         <p:nvSpPr>
-          <p:cNvPr id="13" name="Text 11"/>
-          <p:cNvSpPr/>
-          <p:nvPr/>
-        </p:nvSpPr>
-        <p:spPr>
-          <a:xfrm>
-            <a:off x="1188720" y="2029968"/>
-            <a:ext cx="9875520" cy="292608"/>
+          <p:cNvPr id="20" name="Text 18"/>
+          <p:cNvSpPr/>
+          <p:nvPr/>
+        </p:nvSpPr>
+        <p:spPr>
+          <a:xfrm>
+            <a:off x="4480560" y="4718304"/>
+            <a:ext cx="6705295" cy="640080"/>
           </a:xfrm>
           <a:prstGeom prst="rect">
             <a:avLst/>
@@ -8873,32 +7806,35 @@
           <a:lstStyle/>
           <a:p>
             <a:pPr indent="0" marL="0">
-              <a:buNone/>
-            </a:pPr>
-            <a:r>
-              <a:rPr lang="en-US" sz="1100" dirty="0">
-                <a:solidFill>
-                  <a:srgbClr val="6E6E6E"/>
-                </a:solidFill>
-                <a:latin typeface="Pretendard" pitchFamily="34" charset="0"/>
-                <a:ea typeface="Pretendard" pitchFamily="34" charset="-122"/>
-                <a:cs typeface="Pretendard" pitchFamily="34" charset="-120"/>
-              </a:rPr>
-              <a:t>같은 크기 여러 장 대신, 대표 하나를 크게 나머지를 작게</a:t>
-            </a:r>
-            <a:endParaRPr lang="en-US" sz="1100" dirty="0"/>
-          </a:p>
-        </p:txBody>
-      </p:sp>
-      <p:sp>
-        <p:nvSpPr>
-          <p:cNvPr id="14" name="Shape 12"/>
-          <p:cNvSpPr/>
-          <p:nvPr/>
-        </p:nvSpPr>
-        <p:spPr>
-          <a:xfrm>
-            <a:off x="640080" y="2596896"/>
+              <a:lnSpc>
+                <a:spcPct val="124000"/>
+              </a:lnSpc>
+              <a:buNone/>
+            </a:pPr>
+            <a:r>
+              <a:rPr lang="en-US" sz="1150" dirty="0">
+                <a:solidFill>
+                  <a:srgbClr val="B8B8B8"/>
+                </a:solidFill>
+                <a:latin typeface="Pretendard" pitchFamily="34" charset="0"/>
+                <a:ea typeface="Pretendard" pitchFamily="34" charset="-122"/>
+                <a:cs typeface="Pretendard" pitchFamily="34" charset="-120"/>
+              </a:rPr>
+              <a:t>10주차분과 이어 붙여 6장을 연속으로 넘겨 봅니다. 한 벌로 보이는지 확인합니다.</a:t>
+            </a:r>
+            <a:endParaRPr lang="en-US" sz="1150" dirty="0"/>
+          </a:p>
+        </p:txBody>
+      </p:sp>
+      <p:sp>
+        <p:nvSpPr>
+          <p:cNvPr id="21" name="Shape 19"/>
+          <p:cNvSpPr/>
+          <p:nvPr/>
+        </p:nvSpPr>
+        <p:spPr>
+          <a:xfrm>
+            <a:off x="640080" y="6291072"/>
             <a:ext cx="10911535" cy="7315"/>
           </a:xfrm>
           <a:prstGeom prst="rect">
@@ -8917,575 +7853,7 @@
       </p:sp>
       <p:sp>
         <p:nvSpPr>
-          <p:cNvPr id="15" name="Shape 13"/>
-          <p:cNvSpPr/>
-          <p:nvPr/>
-        </p:nvSpPr>
-        <p:spPr>
-          <a:xfrm>
-            <a:off x="640080" y="2761488"/>
-            <a:ext cx="310896" cy="310896"/>
-          </a:xfrm>
-          <a:prstGeom prst="ellipse">
-            <a:avLst/>
-          </a:prstGeom>
-          <a:solidFill>
-            <a:srgbClr val="FFFFFF"/>
-          </a:solidFill>
-          <a:ln w="12700">
-            <a:solidFill>
-              <a:srgbClr val="111111"/>
-            </a:solidFill>
-            <a:prstDash val="solid"/>
-          </a:ln>
-        </p:spPr>
-      </p:sp>
-      <p:sp>
-        <p:nvSpPr>
-          <p:cNvPr id="16" name="Text 14"/>
-          <p:cNvSpPr/>
-          <p:nvPr/>
-        </p:nvSpPr>
-        <p:spPr>
-          <a:xfrm>
-            <a:off x="640080" y="2761488"/>
-            <a:ext cx="310896" cy="310896"/>
-          </a:xfrm>
-          <a:prstGeom prst="rect">
-            <a:avLst/>
-          </a:prstGeom>
-          <a:noFill/>
-          <a:ln/>
-        </p:spPr>
-        <p:txBody>
-          <a:bodyPr wrap="square" lIns="0" tIns="0" rIns="0" bIns="0" rtlCol="0" anchor="ctr"/>
-          <a:lstStyle/>
-          <a:p>
-            <a:pPr algn="ctr" indent="0" marL="0">
-              <a:buNone/>
-            </a:pPr>
-            <a:r>
-              <a:rPr lang="en-US" sz="1000" b="1" dirty="0">
-                <a:solidFill>
-                  <a:srgbClr val="111111"/>
-                </a:solidFill>
-                <a:latin typeface="Pretendard" pitchFamily="34" charset="0"/>
-                <a:ea typeface="Pretendard" pitchFamily="34" charset="-122"/>
-                <a:cs typeface="Pretendard" pitchFamily="34" charset="-120"/>
-              </a:rPr>
-              <a:t>2</a:t>
-            </a:r>
-            <a:endParaRPr lang="en-US" sz="1000" dirty="0"/>
-          </a:p>
-        </p:txBody>
-      </p:sp>
-      <p:sp>
-        <p:nvSpPr>
-          <p:cNvPr id="17" name="Text 15"/>
-          <p:cNvSpPr/>
-          <p:nvPr/>
-        </p:nvSpPr>
-        <p:spPr>
-          <a:xfrm>
-            <a:off x="1188720" y="2670048"/>
-            <a:ext cx="9875520" cy="310896"/>
-          </a:xfrm>
-          <a:prstGeom prst="rect">
-            <a:avLst/>
-          </a:prstGeom>
-          <a:noFill/>
-          <a:ln/>
-        </p:spPr>
-        <p:txBody>
-          <a:bodyPr wrap="square" lIns="0" tIns="0" rIns="0" bIns="0" rtlCol="0" anchor="ctr"/>
-          <a:lstStyle/>
-          <a:p>
-            <a:pPr indent="0" marL="0">
-              <a:buNone/>
-            </a:pPr>
-            <a:r>
-              <a:rPr lang="en-US" sz="1450" dirty="0">
-                <a:solidFill>
-                  <a:srgbClr val="111111"/>
-                </a:solidFill>
-                <a:latin typeface="Pretendard Black" pitchFamily="34" charset="0"/>
-                <a:ea typeface="Pretendard Black" pitchFamily="34" charset="-122"/>
-                <a:cs typeface="Pretendard Black" pitchFamily="34" charset="-120"/>
-              </a:rPr>
-              <a:t>글과 이미지가 서로 안 맞물린다</a:t>
-            </a:r>
-            <a:endParaRPr lang="en-US" sz="1450" dirty="0"/>
-          </a:p>
-        </p:txBody>
-      </p:sp>
-      <p:sp>
-        <p:nvSpPr>
-          <p:cNvPr id="18" name="Text 16"/>
-          <p:cNvSpPr/>
-          <p:nvPr/>
-        </p:nvSpPr>
-        <p:spPr>
-          <a:xfrm>
-            <a:off x="1188720" y="2980944"/>
-            <a:ext cx="9875520" cy="292608"/>
-          </a:xfrm>
-          <a:prstGeom prst="rect">
-            <a:avLst/>
-          </a:prstGeom>
-          <a:noFill/>
-          <a:ln/>
-        </p:spPr>
-        <p:txBody>
-          <a:bodyPr wrap="square" lIns="0" tIns="0" rIns="0" bIns="0" rtlCol="0" anchor="ctr"/>
-          <a:lstStyle/>
-          <a:p>
-            <a:pPr indent="0" marL="0">
-              <a:buNone/>
-            </a:pPr>
-            <a:r>
-              <a:rPr lang="en-US" sz="1100" dirty="0">
-                <a:solidFill>
-                  <a:srgbClr val="6E6E6E"/>
-                </a:solidFill>
-                <a:latin typeface="Pretendard" pitchFamily="34" charset="0"/>
-                <a:ea typeface="Pretendard" pitchFamily="34" charset="-122"/>
-                <a:cs typeface="Pretendard" pitchFamily="34" charset="-120"/>
-              </a:rPr>
-              <a:t>캡션은 설명하는 이미지에 붙이고, 본문은 관련 이미지와 같은 단에</a:t>
-            </a:r>
-            <a:endParaRPr lang="en-US" sz="1100" dirty="0"/>
-          </a:p>
-        </p:txBody>
-      </p:sp>
-      <p:sp>
-        <p:nvSpPr>
-          <p:cNvPr id="19" name="Shape 17"/>
-          <p:cNvSpPr/>
-          <p:nvPr/>
-        </p:nvSpPr>
-        <p:spPr>
-          <a:xfrm>
-            <a:off x="640080" y="3547872"/>
-            <a:ext cx="10911535" cy="7315"/>
-          </a:xfrm>
-          <a:prstGeom prst="rect">
-            <a:avLst/>
-          </a:prstGeom>
-          <a:solidFill>
-            <a:srgbClr val="DCDCDC"/>
-          </a:solidFill>
-          <a:ln w="12700">
-            <a:solidFill>
-              <a:srgbClr val="DCDCDC"/>
-            </a:solidFill>
-            <a:prstDash val="solid"/>
-          </a:ln>
-        </p:spPr>
-      </p:sp>
-      <p:sp>
-        <p:nvSpPr>
-          <p:cNvPr id="20" name="Shape 18"/>
-          <p:cNvSpPr/>
-          <p:nvPr/>
-        </p:nvSpPr>
-        <p:spPr>
-          <a:xfrm>
-            <a:off x="640080" y="3712464"/>
-            <a:ext cx="310896" cy="310896"/>
-          </a:xfrm>
-          <a:prstGeom prst="ellipse">
-            <a:avLst/>
-          </a:prstGeom>
-          <a:solidFill>
-            <a:srgbClr val="FFFFFF"/>
-          </a:solidFill>
-          <a:ln w="12700">
-            <a:solidFill>
-              <a:srgbClr val="111111"/>
-            </a:solidFill>
-            <a:prstDash val="solid"/>
-          </a:ln>
-        </p:spPr>
-      </p:sp>
-      <p:sp>
-        <p:nvSpPr>
-          <p:cNvPr id="21" name="Text 19"/>
-          <p:cNvSpPr/>
-          <p:nvPr/>
-        </p:nvSpPr>
-        <p:spPr>
-          <a:xfrm>
-            <a:off x="640080" y="3712464"/>
-            <a:ext cx="310896" cy="310896"/>
-          </a:xfrm>
-          <a:prstGeom prst="rect">
-            <a:avLst/>
-          </a:prstGeom>
-          <a:noFill/>
-          <a:ln/>
-        </p:spPr>
-        <p:txBody>
-          <a:bodyPr wrap="square" lIns="0" tIns="0" rIns="0" bIns="0" rtlCol="0" anchor="ctr"/>
-          <a:lstStyle/>
-          <a:p>
-            <a:pPr algn="ctr" indent="0" marL="0">
-              <a:buNone/>
-            </a:pPr>
-            <a:r>
-              <a:rPr lang="en-US" sz="1000" b="1" dirty="0">
-                <a:solidFill>
-                  <a:srgbClr val="111111"/>
-                </a:solidFill>
-                <a:latin typeface="Pretendard" pitchFamily="34" charset="0"/>
-                <a:ea typeface="Pretendard" pitchFamily="34" charset="-122"/>
-                <a:cs typeface="Pretendard" pitchFamily="34" charset="-120"/>
-              </a:rPr>
-              <a:t>3</a:t>
-            </a:r>
-            <a:endParaRPr lang="en-US" sz="1000" dirty="0"/>
-          </a:p>
-        </p:txBody>
-      </p:sp>
-      <p:sp>
-        <p:nvSpPr>
           <p:cNvPr id="22" name="Text 20"/>
-          <p:cNvSpPr/>
-          <p:nvPr/>
-        </p:nvSpPr>
-        <p:spPr>
-          <a:xfrm>
-            <a:off x="1188720" y="3621024"/>
-            <a:ext cx="9875520" cy="310896"/>
-          </a:xfrm>
-          <a:prstGeom prst="rect">
-            <a:avLst/>
-          </a:prstGeom>
-          <a:noFill/>
-          <a:ln/>
-        </p:spPr>
-        <p:txBody>
-          <a:bodyPr wrap="square" lIns="0" tIns="0" rIns="0" bIns="0" rtlCol="0" anchor="ctr"/>
-          <a:lstStyle/>
-          <a:p>
-            <a:pPr indent="0" marL="0">
-              <a:buNone/>
-            </a:pPr>
-            <a:r>
-              <a:rPr lang="en-US" sz="1450" dirty="0">
-                <a:solidFill>
-                  <a:srgbClr val="111111"/>
-                </a:solidFill>
-                <a:latin typeface="Pretendard Black" pitchFamily="34" charset="0"/>
-                <a:ea typeface="Pretendard Black" pitchFamily="34" charset="-122"/>
-                <a:cs typeface="Pretendard Black" pitchFamily="34" charset="-120"/>
-              </a:rPr>
-              <a:t>정렬 기준이 섞여 있다</a:t>
-            </a:r>
-            <a:endParaRPr lang="en-US" sz="1450" dirty="0"/>
-          </a:p>
-        </p:txBody>
-      </p:sp>
-      <p:sp>
-        <p:nvSpPr>
-          <p:cNvPr id="23" name="Text 21"/>
-          <p:cNvSpPr/>
-          <p:nvPr/>
-        </p:nvSpPr>
-        <p:spPr>
-          <a:xfrm>
-            <a:off x="1188720" y="3931920"/>
-            <a:ext cx="9875520" cy="292608"/>
-          </a:xfrm>
-          <a:prstGeom prst="rect">
-            <a:avLst/>
-          </a:prstGeom>
-          <a:noFill/>
-          <a:ln/>
-        </p:spPr>
-        <p:txBody>
-          <a:bodyPr wrap="square" lIns="0" tIns="0" rIns="0" bIns="0" rtlCol="0" anchor="ctr"/>
-          <a:lstStyle/>
-          <a:p>
-            <a:pPr indent="0" marL="0">
-              <a:buNone/>
-            </a:pPr>
-            <a:r>
-              <a:rPr lang="en-US" sz="1100" dirty="0">
-                <a:solidFill>
-                  <a:srgbClr val="6E6E6E"/>
-                </a:solidFill>
-                <a:latin typeface="Pretendard" pitchFamily="34" charset="0"/>
-                <a:ea typeface="Pretendard" pitchFamily="34" charset="-122"/>
-                <a:cs typeface="Pretendard" pitchFamily="34" charset="-120"/>
-              </a:rPr>
-              <a:t>왼쪽 정렬과 가운데 정렬이 한 지면에 섞이면 산만합니다. 하나로 통일</a:t>
-            </a:r>
-            <a:endParaRPr lang="en-US" sz="1100" dirty="0"/>
-          </a:p>
-        </p:txBody>
-      </p:sp>
-      <p:sp>
-        <p:nvSpPr>
-          <p:cNvPr id="24" name="Shape 22"/>
-          <p:cNvSpPr/>
-          <p:nvPr/>
-        </p:nvSpPr>
-        <p:spPr>
-          <a:xfrm>
-            <a:off x="640080" y="4498848"/>
-            <a:ext cx="10911535" cy="7315"/>
-          </a:xfrm>
-          <a:prstGeom prst="rect">
-            <a:avLst/>
-          </a:prstGeom>
-          <a:solidFill>
-            <a:srgbClr val="DCDCDC"/>
-          </a:solidFill>
-          <a:ln w="12700">
-            <a:solidFill>
-              <a:srgbClr val="DCDCDC"/>
-            </a:solidFill>
-            <a:prstDash val="solid"/>
-          </a:ln>
-        </p:spPr>
-      </p:sp>
-      <p:sp>
-        <p:nvSpPr>
-          <p:cNvPr id="25" name="Shape 23"/>
-          <p:cNvSpPr/>
-          <p:nvPr/>
-        </p:nvSpPr>
-        <p:spPr>
-          <a:xfrm>
-            <a:off x="640080" y="4663440"/>
-            <a:ext cx="310896" cy="310896"/>
-          </a:xfrm>
-          <a:prstGeom prst="ellipse">
-            <a:avLst/>
-          </a:prstGeom>
-          <a:solidFill>
-            <a:srgbClr val="FFFFFF"/>
-          </a:solidFill>
-          <a:ln w="12700">
-            <a:solidFill>
-              <a:srgbClr val="111111"/>
-            </a:solidFill>
-            <a:prstDash val="solid"/>
-          </a:ln>
-        </p:spPr>
-      </p:sp>
-      <p:sp>
-        <p:nvSpPr>
-          <p:cNvPr id="26" name="Text 24"/>
-          <p:cNvSpPr/>
-          <p:nvPr/>
-        </p:nvSpPr>
-        <p:spPr>
-          <a:xfrm>
-            <a:off x="640080" y="4663440"/>
-            <a:ext cx="310896" cy="310896"/>
-          </a:xfrm>
-          <a:prstGeom prst="rect">
-            <a:avLst/>
-          </a:prstGeom>
-          <a:noFill/>
-          <a:ln/>
-        </p:spPr>
-        <p:txBody>
-          <a:bodyPr wrap="square" lIns="0" tIns="0" rIns="0" bIns="0" rtlCol="0" anchor="ctr"/>
-          <a:lstStyle/>
-          <a:p>
-            <a:pPr algn="ctr" indent="0" marL="0">
-              <a:buNone/>
-            </a:pPr>
-            <a:r>
-              <a:rPr lang="en-US" sz="1000" b="1" dirty="0">
-                <a:solidFill>
-                  <a:srgbClr val="111111"/>
-                </a:solidFill>
-                <a:latin typeface="Pretendard" pitchFamily="34" charset="0"/>
-                <a:ea typeface="Pretendard" pitchFamily="34" charset="-122"/>
-                <a:cs typeface="Pretendard" pitchFamily="34" charset="-120"/>
-              </a:rPr>
-              <a:t>4</a:t>
-            </a:r>
-            <a:endParaRPr lang="en-US" sz="1000" dirty="0"/>
-          </a:p>
-        </p:txBody>
-      </p:sp>
-      <p:sp>
-        <p:nvSpPr>
-          <p:cNvPr id="27" name="Text 25"/>
-          <p:cNvSpPr/>
-          <p:nvPr/>
-        </p:nvSpPr>
-        <p:spPr>
-          <a:xfrm>
-            <a:off x="1188720" y="4572000"/>
-            <a:ext cx="9875520" cy="310896"/>
-          </a:xfrm>
-          <a:prstGeom prst="rect">
-            <a:avLst/>
-          </a:prstGeom>
-          <a:noFill/>
-          <a:ln/>
-        </p:spPr>
-        <p:txBody>
-          <a:bodyPr wrap="square" lIns="0" tIns="0" rIns="0" bIns="0" rtlCol="0" anchor="ctr"/>
-          <a:lstStyle/>
-          <a:p>
-            <a:pPr indent="0" marL="0">
-              <a:buNone/>
-            </a:pPr>
-            <a:r>
-              <a:rPr lang="en-US" sz="1450" dirty="0">
-                <a:solidFill>
-                  <a:srgbClr val="111111"/>
-                </a:solidFill>
-                <a:latin typeface="Pretendard Black" pitchFamily="34" charset="0"/>
-                <a:ea typeface="Pretendard Black" pitchFamily="34" charset="-122"/>
-                <a:cs typeface="Pretendard Black" pitchFamily="34" charset="-120"/>
-              </a:rPr>
-              <a:t>여백이 한쪽에 몰려 있다</a:t>
-            </a:r>
-            <a:endParaRPr lang="en-US" sz="1450" dirty="0"/>
-          </a:p>
-        </p:txBody>
-      </p:sp>
-      <p:sp>
-        <p:nvSpPr>
-          <p:cNvPr id="28" name="Text 26"/>
-          <p:cNvSpPr/>
-          <p:nvPr/>
-        </p:nvSpPr>
-        <p:spPr>
-          <a:xfrm>
-            <a:off x="1188720" y="4882896"/>
-            <a:ext cx="9875520" cy="292608"/>
-          </a:xfrm>
-          <a:prstGeom prst="rect">
-            <a:avLst/>
-          </a:prstGeom>
-          <a:noFill/>
-          <a:ln/>
-        </p:spPr>
-        <p:txBody>
-          <a:bodyPr wrap="square" lIns="0" tIns="0" rIns="0" bIns="0" rtlCol="0" anchor="ctr"/>
-          <a:lstStyle/>
-          <a:p>
-            <a:pPr indent="0" marL="0">
-              <a:buNone/>
-            </a:pPr>
-            <a:r>
-              <a:rPr lang="en-US" sz="1100" dirty="0">
-                <a:solidFill>
-                  <a:srgbClr val="6E6E6E"/>
-                </a:solidFill>
-                <a:latin typeface="Pretendard" pitchFamily="34" charset="0"/>
-                <a:ea typeface="Pretendard" pitchFamily="34" charset="-122"/>
-                <a:cs typeface="Pretendard" pitchFamily="34" charset="-120"/>
-              </a:rPr>
-              <a:t>요소를 옮기기 전에 그리드에 다시 맞춰 보세요. 대개 그리드를 벗어난 상태입니다</a:t>
-            </a:r>
-            <a:endParaRPr lang="en-US" sz="1100" dirty="0"/>
-          </a:p>
-        </p:txBody>
-      </p:sp>
-      <p:sp>
-        <p:nvSpPr>
-          <p:cNvPr id="29" name="Shape 27"/>
-          <p:cNvSpPr/>
-          <p:nvPr/>
-        </p:nvSpPr>
-        <p:spPr>
-          <a:xfrm>
-            <a:off x="640080" y="5522976"/>
-            <a:ext cx="10911535" cy="7315"/>
-          </a:xfrm>
-          <a:prstGeom prst="rect">
-            <a:avLst/>
-          </a:prstGeom>
-          <a:solidFill>
-            <a:srgbClr val="111111"/>
-          </a:solidFill>
-          <a:ln w="12700">
-            <a:solidFill>
-              <a:srgbClr val="111111"/>
-            </a:solidFill>
-            <a:prstDash val="solid"/>
-          </a:ln>
-        </p:spPr>
-      </p:sp>
-      <p:sp>
-        <p:nvSpPr>
-          <p:cNvPr id="30" name="Text 28"/>
-          <p:cNvSpPr/>
-          <p:nvPr/>
-        </p:nvSpPr>
-        <p:spPr>
-          <a:xfrm>
-            <a:off x="640080" y="5632704"/>
-            <a:ext cx="10911535" cy="402336"/>
-          </a:xfrm>
-          <a:prstGeom prst="rect">
-            <a:avLst/>
-          </a:prstGeom>
-          <a:noFill/>
-          <a:ln/>
-        </p:spPr>
-        <p:txBody>
-          <a:bodyPr wrap="square" lIns="0" tIns="0" rIns="0" bIns="0" rtlCol="0" anchor="t"/>
-          <a:lstStyle/>
-          <a:p>
-            <a:pPr indent="0" marL="0">
-              <a:lnSpc>
-                <a:spcPct val="120000"/>
-              </a:lnSpc>
-              <a:buNone/>
-            </a:pPr>
-            <a:r>
-              <a:rPr lang="en-US" sz="1250" b="1" dirty="0">
-                <a:solidFill>
-                  <a:srgbClr val="111111"/>
-                </a:solidFill>
-                <a:latin typeface="Pretendard" pitchFamily="34" charset="0"/>
-                <a:ea typeface="Pretendard" pitchFamily="34" charset="-122"/>
-                <a:cs typeface="Pretendard" pitchFamily="34" charset="-120"/>
-              </a:rPr>
-              <a:t>지면이 어색한데 이유를 모르겠다면 넷을 순서대로 확인하세요.</a:t>
-            </a:r>
-            <a:endParaRPr lang="en-US" sz="1250" dirty="0"/>
-          </a:p>
-        </p:txBody>
-      </p:sp>
-      <p:sp>
-        <p:nvSpPr>
-          <p:cNvPr id="31" name="Shape 29"/>
-          <p:cNvSpPr/>
-          <p:nvPr/>
-        </p:nvSpPr>
-        <p:spPr>
-          <a:xfrm>
-            <a:off x="640080" y="6291072"/>
-            <a:ext cx="10911535" cy="7315"/>
-          </a:xfrm>
-          <a:prstGeom prst="rect">
-            <a:avLst/>
-          </a:prstGeom>
-          <a:solidFill>
-            <a:srgbClr val="DCDCDC"/>
-          </a:solidFill>
-          <a:ln w="12700">
-            <a:solidFill>
-              <a:srgbClr val="DCDCDC"/>
-            </a:solidFill>
-            <a:prstDash val="solid"/>
-          </a:ln>
-        </p:spPr>
-      </p:sp>
-      <p:sp>
-        <p:nvSpPr>
-          <p:cNvPr id="32" name="Text 30"/>
           <p:cNvSpPr/>
           <p:nvPr/>
         </p:nvSpPr>
@@ -9524,7 +7892,7 @@
       </p:sp>
       <p:sp>
         <p:nvSpPr>
-          <p:cNvPr id="33" name="Text 31"/>
+          <p:cNvPr id="23" name="Text 21"/>
           <p:cNvSpPr/>
           <p:nvPr/>
         </p:nvSpPr>
@@ -9768,7 +8136,7 @@
                 <a:ea typeface="Pretendard" pitchFamily="34" charset="-122"/>
                 <a:cs typeface="Pretendard" pitchFamily="34" charset="-120"/>
               </a:rPr>
-              <a:t>WORKSHOP</a:t>
+              <a:t>HOMEWORK</a:t>
             </a:r>
             <a:endParaRPr lang="en-US" sz="950" dirty="0"/>
           </a:p>
@@ -9803,11 +8171,11 @@
                 <a:solidFill>
                   <a:srgbClr val="111111"/>
                 </a:solidFill>
-                <a:latin typeface="Pretendard Black" pitchFamily="34" charset="0"/>
-                <a:ea typeface="Pretendard Black" pitchFamily="34" charset="-122"/>
-                <a:cs typeface="Pretendard Black" pitchFamily="34" charset="-120"/>
-              </a:rPr>
-              <a:t>실습 · 보정과 배치</a:t>
+                <a:latin typeface="Pretendard SemiBold" pitchFamily="34" charset="0"/>
+                <a:ea typeface="Pretendard SemiBold" pitchFamily="34" charset="-122"/>
+                <a:cs typeface="Pretendard SemiBold" pitchFamily="34" charset="-120"/>
+              </a:rPr>
+              <a:t>과제와 다음 주</a:t>
             </a:r>
             <a:endParaRPr lang="en-US" sz="3000" dirty="0"/>
           </a:p>
@@ -9846,7 +8214,7 @@
                 <a:ea typeface="Pretendard" pitchFamily="34" charset="-122"/>
                 <a:cs typeface="Pretendard" pitchFamily="34" charset="-120"/>
               </a:rPr>
-              <a:t>80분 · 개인 — 이미지 정리부터 시작합니다. 중간에 휴식이 한 번 들어갑니다.</a:t>
+              <a:t>12주차는 온라인 포트폴리오를 만듭니다.</a:t>
             </a:r>
             <a:endParaRPr lang="en-US" sz="1150" dirty="0"/>
           </a:p>
@@ -9861,7 +8229,7 @@
         <p:spPr>
           <a:xfrm>
             <a:off x="640080" y="1719072"/>
-            <a:ext cx="10911535" cy="822960"/>
+            <a:ext cx="6309360" cy="896112"/>
           </a:xfrm>
           <a:prstGeom prst="rect">
             <a:avLst/>
@@ -9879,14 +8247,78 @@
       </p:sp>
       <p:sp>
         <p:nvSpPr>
-          <p:cNvPr id="10" name="Text 8"/>
-          <p:cNvSpPr/>
-          <p:nvPr/>
-        </p:nvSpPr>
-        <p:spPr>
-          <a:xfrm>
-            <a:off x="1005840" y="1810512"/>
-            <a:ext cx="1188720" cy="640080"/>
+          <p:cNvPr id="10" name="Shape 8"/>
+          <p:cNvSpPr/>
+          <p:nvPr/>
+        </p:nvSpPr>
+        <p:spPr>
+          <a:xfrm>
+            <a:off x="969264" y="1993392"/>
+            <a:ext cx="329184" cy="329184"/>
+          </a:xfrm>
+          <a:prstGeom prst="ellipse">
+            <a:avLst/>
+          </a:prstGeom>
+          <a:solidFill>
+            <a:srgbClr val="111111"/>
+          </a:solidFill>
+          <a:ln w="12700">
+            <a:solidFill>
+              <a:srgbClr val="111111"/>
+            </a:solidFill>
+            <a:prstDash val="solid"/>
+          </a:ln>
+        </p:spPr>
+      </p:sp>
+      <p:sp>
+        <p:nvSpPr>
+          <p:cNvPr id="11" name="Text 9"/>
+          <p:cNvSpPr/>
+          <p:nvPr/>
+        </p:nvSpPr>
+        <p:spPr>
+          <a:xfrm>
+            <a:off x="969264" y="1993392"/>
+            <a:ext cx="329184" cy="329184"/>
+          </a:xfrm>
+          <a:prstGeom prst="rect">
+            <a:avLst/>
+          </a:prstGeom>
+          <a:noFill/>
+          <a:ln/>
+        </p:spPr>
+        <p:txBody>
+          <a:bodyPr wrap="square" lIns="0" tIns="0" rIns="0" bIns="0" rtlCol="0" anchor="ctr"/>
+          <a:lstStyle/>
+          <a:p>
+            <a:pPr algn="ctr" indent="0" marL="0">
+              <a:buNone/>
+            </a:pPr>
+            <a:r>
+              <a:rPr lang="en-US" sz="1100" b="1" dirty="0">
+                <a:solidFill>
+                  <a:srgbClr val="FFFFFF"/>
+                </a:solidFill>
+                <a:latin typeface="Pretendard" pitchFamily="34" charset="0"/>
+                <a:ea typeface="Pretendard" pitchFamily="34" charset="-122"/>
+                <a:cs typeface="Pretendard" pitchFamily="34" charset="-120"/>
+              </a:rPr>
+              <a:t>1</a:t>
+            </a:r>
+            <a:endParaRPr lang="en-US" sz="1100" dirty="0"/>
+          </a:p>
+        </p:txBody>
+      </p:sp>
+      <p:sp>
+        <p:nvSpPr>
+          <p:cNvPr id="12" name="Text 10"/>
+          <p:cNvSpPr/>
+          <p:nvPr/>
+        </p:nvSpPr>
+        <p:spPr>
+          <a:xfrm>
+            <a:off x="1426464" y="1810512"/>
+            <a:ext cx="5175504" cy="329184"/>
           </a:xfrm>
           <a:prstGeom prst="rect">
             <a:avLst/>
@@ -9902,88 +8334,49 @@
               <a:buNone/>
             </a:pPr>
             <a:r>
-              <a:rPr lang="en-US" sz="2200" dirty="0">
+              <a:rPr lang="en-US" sz="1400" dirty="0">
                 <a:solidFill>
                   <a:srgbClr val="111111"/>
                 </a:solidFill>
-                <a:latin typeface="Pretendard Light" pitchFamily="34" charset="0"/>
-                <a:ea typeface="Pretendard Light" pitchFamily="34" charset="-122"/>
-                <a:cs typeface="Pretendard Light" pitchFamily="34" charset="-120"/>
-              </a:rPr>
-              <a:t>12분</a:t>
-            </a:r>
-            <a:endParaRPr lang="en-US" sz="2200" dirty="0"/>
-          </a:p>
-        </p:txBody>
-      </p:sp>
-      <p:sp>
-        <p:nvSpPr>
-          <p:cNvPr id="11" name="Text 9"/>
-          <p:cNvSpPr/>
-          <p:nvPr/>
-        </p:nvSpPr>
-        <p:spPr>
-          <a:xfrm>
-            <a:off x="2286000" y="1810512"/>
-            <a:ext cx="3291840" cy="640080"/>
-          </a:xfrm>
-          <a:prstGeom prst="rect">
-            <a:avLst/>
-          </a:prstGeom>
-          <a:noFill/>
-          <a:ln/>
-        </p:spPr>
-        <p:txBody>
-          <a:bodyPr wrap="square" lIns="0" tIns="0" rIns="0" bIns="0" rtlCol="0" anchor="ctr"/>
-          <a:lstStyle/>
-          <a:p>
-            <a:pPr indent="0" marL="0">
-              <a:buNone/>
-            </a:pPr>
-            <a:r>
-              <a:rPr lang="en-US" sz="1450" dirty="0">
-                <a:solidFill>
-                  <a:srgbClr val="111111"/>
-                </a:solidFill>
-                <a:latin typeface="Pretendard Black" pitchFamily="34" charset="0"/>
-                <a:ea typeface="Pretendard Black" pitchFamily="34" charset="-122"/>
-                <a:cs typeface="Pretendard Black" pitchFamily="34" charset="-120"/>
-              </a:rPr>
-              <a:t>이미지 점검</a:t>
-            </a:r>
-            <a:endParaRPr lang="en-US" sz="1450" dirty="0"/>
-          </a:p>
-        </p:txBody>
-      </p:sp>
-      <p:sp>
-        <p:nvSpPr>
-          <p:cNvPr id="12" name="Text 10"/>
-          <p:cNvSpPr/>
-          <p:nvPr/>
-        </p:nvSpPr>
-        <p:spPr>
-          <a:xfrm>
-            <a:off x="5669280" y="1810512"/>
-            <a:ext cx="5516575" cy="640080"/>
-          </a:xfrm>
-          <a:prstGeom prst="rect">
-            <a:avLst/>
-          </a:prstGeom>
-          <a:noFill/>
-          <a:ln/>
-        </p:spPr>
-        <p:txBody>
-          <a:bodyPr wrap="square" lIns="0" tIns="0" rIns="0" bIns="0" rtlCol="0" anchor="ctr"/>
+                <a:latin typeface="Pretendard SemiBold" pitchFamily="34" charset="0"/>
+                <a:ea typeface="Pretendard SemiBold" pitchFamily="34" charset="-122"/>
+                <a:cs typeface="Pretendard SemiBold" pitchFamily="34" charset="-120"/>
+              </a:rPr>
+              <a:t>포트폴리오 페이지 3장 추가</a:t>
+            </a:r>
+            <a:endParaRPr lang="en-US" sz="1400" dirty="0"/>
+          </a:p>
+        </p:txBody>
+      </p:sp>
+      <p:sp>
+        <p:nvSpPr>
+          <p:cNvPr id="13" name="Text 11"/>
+          <p:cNvSpPr/>
+          <p:nvPr/>
+        </p:nvSpPr>
+        <p:spPr>
+          <a:xfrm>
+            <a:off x="1426464" y="2121408"/>
+            <a:ext cx="5175504" cy="420624"/>
+          </a:xfrm>
+          <a:prstGeom prst="rect">
+            <a:avLst/>
+          </a:prstGeom>
+          <a:noFill/>
+          <a:ln/>
+        </p:spPr>
+        <p:txBody>
+          <a:bodyPr wrap="square" lIns="0" tIns="0" rIns="0" bIns="0" rtlCol="0" anchor="t"/>
           <a:lstStyle/>
           <a:p>
             <a:pPr indent="0" marL="0">
               <a:lnSpc>
-                <a:spcPct val="124000"/>
+                <a:spcPct val="122000"/>
               </a:lnSpc>
               <a:buNone/>
             </a:pPr>
             <a:r>
-              <a:rPr lang="en-US" sz="1150" dirty="0">
+              <a:rPr lang="en-US" sz="1100" dirty="0">
                 <a:solidFill>
                   <a:srgbClr val="6E6E6E"/>
                 </a:solidFill>
@@ -9991,22 +8384,22 @@
                 <a:ea typeface="Pretendard" pitchFamily="34" charset="-122"/>
                 <a:cs typeface="Pretendard" pitchFamily="34" charset="-120"/>
               </a:rPr>
-              <a:t>쓸 이미지를 전부 늘어놓고 해상도와 톤을 확인합니다. 못 쓸 것을 먼저 걸러냅니다.</a:t>
-            </a:r>
-            <a:endParaRPr lang="en-US" sz="1150" dirty="0"/>
-          </a:p>
-        </p:txBody>
-      </p:sp>
-      <p:sp>
-        <p:nvSpPr>
-          <p:cNvPr id="13" name="Shape 11"/>
-          <p:cNvSpPr/>
-          <p:nvPr/>
-        </p:nvSpPr>
-        <p:spPr>
-          <a:xfrm>
-            <a:off x="640080" y="2688336"/>
-            <a:ext cx="10911535" cy="822960"/>
+              <a:t>결과 페이지와 나머지 프로젝트 페이지를 만듭니다. 10주차분과 합쳐 총 6장이 됩니다.</a:t>
+            </a:r>
+            <a:endParaRPr lang="en-US" sz="1100" dirty="0"/>
+          </a:p>
+        </p:txBody>
+      </p:sp>
+      <p:sp>
+        <p:nvSpPr>
+          <p:cNvPr id="14" name="Shape 12"/>
+          <p:cNvSpPr/>
+          <p:nvPr/>
+        </p:nvSpPr>
+        <p:spPr>
+          <a:xfrm>
+            <a:off x="640080" y="2743200"/>
+            <a:ext cx="6309360" cy="896112"/>
           </a:xfrm>
           <a:prstGeom prst="rect">
             <a:avLst/>
@@ -10024,281 +8417,16 @@
       </p:sp>
       <p:sp>
         <p:nvSpPr>
-          <p:cNvPr id="14" name="Text 12"/>
-          <p:cNvSpPr/>
-          <p:nvPr/>
-        </p:nvSpPr>
-        <p:spPr>
-          <a:xfrm>
-            <a:off x="1005840" y="2779776"/>
-            <a:ext cx="1188720" cy="640080"/>
-          </a:xfrm>
-          <a:prstGeom prst="rect">
-            <a:avLst/>
-          </a:prstGeom>
-          <a:noFill/>
-          <a:ln/>
-        </p:spPr>
-        <p:txBody>
-          <a:bodyPr wrap="square" lIns="0" tIns="0" rIns="0" bIns="0" rtlCol="0" anchor="ctr"/>
-          <a:lstStyle/>
-          <a:p>
-            <a:pPr indent="0" marL="0">
-              <a:buNone/>
-            </a:pPr>
-            <a:r>
-              <a:rPr lang="en-US" sz="2200" dirty="0">
-                <a:solidFill>
-                  <a:srgbClr val="111111"/>
-                </a:solidFill>
-                <a:latin typeface="Pretendard Light" pitchFamily="34" charset="0"/>
-                <a:ea typeface="Pretendard Light" pitchFamily="34" charset="-122"/>
-                <a:cs typeface="Pretendard Light" pitchFamily="34" charset="-120"/>
-              </a:rPr>
-              <a:t>26분</a:t>
-            </a:r>
-            <a:endParaRPr lang="en-US" sz="2200" dirty="0"/>
-          </a:p>
-        </p:txBody>
-      </p:sp>
-      <p:sp>
-        <p:nvSpPr>
-          <p:cNvPr id="15" name="Text 13"/>
-          <p:cNvSpPr/>
-          <p:nvPr/>
-        </p:nvSpPr>
-        <p:spPr>
-          <a:xfrm>
-            <a:off x="2286000" y="2779776"/>
-            <a:ext cx="3291840" cy="640080"/>
-          </a:xfrm>
-          <a:prstGeom prst="rect">
-            <a:avLst/>
-          </a:prstGeom>
-          <a:noFill/>
-          <a:ln/>
-        </p:spPr>
-        <p:txBody>
-          <a:bodyPr wrap="square" lIns="0" tIns="0" rIns="0" bIns="0" rtlCol="0" anchor="ctr"/>
-          <a:lstStyle/>
-          <a:p>
-            <a:pPr indent="0" marL="0">
-              <a:buNone/>
-            </a:pPr>
-            <a:r>
-              <a:rPr lang="en-US" sz="1450" dirty="0">
-                <a:solidFill>
-                  <a:srgbClr val="111111"/>
-                </a:solidFill>
-                <a:latin typeface="Pretendard Black" pitchFamily="34" charset="0"/>
-                <a:ea typeface="Pretendard Black" pitchFamily="34" charset="-122"/>
-                <a:cs typeface="Pretendard Black" pitchFamily="34" charset="-120"/>
-              </a:rPr>
-              <a:t>톤 통일</a:t>
-            </a:r>
-            <a:endParaRPr lang="en-US" sz="1450" dirty="0"/>
-          </a:p>
-        </p:txBody>
-      </p:sp>
-      <p:sp>
-        <p:nvSpPr>
-          <p:cNvPr id="16" name="Text 14"/>
-          <p:cNvSpPr/>
-          <p:nvPr/>
-        </p:nvSpPr>
-        <p:spPr>
-          <a:xfrm>
-            <a:off x="5669280" y="2779776"/>
-            <a:ext cx="5516575" cy="640080"/>
-          </a:xfrm>
-          <a:prstGeom prst="rect">
-            <a:avLst/>
-          </a:prstGeom>
-          <a:noFill/>
-          <a:ln/>
-        </p:spPr>
-        <p:txBody>
-          <a:bodyPr wrap="square" lIns="0" tIns="0" rIns="0" bIns="0" rtlCol="0" anchor="ctr"/>
-          <a:lstStyle/>
-          <a:p>
-            <a:pPr indent="0" marL="0">
-              <a:lnSpc>
-                <a:spcPct val="124000"/>
-              </a:lnSpc>
-              <a:buNone/>
-            </a:pPr>
-            <a:r>
-              <a:rPr lang="en-US" sz="1150" dirty="0">
-                <a:solidFill>
-                  <a:srgbClr val="6E6E6E"/>
-                </a:solidFill>
-                <a:latin typeface="Pretendard" pitchFamily="34" charset="0"/>
-                <a:ea typeface="Pretendard" pitchFamily="34" charset="-122"/>
-                <a:cs typeface="Pretendard" pitchFamily="34" charset="-120"/>
-              </a:rPr>
-              <a:t>기준 이미지 하나를 정하고 나머지를 거기에 맞춥니다. 밝기 · 대비 · 색온도 순서로.</a:t>
-            </a:r>
-            <a:endParaRPr lang="en-US" sz="1150" dirty="0"/>
-          </a:p>
-        </p:txBody>
-      </p:sp>
-      <p:sp>
-        <p:nvSpPr>
-          <p:cNvPr id="17" name="Shape 15"/>
-          <p:cNvSpPr/>
-          <p:nvPr/>
-        </p:nvSpPr>
-        <p:spPr>
-          <a:xfrm>
-            <a:off x="640080" y="3657600"/>
-            <a:ext cx="10911535" cy="822960"/>
-          </a:xfrm>
-          <a:prstGeom prst="rect">
-            <a:avLst/>
-          </a:prstGeom>
-          <a:solidFill>
-            <a:srgbClr val="FFFFFF"/>
-          </a:solidFill>
-          <a:ln w="12700">
-            <a:solidFill>
-              <a:srgbClr val="DCDCDC"/>
-            </a:solidFill>
-            <a:prstDash val="solid"/>
-          </a:ln>
-        </p:spPr>
-      </p:sp>
-      <p:sp>
-        <p:nvSpPr>
-          <p:cNvPr id="18" name="Text 16"/>
-          <p:cNvSpPr/>
-          <p:nvPr/>
-        </p:nvSpPr>
-        <p:spPr>
-          <a:xfrm>
-            <a:off x="1005840" y="3749040"/>
-            <a:ext cx="1188720" cy="640080"/>
-          </a:xfrm>
-          <a:prstGeom prst="rect">
-            <a:avLst/>
-          </a:prstGeom>
-          <a:noFill/>
-          <a:ln/>
-        </p:spPr>
-        <p:txBody>
-          <a:bodyPr wrap="square" lIns="0" tIns="0" rIns="0" bIns="0" rtlCol="0" anchor="ctr"/>
-          <a:lstStyle/>
-          <a:p>
-            <a:pPr indent="0" marL="0">
-              <a:buNone/>
-            </a:pPr>
-            <a:r>
-              <a:rPr lang="en-US" sz="2200" dirty="0">
-                <a:solidFill>
-                  <a:srgbClr val="111111"/>
-                </a:solidFill>
-                <a:latin typeface="Pretendard Light" pitchFamily="34" charset="0"/>
-                <a:ea typeface="Pretendard Light" pitchFamily="34" charset="-122"/>
-                <a:cs typeface="Pretendard Light" pitchFamily="34" charset="-120"/>
-              </a:rPr>
-              <a:t>28분</a:t>
-            </a:r>
-            <a:endParaRPr lang="en-US" sz="2200" dirty="0"/>
-          </a:p>
-        </p:txBody>
-      </p:sp>
-      <p:sp>
-        <p:nvSpPr>
-          <p:cNvPr id="19" name="Text 17"/>
-          <p:cNvSpPr/>
-          <p:nvPr/>
-        </p:nvSpPr>
-        <p:spPr>
-          <a:xfrm>
-            <a:off x="2286000" y="3749040"/>
-            <a:ext cx="3291840" cy="640080"/>
-          </a:xfrm>
-          <a:prstGeom prst="rect">
-            <a:avLst/>
-          </a:prstGeom>
-          <a:noFill/>
-          <a:ln/>
-        </p:spPr>
-        <p:txBody>
-          <a:bodyPr wrap="square" lIns="0" tIns="0" rIns="0" bIns="0" rtlCol="0" anchor="ctr"/>
-          <a:lstStyle/>
-          <a:p>
-            <a:pPr indent="0" marL="0">
-              <a:buNone/>
-            </a:pPr>
-            <a:r>
-              <a:rPr lang="en-US" sz="1450" dirty="0">
-                <a:solidFill>
-                  <a:srgbClr val="111111"/>
-                </a:solidFill>
-                <a:latin typeface="Pretendard Black" pitchFamily="34" charset="0"/>
-                <a:ea typeface="Pretendard Black" pitchFamily="34" charset="-122"/>
-                <a:cs typeface="Pretendard Black" pitchFamily="34" charset="-120"/>
-              </a:rPr>
-              <a:t>결과 페이지</a:t>
-            </a:r>
-            <a:endParaRPr lang="en-US" sz="1450" dirty="0"/>
-          </a:p>
-        </p:txBody>
-      </p:sp>
-      <p:sp>
-        <p:nvSpPr>
-          <p:cNvPr id="20" name="Text 18"/>
-          <p:cNvSpPr/>
-          <p:nvPr/>
-        </p:nvSpPr>
-        <p:spPr>
-          <a:xfrm>
-            <a:off x="5669280" y="3749040"/>
-            <a:ext cx="5516575" cy="640080"/>
-          </a:xfrm>
-          <a:prstGeom prst="rect">
-            <a:avLst/>
-          </a:prstGeom>
-          <a:noFill/>
-          <a:ln/>
-        </p:spPr>
-        <p:txBody>
-          <a:bodyPr wrap="square" lIns="0" tIns="0" rIns="0" bIns="0" rtlCol="0" anchor="ctr"/>
-          <a:lstStyle/>
-          <a:p>
-            <a:pPr indent="0" marL="0">
-              <a:lnSpc>
-                <a:spcPct val="124000"/>
-              </a:lnSpc>
-              <a:buNone/>
-            </a:pPr>
-            <a:r>
-              <a:rPr lang="en-US" sz="1150" dirty="0">
-                <a:solidFill>
-                  <a:srgbClr val="6E6E6E"/>
-                </a:solidFill>
-                <a:latin typeface="Pretendard" pitchFamily="34" charset="0"/>
-                <a:ea typeface="Pretendard" pitchFamily="34" charset="-122"/>
-                <a:cs typeface="Pretendard" pitchFamily="34" charset="-120"/>
-              </a:rPr>
-              <a:t>대표 이미지 하나를 크게 두고 나머지를 묶습니다. 그리드를 지킵니다.</a:t>
-            </a:r>
-            <a:endParaRPr lang="en-US" sz="1150" dirty="0"/>
-          </a:p>
-        </p:txBody>
-      </p:sp>
-      <p:sp>
-        <p:nvSpPr>
-          <p:cNvPr id="21" name="Shape 19"/>
-          <p:cNvSpPr/>
-          <p:nvPr/>
-        </p:nvSpPr>
-        <p:spPr>
-          <a:xfrm>
-            <a:off x="640080" y="4626864"/>
-            <a:ext cx="10911535" cy="822960"/>
-          </a:xfrm>
-          <a:prstGeom prst="rect">
+          <p:cNvPr id="15" name="Shape 13"/>
+          <p:cNvSpPr/>
+          <p:nvPr/>
+        </p:nvSpPr>
+        <p:spPr>
+          <a:xfrm>
+            <a:off x="969264" y="3017520"/>
+            <a:ext cx="329184" cy="329184"/>
+          </a:xfrm>
+          <a:prstGeom prst="ellipse">
             <a:avLst/>
           </a:prstGeom>
           <a:solidFill>
@@ -10314,14 +8442,223 @@
       </p:sp>
       <p:sp>
         <p:nvSpPr>
+          <p:cNvPr id="16" name="Text 14"/>
+          <p:cNvSpPr/>
+          <p:nvPr/>
+        </p:nvSpPr>
+        <p:spPr>
+          <a:xfrm>
+            <a:off x="969264" y="3017520"/>
+            <a:ext cx="329184" cy="329184"/>
+          </a:xfrm>
+          <a:prstGeom prst="rect">
+            <a:avLst/>
+          </a:prstGeom>
+          <a:noFill/>
+          <a:ln/>
+        </p:spPr>
+        <p:txBody>
+          <a:bodyPr wrap="square" lIns="0" tIns="0" rIns="0" bIns="0" rtlCol="0" anchor="ctr"/>
+          <a:lstStyle/>
+          <a:p>
+            <a:pPr algn="ctr" indent="0" marL="0">
+              <a:buNone/>
+            </a:pPr>
+            <a:r>
+              <a:rPr lang="en-US" sz="1100" b="1" dirty="0">
+                <a:solidFill>
+                  <a:srgbClr val="FFFFFF"/>
+                </a:solidFill>
+                <a:latin typeface="Pretendard" pitchFamily="34" charset="0"/>
+                <a:ea typeface="Pretendard" pitchFamily="34" charset="-122"/>
+                <a:cs typeface="Pretendard" pitchFamily="34" charset="-120"/>
+              </a:rPr>
+              <a:t>2</a:t>
+            </a:r>
+            <a:endParaRPr lang="en-US" sz="1100" dirty="0"/>
+          </a:p>
+        </p:txBody>
+      </p:sp>
+      <p:sp>
+        <p:nvSpPr>
+          <p:cNvPr id="17" name="Text 15"/>
+          <p:cNvSpPr/>
+          <p:nvPr/>
+        </p:nvSpPr>
+        <p:spPr>
+          <a:xfrm>
+            <a:off x="1426464" y="2834640"/>
+            <a:ext cx="5175504" cy="329184"/>
+          </a:xfrm>
+          <a:prstGeom prst="rect">
+            <a:avLst/>
+          </a:prstGeom>
+          <a:noFill/>
+          <a:ln/>
+        </p:spPr>
+        <p:txBody>
+          <a:bodyPr wrap="square" lIns="0" tIns="0" rIns="0" bIns="0" rtlCol="0" anchor="ctr"/>
+          <a:lstStyle/>
+          <a:p>
+            <a:pPr indent="0" marL="0">
+              <a:buNone/>
+            </a:pPr>
+            <a:r>
+              <a:rPr lang="en-US" sz="1400" dirty="0">
+                <a:solidFill>
+                  <a:srgbClr val="111111"/>
+                </a:solidFill>
+                <a:latin typeface="Pretendard SemiBold" pitchFamily="34" charset="0"/>
+                <a:ea typeface="Pretendard SemiBold" pitchFamily="34" charset="-122"/>
+                <a:cs typeface="Pretendard SemiBold" pitchFamily="34" charset="-120"/>
+              </a:rPr>
+              <a:t>플랫폼 후보 정하기</a:t>
+            </a:r>
+            <a:endParaRPr lang="en-US" sz="1400" dirty="0"/>
+          </a:p>
+        </p:txBody>
+      </p:sp>
+      <p:sp>
+        <p:nvSpPr>
+          <p:cNvPr id="18" name="Text 16"/>
+          <p:cNvSpPr/>
+          <p:nvPr/>
+        </p:nvSpPr>
+        <p:spPr>
+          <a:xfrm>
+            <a:off x="1426464" y="3145536"/>
+            <a:ext cx="5175504" cy="420624"/>
+          </a:xfrm>
+          <a:prstGeom prst="rect">
+            <a:avLst/>
+          </a:prstGeom>
+          <a:noFill/>
+          <a:ln/>
+        </p:spPr>
+        <p:txBody>
+          <a:bodyPr wrap="square" lIns="0" tIns="0" rIns="0" bIns="0" rtlCol="0" anchor="t"/>
+          <a:lstStyle/>
+          <a:p>
+            <a:pPr indent="0" marL="0">
+              <a:lnSpc>
+                <a:spcPct val="122000"/>
+              </a:lnSpc>
+              <a:buNone/>
+            </a:pPr>
+            <a:r>
+              <a:rPr lang="en-US" sz="1100" dirty="0">
+                <a:solidFill>
+                  <a:srgbClr val="6E6E6E"/>
+                </a:solidFill>
+                <a:latin typeface="Pretendard" pitchFamily="34" charset="0"/>
+                <a:ea typeface="Pretendard" pitchFamily="34" charset="-122"/>
+                <a:cs typeface="Pretendard" pitchFamily="34" charset="-120"/>
+              </a:rPr>
+              <a:t>12주차 실습 전에 노션 · 웹빌더 · PDF 중 어디로 갈지 후보를 정해 오세요.</a:t>
+            </a:r>
+            <a:endParaRPr lang="en-US" sz="1100" dirty="0"/>
+          </a:p>
+        </p:txBody>
+      </p:sp>
+      <p:sp>
+        <p:nvSpPr>
+          <p:cNvPr id="19" name="Shape 17"/>
+          <p:cNvSpPr/>
+          <p:nvPr/>
+        </p:nvSpPr>
+        <p:spPr>
+          <a:xfrm>
+            <a:off x="640080" y="3785616"/>
+            <a:ext cx="6309360" cy="7315"/>
+          </a:xfrm>
+          <a:prstGeom prst="rect">
+            <a:avLst/>
+          </a:prstGeom>
+          <a:solidFill>
+            <a:srgbClr val="111111"/>
+          </a:solidFill>
+          <a:ln w="12700">
+            <a:solidFill>
+              <a:srgbClr val="111111"/>
+            </a:solidFill>
+            <a:prstDash val="solid"/>
+          </a:ln>
+        </p:spPr>
+      </p:sp>
+      <p:sp>
+        <p:nvSpPr>
+          <p:cNvPr id="20" name="Text 18"/>
+          <p:cNvSpPr/>
+          <p:nvPr/>
+        </p:nvSpPr>
+        <p:spPr>
+          <a:xfrm>
+            <a:off x="640080" y="3877056"/>
+            <a:ext cx="6309360" cy="329184"/>
+          </a:xfrm>
+          <a:prstGeom prst="rect">
+            <a:avLst/>
+          </a:prstGeom>
+          <a:noFill/>
+          <a:ln/>
+        </p:spPr>
+        <p:txBody>
+          <a:bodyPr wrap="square" lIns="0" tIns="0" rIns="0" bIns="0" rtlCol="0" anchor="ctr"/>
+          <a:lstStyle/>
+          <a:p>
+            <a:pPr indent="0" marL="0">
+              <a:buNone/>
+            </a:pPr>
+            <a:r>
+              <a:rPr lang="en-US" sz="1200" b="1" dirty="0">
+                <a:solidFill>
+                  <a:srgbClr val="111111"/>
+                </a:solidFill>
+                <a:latin typeface="Pretendard" pitchFamily="34" charset="0"/>
+                <a:ea typeface="Pretendard" pitchFamily="34" charset="-122"/>
+                <a:cs typeface="Pretendard" pitchFamily="34" charset="-120"/>
+              </a:rPr>
+              <a:t>제출 — 12주차 수업 전까지 · 총 6장 제출</a:t>
+            </a:r>
+            <a:endParaRPr lang="en-US" sz="1200" dirty="0"/>
+          </a:p>
+        </p:txBody>
+      </p:sp>
+      <p:sp>
+        <p:nvSpPr>
+          <p:cNvPr id="21" name="Shape 19"/>
+          <p:cNvSpPr/>
+          <p:nvPr/>
+        </p:nvSpPr>
+        <p:spPr>
+          <a:xfrm>
+            <a:off x="7351776" y="1719072"/>
+            <a:ext cx="4199839" cy="3803904"/>
+          </a:xfrm>
+          <a:prstGeom prst="rect">
+            <a:avLst/>
+          </a:prstGeom>
+          <a:solidFill>
+            <a:srgbClr val="111111"/>
+          </a:solidFill>
+          <a:ln w="12700">
+            <a:solidFill>
+              <a:srgbClr val="111111"/>
+            </a:solidFill>
+            <a:prstDash val="solid"/>
+          </a:ln>
+        </p:spPr>
+      </p:sp>
+      <p:sp>
+        <p:nvSpPr>
           <p:cNvPr id="22" name="Text 20"/>
           <p:cNvSpPr/>
           <p:nvPr/>
         </p:nvSpPr>
         <p:spPr>
           <a:xfrm>
-            <a:off x="1005840" y="4718304"/>
-            <a:ext cx="1188720" cy="640080"/>
+            <a:off x="7735824" y="1993392"/>
+            <a:ext cx="3431743" cy="256032"/>
           </a:xfrm>
           <a:prstGeom prst="rect">
             <a:avLst/>
@@ -10337,7 +8674,46 @@
               <a:buNone/>
             </a:pPr>
             <a:r>
-              <a:rPr lang="en-US" sz="2200" dirty="0">
+              <a:rPr lang="en-US" sz="950" spc="260" kern="0" dirty="0">
+                <a:solidFill>
+                  <a:srgbClr val="9A9A9A"/>
+                </a:solidFill>
+                <a:latin typeface="Pretendard" pitchFamily="34" charset="0"/>
+                <a:ea typeface="Pretendard" pitchFamily="34" charset="-122"/>
+                <a:cs typeface="Pretendard" pitchFamily="34" charset="-120"/>
+              </a:rPr>
+              <a:t>NEXT WEEK</a:t>
+            </a:r>
+            <a:endParaRPr lang="en-US" sz="950" dirty="0"/>
+          </a:p>
+        </p:txBody>
+      </p:sp>
+      <p:sp>
+        <p:nvSpPr>
+          <p:cNvPr id="23" name="Text 21"/>
+          <p:cNvSpPr/>
+          <p:nvPr/>
+        </p:nvSpPr>
+        <p:spPr>
+          <a:xfrm>
+            <a:off x="7735824" y="2286000"/>
+            <a:ext cx="3431743" cy="402336"/>
+          </a:xfrm>
+          <a:prstGeom prst="rect">
+            <a:avLst/>
+          </a:prstGeom>
+          <a:noFill/>
+          <a:ln/>
+        </p:spPr>
+        <p:txBody>
+          <a:bodyPr wrap="square" lIns="0" tIns="0" rIns="0" bIns="0" rtlCol="0" anchor="ctr"/>
+          <a:lstStyle/>
+          <a:p>
+            <a:pPr indent="0" marL="0">
+              <a:buNone/>
+            </a:pPr>
+            <a:r>
+              <a:rPr lang="en-US" sz="2600" dirty="0">
                 <a:solidFill>
                   <a:srgbClr val="FFFFFF"/>
                 </a:solidFill>
@@ -10345,48 +8721,9 @@
                 <a:ea typeface="Pretendard Light" pitchFamily="34" charset="-122"/>
                 <a:cs typeface="Pretendard Light" pitchFamily="34" charset="-120"/>
               </a:rPr>
-              <a:t>14분</a:t>
-            </a:r>
-            <a:endParaRPr lang="en-US" sz="2200" dirty="0"/>
-          </a:p>
-        </p:txBody>
-      </p:sp>
-      <p:sp>
-        <p:nvSpPr>
-          <p:cNvPr id="23" name="Text 21"/>
-          <p:cNvSpPr/>
-          <p:nvPr/>
-        </p:nvSpPr>
-        <p:spPr>
-          <a:xfrm>
-            <a:off x="2286000" y="4718304"/>
-            <a:ext cx="3291840" cy="640080"/>
-          </a:xfrm>
-          <a:prstGeom prst="rect">
-            <a:avLst/>
-          </a:prstGeom>
-          <a:noFill/>
-          <a:ln/>
-        </p:spPr>
-        <p:txBody>
-          <a:bodyPr wrap="square" lIns="0" tIns="0" rIns="0" bIns="0" rtlCol="0" anchor="ctr"/>
-          <a:lstStyle/>
-          <a:p>
-            <a:pPr indent="0" marL="0">
-              <a:buNone/>
-            </a:pPr>
-            <a:r>
-              <a:rPr lang="en-US" sz="1450" dirty="0">
-                <a:solidFill>
-                  <a:srgbClr val="FFFFFF"/>
-                </a:solidFill>
-                <a:latin typeface="Pretendard Black" pitchFamily="34" charset="0"/>
-                <a:ea typeface="Pretendard Black" pitchFamily="34" charset="-122"/>
-                <a:cs typeface="Pretendard Black" pitchFamily="34" charset="-120"/>
-              </a:rPr>
-              <a:t>전체 훑기</a:t>
-            </a:r>
-            <a:endParaRPr lang="en-US" sz="1450" dirty="0"/>
+              <a:t>12주차</a:t>
+            </a:r>
+            <a:endParaRPr lang="en-US" sz="2600" dirty="0"/>
           </a:p>
         </p:txBody>
       </p:sp>
@@ -10398,43 +8735,292 @@
         </p:nvSpPr>
         <p:spPr>
           <a:xfrm>
-            <a:off x="5669280" y="4718304"/>
-            <a:ext cx="5516575" cy="640080"/>
-          </a:xfrm>
-          <a:prstGeom prst="rect">
-            <a:avLst/>
-          </a:prstGeom>
-          <a:noFill/>
-          <a:ln/>
-        </p:spPr>
-        <p:txBody>
-          <a:bodyPr wrap="square" lIns="0" tIns="0" rIns="0" bIns="0" rtlCol="0" anchor="ctr"/>
+            <a:off x="7735824" y="2743200"/>
+            <a:ext cx="3431743" cy="512064"/>
+          </a:xfrm>
+          <a:prstGeom prst="rect">
+            <a:avLst/>
+          </a:prstGeom>
+          <a:noFill/>
+          <a:ln/>
+        </p:spPr>
+        <p:txBody>
+          <a:bodyPr wrap="square" lIns="0" tIns="0" rIns="0" bIns="0" rtlCol="0" anchor="t"/>
           <a:lstStyle/>
           <a:p>
             <a:pPr indent="0" marL="0">
               <a:lnSpc>
-                <a:spcPct val="124000"/>
+                <a:spcPct val="116000"/>
               </a:lnSpc>
               <a:buNone/>
             </a:pPr>
             <a:r>
+              <a:rPr lang="en-US" sz="1700" dirty="0">
+                <a:solidFill>
+                  <a:srgbClr val="FFFFFF"/>
+                </a:solidFill>
+                <a:latin typeface="Pretendard SemiBold" pitchFamily="34" charset="0"/>
+                <a:ea typeface="Pretendard SemiBold" pitchFamily="34" charset="-122"/>
+                <a:cs typeface="Pretendard SemiBold" pitchFamily="34" charset="-120"/>
+              </a:rPr>
+              <a:t>온라인 포트폴리오 제작 실습</a:t>
+            </a:r>
+            <a:endParaRPr lang="en-US" sz="1700" dirty="0"/>
+          </a:p>
+        </p:txBody>
+      </p:sp>
+      <p:sp>
+        <p:nvSpPr>
+          <p:cNvPr id="25" name="Shape 23"/>
+          <p:cNvSpPr/>
+          <p:nvPr/>
+        </p:nvSpPr>
+        <p:spPr>
+          <a:xfrm>
+            <a:off x="7735824" y="3346704"/>
+            <a:ext cx="3431743" cy="7315"/>
+          </a:xfrm>
+          <a:prstGeom prst="rect">
+            <a:avLst/>
+          </a:prstGeom>
+          <a:solidFill>
+            <a:srgbClr val="333333"/>
+          </a:solidFill>
+          <a:ln w="12700">
+            <a:solidFill>
+              <a:srgbClr val="333333"/>
+            </a:solidFill>
+            <a:prstDash val="solid"/>
+          </a:ln>
+        </p:spPr>
+      </p:sp>
+      <p:sp>
+        <p:nvSpPr>
+          <p:cNvPr id="26" name="Text 24"/>
+          <p:cNvSpPr/>
+          <p:nvPr/>
+        </p:nvSpPr>
+        <p:spPr>
+          <a:xfrm>
+            <a:off x="7735824" y="3493008"/>
+            <a:ext cx="3431743" cy="1170432"/>
+          </a:xfrm>
+          <a:prstGeom prst="rect">
+            <a:avLst/>
+          </a:prstGeom>
+          <a:noFill/>
+          <a:ln/>
+        </p:spPr>
+        <p:txBody>
+          <a:bodyPr wrap="square" lIns="0" tIns="0" rIns="0" bIns="0" rtlCol="0" anchor="t"/>
+          <a:lstStyle/>
+          <a:p>
+            <a:pPr marL="177800" indent="-177800">
+              <a:lnSpc>
+                <a:spcPct val="120000"/>
+              </a:lnSpc>
+              <a:spcAft>
+                <a:spcPts val="600"/>
+              </a:spcAft>
+              <a:buSzPct val="100000"/>
+              <a:buChar char="•"/>
+            </a:pPr>
+            <a:r>
               <a:rPr lang="en-US" sz="1150" dirty="0">
                 <a:solidFill>
-                  <a:srgbClr val="B8B8B8"/>
-                </a:solidFill>
-                <a:latin typeface="Pretendard" pitchFamily="34" charset="0"/>
-                <a:ea typeface="Pretendard" pitchFamily="34" charset="-122"/>
-                <a:cs typeface="Pretendard" pitchFamily="34" charset="-120"/>
-              </a:rPr>
-              <a:t>10주차분과 이어 붙여 6장을 연속으로 넘겨 봅니다. 한 벌로 보이는지 확인합니다.</a:t>
+                  <a:srgbClr val="DDDDDD"/>
+                </a:solidFill>
+                <a:latin typeface="Pretendard" pitchFamily="34" charset="0"/>
+                <a:ea typeface="Pretendard" pitchFamily="34" charset="-122"/>
+                <a:cs typeface="Pretendard" pitchFamily="34" charset="-120"/>
+              </a:rPr>
+              <a:t>플랫폼별 장단점 — 노션 · 웹빌더 · PDF</a:t>
             </a:r>
             <a:endParaRPr lang="en-US" sz="1150" dirty="0"/>
           </a:p>
-        </p:txBody>
-      </p:sp>
-      <p:sp>
-        <p:nvSpPr>
-          <p:cNvPr id="25" name="Shape 23"/>
+          <a:p>
+            <a:pPr marL="177800" indent="-177800">
+              <a:lnSpc>
+                <a:spcPct val="120000"/>
+              </a:lnSpc>
+              <a:spcAft>
+                <a:spcPts val="600"/>
+              </a:spcAft>
+              <a:buSzPct val="100000"/>
+              <a:buChar char="•"/>
+            </a:pPr>
+            <a:r>
+              <a:rPr lang="en-US" sz="1150" dirty="0">
+                <a:solidFill>
+                  <a:srgbClr val="DDDDDD"/>
+                </a:solidFill>
+                <a:latin typeface="Pretendard" pitchFamily="34" charset="0"/>
+                <a:ea typeface="Pretendard" pitchFamily="34" charset="-122"/>
+                <a:cs typeface="Pretendard" pitchFamily="34" charset="-120"/>
+              </a:rPr>
+              <a:t>반응형 레이아웃 고려사항</a:t>
+            </a:r>
+            <a:endParaRPr lang="en-US" sz="1150" dirty="0"/>
+          </a:p>
+          <a:p>
+            <a:pPr marL="177800" indent="-177800">
+              <a:lnSpc>
+                <a:spcPct val="120000"/>
+              </a:lnSpc>
+              <a:spcAft>
+                <a:spcPts val="600"/>
+              </a:spcAft>
+              <a:buSzPct val="100000"/>
+              <a:buChar char="•"/>
+            </a:pPr>
+            <a:r>
+              <a:rPr lang="en-US" sz="1150" dirty="0">
+                <a:solidFill>
+                  <a:srgbClr val="DDDDDD"/>
+                </a:solidFill>
+                <a:latin typeface="Pretendard" pitchFamily="34" charset="0"/>
+                <a:ea typeface="Pretendard" pitchFamily="34" charset="-122"/>
+                <a:cs typeface="Pretendard" pitchFamily="34" charset="-120"/>
+              </a:rPr>
+              <a:t>업로드 및 공유 설정</a:t>
+            </a:r>
+            <a:endParaRPr lang="en-US" sz="1150" dirty="0"/>
+          </a:p>
+          <a:p>
+            <a:pPr marL="177800" indent="-177800">
+              <a:lnSpc>
+                <a:spcPct val="120000"/>
+              </a:lnSpc>
+              <a:spcAft>
+                <a:spcPts val="600"/>
+              </a:spcAft>
+              <a:buSzPct val="100000"/>
+              <a:buChar char="•"/>
+            </a:pPr>
+            <a:r>
+              <a:rPr lang="en-US" sz="1150" dirty="0">
+                <a:solidFill>
+                  <a:srgbClr val="DDDDDD"/>
+                </a:solidFill>
+                <a:latin typeface="Pretendard" pitchFamily="34" charset="0"/>
+                <a:ea typeface="Pretendard" pitchFamily="34" charset="-122"/>
+                <a:cs typeface="Pretendard" pitchFamily="34" charset="-120"/>
+              </a:rPr>
+              <a:t>온라인 초안 제작</a:t>
+            </a:r>
+            <a:endParaRPr lang="en-US" sz="1150" dirty="0"/>
+          </a:p>
+        </p:txBody>
+      </p:sp>
+      <p:sp>
+        <p:nvSpPr>
+          <p:cNvPr id="27" name="Shape 25"/>
+          <p:cNvSpPr/>
+          <p:nvPr/>
+        </p:nvSpPr>
+        <p:spPr>
+          <a:xfrm>
+            <a:off x="7735824" y="4700016"/>
+            <a:ext cx="3431743" cy="7315"/>
+          </a:xfrm>
+          <a:prstGeom prst="rect">
+            <a:avLst/>
+          </a:prstGeom>
+          <a:solidFill>
+            <a:srgbClr val="333333"/>
+          </a:solidFill>
+          <a:ln w="12700">
+            <a:solidFill>
+              <a:srgbClr val="333333"/>
+            </a:solidFill>
+            <a:prstDash val="solid"/>
+          </a:ln>
+        </p:spPr>
+      </p:sp>
+      <p:sp>
+        <p:nvSpPr>
+          <p:cNvPr id="28" name="Text 26"/>
+          <p:cNvSpPr/>
+          <p:nvPr/>
+        </p:nvSpPr>
+        <p:spPr>
+          <a:xfrm>
+            <a:off x="7735824" y="4809744"/>
+            <a:ext cx="3431743" cy="237744"/>
+          </a:xfrm>
+          <a:prstGeom prst="rect">
+            <a:avLst/>
+          </a:prstGeom>
+          <a:noFill/>
+          <a:ln/>
+        </p:spPr>
+        <p:txBody>
+          <a:bodyPr wrap="square" lIns="0" tIns="0" rIns="0" bIns="0" rtlCol="0" anchor="ctr"/>
+          <a:lstStyle/>
+          <a:p>
+            <a:pPr indent="0" marL="0">
+              <a:buNone/>
+            </a:pPr>
+            <a:r>
+              <a:rPr lang="en-US" sz="900" spc="160" kern="0" dirty="0">
+                <a:solidFill>
+                  <a:srgbClr val="9B9B9B"/>
+                </a:solidFill>
+                <a:latin typeface="Pretendard" pitchFamily="34" charset="0"/>
+                <a:ea typeface="Pretendard" pitchFamily="34" charset="-122"/>
+                <a:cs typeface="Pretendard" pitchFamily="34" charset="-120"/>
+              </a:rPr>
+              <a:t>미리 준비할 것</a:t>
+            </a:r>
+            <a:endParaRPr lang="en-US" sz="900" dirty="0"/>
+          </a:p>
+        </p:txBody>
+      </p:sp>
+      <p:sp>
+        <p:nvSpPr>
+          <p:cNvPr id="29" name="Text 27"/>
+          <p:cNvSpPr/>
+          <p:nvPr/>
+        </p:nvSpPr>
+        <p:spPr>
+          <a:xfrm>
+            <a:off x="7735824" y="5065776"/>
+            <a:ext cx="3431743" cy="457200"/>
+          </a:xfrm>
+          <a:prstGeom prst="rect">
+            <a:avLst/>
+          </a:prstGeom>
+          <a:noFill/>
+          <a:ln/>
+        </p:spPr>
+        <p:txBody>
+          <a:bodyPr wrap="square" lIns="0" tIns="0" rIns="0" bIns="0" rtlCol="0" anchor="t"/>
+          <a:lstStyle/>
+          <a:p>
+            <a:pPr indent="0" marL="0">
+              <a:lnSpc>
+                <a:spcPct val="120000"/>
+              </a:lnSpc>
+              <a:buNone/>
+            </a:pPr>
+            <a:r>
+              <a:rPr lang="en-US" sz="1100" b="1" dirty="0">
+                <a:solidFill>
+                  <a:srgbClr val="FFFFFF"/>
+                </a:solidFill>
+                <a:latin typeface="Pretendard" pitchFamily="34" charset="0"/>
+                <a:ea typeface="Pretendard" pitchFamily="34" charset="-122"/>
+                <a:cs typeface="Pretendard" pitchFamily="34" charset="-120"/>
+              </a:rPr>
+              <a:t>완성한 페이지 6장 · 플랫폼 후보 · 노트북</a:t>
+            </a:r>
+            <a:endParaRPr lang="en-US" sz="1100" dirty="0"/>
+          </a:p>
+        </p:txBody>
+      </p:sp>
+      <p:sp>
+        <p:nvSpPr>
+          <p:cNvPr id="30" name="Shape 28"/>
           <p:cNvSpPr/>
           <p:nvPr/>
         </p:nvSpPr>
@@ -10459,7 +9045,7 @@
       </p:sp>
       <p:sp>
         <p:nvSpPr>
-          <p:cNvPr id="26" name="Text 24"/>
+          <p:cNvPr id="31" name="Text 29"/>
           <p:cNvSpPr/>
           <p:nvPr/>
         </p:nvSpPr>
@@ -10498,7 +9084,7 @@
       </p:sp>
       <p:sp>
         <p:nvSpPr>
-          <p:cNvPr id="27" name="Text 25"/>
+          <p:cNvPr id="32" name="Text 30"/>
           <p:cNvSpPr/>
           <p:nvPr/>
         </p:nvSpPr>
